--- a/slides/exports/architecture2026_text.pptx
+++ b/slides/exports/architecture2026_text.pptx
@@ -1417,13 +1417,13 @@
         </p:nvSpPr>
         <p:spPr>
           <a:xfrm>
-            <a:off x="10538369" y="-2539563"/>
-            <a:ext cx="3301167" cy="3301167"/>
+            <a:off x="10543032" y="-2103120"/>
+            <a:ext cx="3291840" cy="3291840"/>
           </a:xfrm>
           <a:prstGeom prst="ellipse">
             <a:avLst/>
           </a:prstGeom>
-          <a:ln w="19050">
+          <a:ln w="15240">
             <a:solidFill>
               <a:srgbClr val="17140F"/>
             </a:solidFill>
@@ -1439,13 +1439,13 @@
         </p:nvSpPr>
         <p:spPr>
           <a:xfrm>
-            <a:off x="10728838" y="381213"/>
-            <a:ext cx="1396655" cy="1396655"/>
+            <a:off x="10497312" y="-320040"/>
+            <a:ext cx="1371600" cy="1371600"/>
           </a:xfrm>
           <a:prstGeom prst="ellipse">
             <a:avLst/>
           </a:prstGeom>
-          <a:ln w="19050">
+          <a:ln w="15240">
             <a:solidFill>
               <a:srgbClr val="17140F"/>
             </a:solidFill>
@@ -1461,8 +1461,8 @@
         </p:nvSpPr>
         <p:spPr>
           <a:xfrm>
-            <a:off x="761787" y="1651041"/>
-            <a:ext cx="5713537" cy="304770"/>
+            <a:off x="914400" y="1371600"/>
+            <a:ext cx="6400800" cy="411480"/>
           </a:xfrm>
           <a:prstGeom prst="rect">
             <a:avLst/>
@@ -1474,7 +1474,7 @@
           <a:bodyPr wrap="square" rtlCol="0" anchor="t"/>
           <a:lstStyle/>
           <a:p>
-            <a:pPr indent="0" marL="0">
+            <a:pPr algn="l" indent="0" marL="0">
               <a:buNone/>
             </a:pPr>
             <a:r>
@@ -1500,8 +1500,8 @@
         </p:nvSpPr>
         <p:spPr>
           <a:xfrm>
-            <a:off x="761787" y="1968520"/>
-            <a:ext cx="8887785" cy="3556010"/>
+            <a:off x="914400" y="1783080"/>
+            <a:ext cx="8229600" cy="3200400"/>
           </a:xfrm>
           <a:prstGeom prst="rect">
             <a:avLst/>
@@ -1513,14 +1513,14 @@
           <a:bodyPr wrap="square" rtlCol="0" anchor="t"/>
           <a:lstStyle/>
           <a:p>
-            <a:pPr indent="0" marL="0">
-              <a:lnSpc>
-                <a:spcPct val="92000"/>
-              </a:lnSpc>
-              <a:buNone/>
-            </a:pPr>
-            <a:r>
-              <a:rPr lang="en-US" sz="9800" b="1" dirty="0">
+            <a:pPr algn="l" indent="0" marL="0">
+              <a:lnSpc>
+                <a:spcPct val="95000"/>
+              </a:lnSpc>
+              <a:buNone/>
+            </a:pPr>
+            <a:r>
+              <a:rPr lang="en-US" sz="7200" b="1" dirty="0">
                 <a:solidFill>
                   <a:srgbClr val="17140F"/>
                 </a:solidFill>
@@ -1530,14 +1530,14 @@
               </a:rPr>
               <a:t>建築</a:t>
             </a:r>
-            <a:pPr indent="0" marL="0">
-              <a:lnSpc>
-                <a:spcPct val="92000"/>
-              </a:lnSpc>
-              <a:buNone/>
-            </a:pPr>
-            <a:r>
-              <a:rPr lang="en-US" sz="9800" b="1" dirty="0">
+            <a:pPr algn="l" indent="0" marL="0">
+              <a:lnSpc>
+                <a:spcPct val="95000"/>
+              </a:lnSpc>
+              <a:buNone/>
+            </a:pPr>
+            <a:r>
+              <a:rPr lang="en-US" sz="7200" b="1" dirty="0">
                 <a:solidFill>
                   <a:srgbClr val="17140F"/>
                 </a:solidFill>
@@ -1548,14 +1548,14 @@
               <a:t>
 </a:t>
             </a:r>
-            <a:pPr indent="0" marL="0">
-              <a:lnSpc>
-                <a:spcPct val="92000"/>
-              </a:lnSpc>
-              <a:buNone/>
-            </a:pPr>
-            <a:r>
-              <a:rPr lang="en-US" sz="9800" b="1" dirty="0">
+            <a:pPr algn="l" indent="0" marL="0">
+              <a:lnSpc>
+                <a:spcPct val="95000"/>
+              </a:lnSpc>
+              <a:buNone/>
+            </a:pPr>
+            <a:r>
+              <a:rPr lang="en-US" sz="7200" b="1" dirty="0">
                 <a:solidFill>
                   <a:srgbClr val="17140F"/>
                 </a:solidFill>
@@ -1565,14 +1565,14 @@
               </a:rPr>
               <a:t>トレンド </a:t>
             </a:r>
-            <a:pPr indent="0" marL="0">
-              <a:lnSpc>
-                <a:spcPct val="92000"/>
-              </a:lnSpc>
-              <a:buNone/>
-            </a:pPr>
-            <a:r>
-              <a:rPr lang="en-US" sz="5400" b="1" i="1" dirty="0">
+            <a:pPr algn="l" indent="0" marL="0">
+              <a:lnSpc>
+                <a:spcPct val="95000"/>
+              </a:lnSpc>
+              <a:buNone/>
+            </a:pPr>
+            <a:r>
+              <a:rPr lang="en-US" sz="4200" b="1" i="1" dirty="0">
                 <a:solidFill>
                   <a:srgbClr val="17140F"/>
                 </a:solidFill>
@@ -1582,7 +1582,7 @@
               </a:rPr>
               <a:t>2026.</a:t>
             </a:r>
-            <a:endParaRPr lang="en-US" sz="9800" dirty="0"/>
+            <a:endParaRPr lang="en-US" sz="7200" dirty="0"/>
           </a:p>
         </p:txBody>
       </p:sp>
@@ -1594,8 +1594,8 @@
         </p:nvSpPr>
         <p:spPr>
           <a:xfrm>
-            <a:off x="761787" y="5333970"/>
-            <a:ext cx="4570903" cy="13716"/>
+            <a:off x="914400" y="5212080"/>
+            <a:ext cx="4572000" cy="10973"/>
           </a:xfrm>
           <a:prstGeom prst="rect">
             <a:avLst/>
@@ -1614,8 +1614,8 @@
         </p:nvSpPr>
         <p:spPr>
           <a:xfrm>
-            <a:off x="914126" y="5448270"/>
-            <a:ext cx="4443893" cy="1270010"/>
+            <a:off x="1097280" y="5257800"/>
+            <a:ext cx="4572000" cy="1280160"/>
           </a:xfrm>
           <a:prstGeom prst="rect">
             <a:avLst/>
@@ -1627,14 +1627,14 @@
           <a:bodyPr wrap="square" rtlCol="0" anchor="t"/>
           <a:lstStyle/>
           <a:p>
-            <a:pPr indent="0" marL="0">
+            <a:pPr algn="l" indent="0" marL="0">
               <a:lnSpc>
                 <a:spcPct val="185000"/>
               </a:lnSpc>
               <a:buNone/>
             </a:pPr>
             <a:r>
-              <a:rPr lang="en-US" sz="1200" dirty="0">
+              <a:rPr lang="en-US" sz="1600" dirty="0">
                 <a:solidFill>
                   <a:srgbClr val="2B251E"/>
                 </a:solidFill>
@@ -1644,17 +1644,17 @@
               </a:rPr>
               <a:t>気候、素材、知能、そして人。</a:t>
             </a:r>
-            <a:endParaRPr lang="en-US" sz="1200" dirty="0"/>
-          </a:p>
-          <a:p>
-            <a:pPr indent="0" marL="0">
+            <a:endParaRPr lang="en-US" sz="1600" dirty="0"/>
+          </a:p>
+          <a:p>
+            <a:pPr algn="l" indent="0" marL="0">
               <a:lnSpc>
                 <a:spcPct val="185000"/>
               </a:lnSpc>
               <a:buNone/>
             </a:pPr>
             <a:r>
-              <a:rPr lang="en-US" sz="1200" dirty="0">
+              <a:rPr lang="en-US" sz="1600" dirty="0">
                 <a:solidFill>
                   <a:srgbClr val="2B251E"/>
                 </a:solidFill>
@@ -1664,17 +1664,17 @@
               </a:rPr>
               <a:t>5つのキーワードで、</a:t>
             </a:r>
-            <a:endParaRPr lang="en-US" sz="1200" dirty="0"/>
-          </a:p>
-          <a:p>
-            <a:pPr indent="0" marL="0">
+            <a:endParaRPr lang="en-US" sz="1600" dirty="0"/>
+          </a:p>
+          <a:p>
+            <a:pPr algn="l" indent="0" marL="0">
               <a:lnSpc>
                 <a:spcPct val="185000"/>
               </a:lnSpc>
               <a:buNone/>
             </a:pPr>
             <a:r>
-              <a:rPr lang="en-US" sz="1200" dirty="0">
+              <a:rPr lang="en-US" sz="1600" dirty="0">
                 <a:solidFill>
                   <a:srgbClr val="2B251E"/>
                 </a:solidFill>
@@ -1684,7 +1684,7 @@
               </a:rPr>
               <a:t>次の建築の輪郭をたどる。</a:t>
             </a:r>
-            <a:endParaRPr lang="en-US" sz="1200" dirty="0"/>
+            <a:endParaRPr lang="en-US" sz="1600" dirty="0"/>
           </a:p>
         </p:txBody>
       </p:sp>
@@ -1728,13 +1728,13 @@
         </p:nvSpPr>
         <p:spPr>
           <a:xfrm>
-            <a:off x="355519" y="5969203"/>
-            <a:ext cx="888797" cy="888797"/>
+            <a:off x="18288" y="5961888"/>
+            <a:ext cx="877824" cy="877824"/>
           </a:xfrm>
           <a:prstGeom prst="ellipse">
             <a:avLst/>
           </a:prstGeom>
-          <a:ln w="19050">
+          <a:ln w="15240">
             <a:solidFill>
               <a:srgbClr val="17140F"/>
             </a:solidFill>
@@ -1750,8 +1750,8 @@
         </p:nvSpPr>
         <p:spPr>
           <a:xfrm>
-            <a:off x="761787" y="761970"/>
-            <a:ext cx="1777594" cy="634959"/>
+            <a:off x="914400" y="914400"/>
+            <a:ext cx="1645920" cy="822960"/>
           </a:xfrm>
           <a:prstGeom prst="rect">
             <a:avLst/>
@@ -1763,11 +1763,11 @@
           <a:bodyPr wrap="square" rtlCol="0" anchor="t"/>
           <a:lstStyle/>
           <a:p>
-            <a:pPr indent="0" marL="0">
-              <a:buNone/>
-            </a:pPr>
-            <a:r>
-              <a:rPr lang="en-US" sz="3600" b="1" dirty="0">
+            <a:pPr algn="l" indent="0" marL="0">
+              <a:buNone/>
+            </a:pPr>
+            <a:r>
+              <a:rPr lang="en-US" sz="4000" b="1" dirty="0">
                 <a:solidFill>
                   <a:srgbClr val="17140F"/>
                 </a:solidFill>
@@ -1777,7 +1777,7 @@
               </a:rPr>
               <a:t>目次</a:t>
             </a:r>
-            <a:endParaRPr lang="en-US" sz="3600" dirty="0"/>
+            <a:endParaRPr lang="en-US" sz="4000" dirty="0"/>
           </a:p>
         </p:txBody>
       </p:sp>
@@ -1789,8 +1789,8 @@
         </p:nvSpPr>
         <p:spPr>
           <a:xfrm>
-            <a:off x="761787" y="1346180"/>
-            <a:ext cx="1777594" cy="36576"/>
+            <a:off x="914400" y="1719072"/>
+            <a:ext cx="1645920" cy="34747"/>
           </a:xfrm>
           <a:prstGeom prst="rect">
             <a:avLst/>
@@ -1809,8 +1809,8 @@
         </p:nvSpPr>
         <p:spPr>
           <a:xfrm>
-            <a:off x="761787" y="1587490"/>
-            <a:ext cx="1650583" cy="2286000"/>
+            <a:off x="914400" y="1874520"/>
+            <a:ext cx="1645920" cy="1828800"/>
           </a:xfrm>
           <a:prstGeom prst="rect">
             <a:avLst/>
@@ -1822,14 +1822,14 @@
           <a:bodyPr wrap="square" rtlCol="0" anchor="t"/>
           <a:lstStyle/>
           <a:p>
-            <a:pPr indent="0" marL="0">
+            <a:pPr algn="l" indent="0" marL="0">
               <a:lnSpc>
                 <a:spcPct val="190000"/>
               </a:lnSpc>
               <a:buNone/>
             </a:pPr>
             <a:r>
-              <a:rPr lang="en-US" sz="1100" dirty="0">
+              <a:rPr lang="en-US" sz="1300" dirty="0">
                 <a:solidFill>
                   <a:srgbClr val="2B251E"/>
                 </a:solidFill>
@@ -1839,17 +1839,17 @@
               </a:rPr>
               <a:t>この号で追いかける5つの主題。</a:t>
             </a:r>
-            <a:endParaRPr lang="en-US" sz="1100" dirty="0"/>
-          </a:p>
-          <a:p>
-            <a:pPr indent="0" marL="0">
+            <a:endParaRPr lang="en-US" sz="1300" dirty="0"/>
+          </a:p>
+          <a:p>
+            <a:pPr algn="l" indent="0" marL="0">
               <a:lnSpc>
                 <a:spcPct val="190000"/>
               </a:lnSpc>
               <a:buNone/>
             </a:pPr>
             <a:r>
-              <a:rPr lang="en-US" sz="1100" dirty="0">
+              <a:rPr lang="en-US" sz="1300" dirty="0">
                 <a:solidFill>
                   <a:srgbClr val="2B251E"/>
                 </a:solidFill>
@@ -1859,17 +1859,17 @@
               </a:rPr>
               <a:t>どれも独立した流れでありながら、</a:t>
             </a:r>
-            <a:endParaRPr lang="en-US" sz="1100" dirty="0"/>
-          </a:p>
-          <a:p>
-            <a:pPr indent="0" marL="0">
+            <a:endParaRPr lang="en-US" sz="1300" dirty="0"/>
+          </a:p>
+          <a:p>
+            <a:pPr algn="l" indent="0" marL="0">
               <a:lnSpc>
                 <a:spcPct val="190000"/>
               </a:lnSpc>
               <a:buNone/>
             </a:pPr>
             <a:r>
-              <a:rPr lang="en-US" sz="1100" dirty="0">
+              <a:rPr lang="en-US" sz="1300" dirty="0">
                 <a:solidFill>
                   <a:srgbClr val="2B251E"/>
                 </a:solidFill>
@@ -1879,7 +1879,7 @@
               </a:rPr>
               <a:t>静かに互いを引き寄せている。</a:t>
             </a:r>
-            <a:endParaRPr lang="en-US" sz="1100" dirty="0"/>
+            <a:endParaRPr lang="en-US" sz="1300" dirty="0"/>
           </a:p>
         </p:txBody>
       </p:sp>
@@ -1891,8 +1891,8 @@
         </p:nvSpPr>
         <p:spPr>
           <a:xfrm>
-            <a:off x="2996397" y="761970"/>
-            <a:ext cx="8430768" cy="36576"/>
+            <a:off x="2926080" y="914400"/>
+            <a:ext cx="8348472" cy="34747"/>
           </a:xfrm>
           <a:prstGeom prst="rect">
             <a:avLst/>
@@ -1911,8 +1911,8 @@
         </p:nvSpPr>
         <p:spPr>
           <a:xfrm>
-            <a:off x="2996397" y="838139"/>
-            <a:ext cx="609448" cy="508041"/>
+            <a:off x="2926080" y="1024128"/>
+            <a:ext cx="1005840" cy="777240"/>
           </a:xfrm>
           <a:prstGeom prst="rect">
             <a:avLst/>
@@ -1924,11 +1924,11 @@
           <a:bodyPr wrap="square" rtlCol="0" anchor="ctr"/>
           <a:lstStyle/>
           <a:p>
-            <a:pPr indent="0" marL="0">
-              <a:buNone/>
-            </a:pPr>
-            <a:r>
-              <a:rPr lang="en-US" sz="3200" i="1" dirty="0">
+            <a:pPr algn="l" indent="0" marL="0">
+              <a:buNone/>
+            </a:pPr>
+            <a:r>
+              <a:rPr lang="en-US" sz="2600" i="1" dirty="0">
                 <a:solidFill>
                   <a:srgbClr val="17140F"/>
                 </a:solidFill>
@@ -1938,7 +1938,7 @@
               </a:rPr>
               <a:t>01</a:t>
             </a:r>
-            <a:endParaRPr lang="en-US" sz="3200" dirty="0"/>
+            <a:endParaRPr lang="en-US" sz="2600" dirty="0"/>
           </a:p>
         </p:txBody>
       </p:sp>
@@ -1950,8 +1950,8 @@
         </p:nvSpPr>
         <p:spPr>
           <a:xfrm>
-            <a:off x="3821735" y="952439"/>
-            <a:ext cx="5840547" cy="355610"/>
+            <a:off x="4023360" y="1115568"/>
+            <a:ext cx="6858000" cy="594360"/>
           </a:xfrm>
           <a:prstGeom prst="rect">
             <a:avLst/>
@@ -1963,11 +1963,11 @@
           <a:bodyPr wrap="square" rtlCol="0" anchor="t"/>
           <a:lstStyle/>
           <a:p>
-            <a:pPr indent="0" marL="0">
-              <a:buNone/>
-            </a:pPr>
-            <a:r>
-              <a:rPr lang="en-US" sz="1800" b="1" dirty="0">
+            <a:pPr algn="l" indent="0" marL="0">
+              <a:buNone/>
+            </a:pPr>
+            <a:r>
+              <a:rPr lang="en-US" sz="2000" b="1" dirty="0">
                 <a:solidFill>
                   <a:srgbClr val="17140F"/>
                 </a:solidFill>
@@ -1977,7 +1977,7 @@
               </a:rPr>
               <a:t>カーボンニュートラル建築</a:t>
             </a:r>
-            <a:endParaRPr lang="en-US" sz="1800" dirty="0"/>
+            <a:endParaRPr lang="en-US" sz="2000" dirty="0"/>
           </a:p>
         </p:txBody>
       </p:sp>
@@ -1989,24 +1989,24 @@
         </p:nvSpPr>
         <p:spPr>
           <a:xfrm>
-            <a:off x="10665379" y="838139"/>
-            <a:ext cx="761787" cy="508041"/>
-          </a:xfrm>
-          <a:prstGeom prst="rect">
-            <a:avLst/>
-          </a:prstGeom>
-          <a:noFill/>
-          <a:ln/>
-        </p:spPr>
-        <p:txBody>
-          <a:bodyPr wrap="square" rtlCol="0" anchor="ctr"/>
+            <a:off x="10177272" y="1170432"/>
+            <a:ext cx="1097280" cy="457200"/>
+          </a:xfrm>
+          <a:prstGeom prst="rect">
+            <a:avLst/>
+          </a:prstGeom>
+          <a:noFill/>
+          <a:ln/>
+        </p:spPr>
+        <p:txBody>
+          <a:bodyPr wrap="square" rtlCol="0" anchor="t"/>
           <a:lstStyle/>
           <a:p>
             <a:pPr algn="r" indent="0" marL="0">
               <a:buNone/>
             </a:pPr>
             <a:r>
-              <a:rPr lang="en-US" sz="1200" i="1" dirty="0">
+              <a:rPr lang="en-US" sz="1400" i="1" dirty="0">
                 <a:solidFill>
                   <a:srgbClr val="17140F"/>
                 </a:solidFill>
@@ -2016,7 +2016,7 @@
               </a:rPr>
               <a:t>p. 003</a:t>
             </a:r>
-            <a:endParaRPr lang="en-US" sz="1200" dirty="0"/>
+            <a:endParaRPr lang="en-US" sz="1400" dirty="0"/>
           </a:p>
         </p:txBody>
       </p:sp>
@@ -2028,8 +2028,8 @@
         </p:nvSpPr>
         <p:spPr>
           <a:xfrm>
-            <a:off x="2996397" y="1473190"/>
-            <a:ext cx="8430768" cy="13716"/>
+            <a:off x="2926080" y="1874520"/>
+            <a:ext cx="8348472" cy="10973"/>
           </a:xfrm>
           <a:prstGeom prst="rect">
             <a:avLst/>
@@ -2048,8 +2048,8 @@
         </p:nvSpPr>
         <p:spPr>
           <a:xfrm>
-            <a:off x="2996397" y="1549359"/>
-            <a:ext cx="609448" cy="508041"/>
+            <a:off x="2926080" y="1984248"/>
+            <a:ext cx="1005840" cy="777240"/>
           </a:xfrm>
           <a:prstGeom prst="rect">
             <a:avLst/>
@@ -2061,11 +2061,11 @@
           <a:bodyPr wrap="square" rtlCol="0" anchor="ctr"/>
           <a:lstStyle/>
           <a:p>
-            <a:pPr indent="0" marL="0">
-              <a:buNone/>
-            </a:pPr>
-            <a:r>
-              <a:rPr lang="en-US" sz="3200" i="1" dirty="0">
+            <a:pPr algn="l" indent="0" marL="0">
+              <a:buNone/>
+            </a:pPr>
+            <a:r>
+              <a:rPr lang="en-US" sz="2600" i="1" dirty="0">
                 <a:solidFill>
                   <a:srgbClr val="17140F"/>
                 </a:solidFill>
@@ -2075,7 +2075,7 @@
               </a:rPr>
               <a:t>02</a:t>
             </a:r>
-            <a:endParaRPr lang="en-US" sz="3200" dirty="0"/>
+            <a:endParaRPr lang="en-US" sz="2600" dirty="0"/>
           </a:p>
         </p:txBody>
       </p:sp>
@@ -2087,8 +2087,8 @@
         </p:nvSpPr>
         <p:spPr>
           <a:xfrm>
-            <a:off x="3821735" y="1663659"/>
-            <a:ext cx="5840547" cy="355610"/>
+            <a:off x="4023360" y="2075688"/>
+            <a:ext cx="6858000" cy="594360"/>
           </a:xfrm>
           <a:prstGeom prst="rect">
             <a:avLst/>
@@ -2100,11 +2100,11 @@
           <a:bodyPr wrap="square" rtlCol="0" anchor="t"/>
           <a:lstStyle/>
           <a:p>
-            <a:pPr indent="0" marL="0">
-              <a:buNone/>
-            </a:pPr>
-            <a:r>
-              <a:rPr lang="en-US" sz="1800" b="1" dirty="0">
+            <a:pPr algn="l" indent="0" marL="0">
+              <a:buNone/>
+            </a:pPr>
+            <a:r>
+              <a:rPr lang="en-US" sz="2000" b="1" dirty="0">
                 <a:solidFill>
                   <a:srgbClr val="17140F"/>
                 </a:solidFill>
@@ -2114,7 +2114,7 @@
               </a:rPr>
               <a:t>木造建築の進化</a:t>
             </a:r>
-            <a:endParaRPr lang="en-US" sz="1800" dirty="0"/>
+            <a:endParaRPr lang="en-US" sz="2000" dirty="0"/>
           </a:p>
         </p:txBody>
       </p:sp>
@@ -2126,24 +2126,24 @@
         </p:nvSpPr>
         <p:spPr>
           <a:xfrm>
-            <a:off x="10665379" y="1549359"/>
-            <a:ext cx="761787" cy="508041"/>
-          </a:xfrm>
-          <a:prstGeom prst="rect">
-            <a:avLst/>
-          </a:prstGeom>
-          <a:noFill/>
-          <a:ln/>
-        </p:spPr>
-        <p:txBody>
-          <a:bodyPr wrap="square" rtlCol="0" anchor="ctr"/>
+            <a:off x="10177272" y="2130552"/>
+            <a:ext cx="1097280" cy="457200"/>
+          </a:xfrm>
+          <a:prstGeom prst="rect">
+            <a:avLst/>
+          </a:prstGeom>
+          <a:noFill/>
+          <a:ln/>
+        </p:spPr>
+        <p:txBody>
+          <a:bodyPr wrap="square" rtlCol="0" anchor="t"/>
           <a:lstStyle/>
           <a:p>
             <a:pPr algn="r" indent="0" marL="0">
               <a:buNone/>
             </a:pPr>
             <a:r>
-              <a:rPr lang="en-US" sz="1200" i="1" dirty="0">
+              <a:rPr lang="en-US" sz="1400" i="1" dirty="0">
                 <a:solidFill>
                   <a:srgbClr val="17140F"/>
                 </a:solidFill>
@@ -2153,7 +2153,7 @@
               </a:rPr>
               <a:t>p. 004</a:t>
             </a:r>
-            <a:endParaRPr lang="en-US" sz="1200" dirty="0"/>
+            <a:endParaRPr lang="en-US" sz="1400" dirty="0"/>
           </a:p>
         </p:txBody>
       </p:sp>
@@ -2165,8 +2165,8 @@
         </p:nvSpPr>
         <p:spPr>
           <a:xfrm>
-            <a:off x="2996397" y="2184410"/>
-            <a:ext cx="8430768" cy="13716"/>
+            <a:off x="2926080" y="2834640"/>
+            <a:ext cx="8348472" cy="10973"/>
           </a:xfrm>
           <a:prstGeom prst="rect">
             <a:avLst/>
@@ -2185,8 +2185,8 @@
         </p:nvSpPr>
         <p:spPr>
           <a:xfrm>
-            <a:off x="2996397" y="2260580"/>
-            <a:ext cx="609448" cy="508041"/>
+            <a:off x="2926080" y="2944368"/>
+            <a:ext cx="1005840" cy="777240"/>
           </a:xfrm>
           <a:prstGeom prst="rect">
             <a:avLst/>
@@ -2198,11 +2198,11 @@
           <a:bodyPr wrap="square" rtlCol="0" anchor="ctr"/>
           <a:lstStyle/>
           <a:p>
-            <a:pPr indent="0" marL="0">
-              <a:buNone/>
-            </a:pPr>
-            <a:r>
-              <a:rPr lang="en-US" sz="3200" i="1" dirty="0">
+            <a:pPr algn="l" indent="0" marL="0">
+              <a:buNone/>
+            </a:pPr>
+            <a:r>
+              <a:rPr lang="en-US" sz="2600" i="1" dirty="0">
                 <a:solidFill>
                   <a:srgbClr val="17140F"/>
                 </a:solidFill>
@@ -2212,7 +2212,7 @@
               </a:rPr>
               <a:t>03</a:t>
             </a:r>
-            <a:endParaRPr lang="en-US" sz="3200" dirty="0"/>
+            <a:endParaRPr lang="en-US" sz="2600" dirty="0"/>
           </a:p>
         </p:txBody>
       </p:sp>
@@ -2224,8 +2224,8 @@
         </p:nvSpPr>
         <p:spPr>
           <a:xfrm>
-            <a:off x="3821735" y="2374880"/>
-            <a:ext cx="5840547" cy="355610"/>
+            <a:off x="4023360" y="3035808"/>
+            <a:ext cx="6858000" cy="594360"/>
           </a:xfrm>
           <a:prstGeom prst="rect">
             <a:avLst/>
@@ -2237,11 +2237,11 @@
           <a:bodyPr wrap="square" rtlCol="0" anchor="t"/>
           <a:lstStyle/>
           <a:p>
-            <a:pPr indent="0" marL="0">
-              <a:buNone/>
-            </a:pPr>
-            <a:r>
-              <a:rPr lang="en-US" sz="1800" b="1" dirty="0">
+            <a:pPr algn="l" indent="0" marL="0">
+              <a:buNone/>
+            </a:pPr>
+            <a:r>
+              <a:rPr lang="en-US" sz="2000" b="1" dirty="0">
                 <a:solidFill>
                   <a:srgbClr val="17140F"/>
                 </a:solidFill>
@@ -2251,7 +2251,7 @@
               </a:rPr>
               <a:t>AI × BIM</a:t>
             </a:r>
-            <a:endParaRPr lang="en-US" sz="1800" dirty="0"/>
+            <a:endParaRPr lang="en-US" sz="2000" dirty="0"/>
           </a:p>
         </p:txBody>
       </p:sp>
@@ -2263,24 +2263,24 @@
         </p:nvSpPr>
         <p:spPr>
           <a:xfrm>
-            <a:off x="10665379" y="2260580"/>
-            <a:ext cx="761787" cy="508041"/>
-          </a:xfrm>
-          <a:prstGeom prst="rect">
-            <a:avLst/>
-          </a:prstGeom>
-          <a:noFill/>
-          <a:ln/>
-        </p:spPr>
-        <p:txBody>
-          <a:bodyPr wrap="square" rtlCol="0" anchor="ctr"/>
+            <a:off x="10177272" y="3090672"/>
+            <a:ext cx="1097280" cy="457200"/>
+          </a:xfrm>
+          <a:prstGeom prst="rect">
+            <a:avLst/>
+          </a:prstGeom>
+          <a:noFill/>
+          <a:ln/>
+        </p:spPr>
+        <p:txBody>
+          <a:bodyPr wrap="square" rtlCol="0" anchor="t"/>
           <a:lstStyle/>
           <a:p>
             <a:pPr algn="r" indent="0" marL="0">
               <a:buNone/>
             </a:pPr>
             <a:r>
-              <a:rPr lang="en-US" sz="1200" i="1" dirty="0">
+              <a:rPr lang="en-US" sz="1400" i="1" dirty="0">
                 <a:solidFill>
                   <a:srgbClr val="17140F"/>
                 </a:solidFill>
@@ -2290,7 +2290,7 @@
               </a:rPr>
               <a:t>p. 005</a:t>
             </a:r>
-            <a:endParaRPr lang="en-US" sz="1200" dirty="0"/>
+            <a:endParaRPr lang="en-US" sz="1400" dirty="0"/>
           </a:p>
         </p:txBody>
       </p:sp>
@@ -2302,8 +2302,8 @@
         </p:nvSpPr>
         <p:spPr>
           <a:xfrm>
-            <a:off x="2996397" y="2895630"/>
-            <a:ext cx="8430768" cy="13716"/>
+            <a:off x="2926080" y="3794760"/>
+            <a:ext cx="8348472" cy="10973"/>
           </a:xfrm>
           <a:prstGeom prst="rect">
             <a:avLst/>
@@ -2322,8 +2322,8 @@
         </p:nvSpPr>
         <p:spPr>
           <a:xfrm>
-            <a:off x="2996397" y="2971800"/>
-            <a:ext cx="609448" cy="508041"/>
+            <a:off x="2926080" y="3904488"/>
+            <a:ext cx="1005840" cy="777240"/>
           </a:xfrm>
           <a:prstGeom prst="rect">
             <a:avLst/>
@@ -2335,11 +2335,11 @@
           <a:bodyPr wrap="square" rtlCol="0" anchor="ctr"/>
           <a:lstStyle/>
           <a:p>
-            <a:pPr indent="0" marL="0">
-              <a:buNone/>
-            </a:pPr>
-            <a:r>
-              <a:rPr lang="en-US" sz="3200" i="1" dirty="0">
+            <a:pPr algn="l" indent="0" marL="0">
+              <a:buNone/>
+            </a:pPr>
+            <a:r>
+              <a:rPr lang="en-US" sz="2600" i="1" dirty="0">
                 <a:solidFill>
                   <a:srgbClr val="17140F"/>
                 </a:solidFill>
@@ -2349,7 +2349,7 @@
               </a:rPr>
               <a:t>04</a:t>
             </a:r>
-            <a:endParaRPr lang="en-US" sz="3200" dirty="0"/>
+            <a:endParaRPr lang="en-US" sz="2600" dirty="0"/>
           </a:p>
         </p:txBody>
       </p:sp>
@@ -2361,8 +2361,8 @@
         </p:nvSpPr>
         <p:spPr>
           <a:xfrm>
-            <a:off x="3821735" y="3086100"/>
-            <a:ext cx="5840547" cy="355610"/>
+            <a:off x="4023360" y="3995928"/>
+            <a:ext cx="6858000" cy="594360"/>
           </a:xfrm>
           <a:prstGeom prst="rect">
             <a:avLst/>
@@ -2374,11 +2374,11 @@
           <a:bodyPr wrap="square" rtlCol="0" anchor="t"/>
           <a:lstStyle/>
           <a:p>
-            <a:pPr indent="0" marL="0">
-              <a:buNone/>
-            </a:pPr>
-            <a:r>
-              <a:rPr lang="en-US" sz="1800" b="1" dirty="0">
+            <a:pPr algn="l" indent="0" marL="0">
+              <a:buNone/>
+            </a:pPr>
+            <a:r>
+              <a:rPr lang="en-US" sz="2000" b="1" dirty="0">
                 <a:solidFill>
                   <a:srgbClr val="17140F"/>
                 </a:solidFill>
@@ -2388,7 +2388,7 @@
               </a:rPr>
               <a:t>リノベーション</a:t>
             </a:r>
-            <a:endParaRPr lang="en-US" sz="1800" dirty="0"/>
+            <a:endParaRPr lang="en-US" sz="2000" dirty="0"/>
           </a:p>
         </p:txBody>
       </p:sp>
@@ -2400,24 +2400,24 @@
         </p:nvSpPr>
         <p:spPr>
           <a:xfrm>
-            <a:off x="10665379" y="2971800"/>
-            <a:ext cx="761787" cy="508041"/>
-          </a:xfrm>
-          <a:prstGeom prst="rect">
-            <a:avLst/>
-          </a:prstGeom>
-          <a:noFill/>
-          <a:ln/>
-        </p:spPr>
-        <p:txBody>
-          <a:bodyPr wrap="square" rtlCol="0" anchor="ctr"/>
+            <a:off x="10177272" y="4050792"/>
+            <a:ext cx="1097280" cy="457200"/>
+          </a:xfrm>
+          <a:prstGeom prst="rect">
+            <a:avLst/>
+          </a:prstGeom>
+          <a:noFill/>
+          <a:ln/>
+        </p:spPr>
+        <p:txBody>
+          <a:bodyPr wrap="square" rtlCol="0" anchor="t"/>
           <a:lstStyle/>
           <a:p>
             <a:pPr algn="r" indent="0" marL="0">
               <a:buNone/>
             </a:pPr>
             <a:r>
-              <a:rPr lang="en-US" sz="1200" i="1" dirty="0">
+              <a:rPr lang="en-US" sz="1400" i="1" dirty="0">
                 <a:solidFill>
                   <a:srgbClr val="17140F"/>
                 </a:solidFill>
@@ -2427,7 +2427,7 @@
               </a:rPr>
               <a:t>p. 006</a:t>
             </a:r>
-            <a:endParaRPr lang="en-US" sz="1200" dirty="0"/>
+            <a:endParaRPr lang="en-US" sz="1400" dirty="0"/>
           </a:p>
         </p:txBody>
       </p:sp>
@@ -2439,8 +2439,8 @@
         </p:nvSpPr>
         <p:spPr>
           <a:xfrm>
-            <a:off x="2996397" y="3606851"/>
-            <a:ext cx="8430768" cy="13716"/>
+            <a:off x="2926080" y="4754880"/>
+            <a:ext cx="8348472" cy="10973"/>
           </a:xfrm>
           <a:prstGeom prst="rect">
             <a:avLst/>
@@ -2459,8 +2459,8 @@
         </p:nvSpPr>
         <p:spPr>
           <a:xfrm>
-            <a:off x="2996397" y="3683020"/>
-            <a:ext cx="609448" cy="508041"/>
+            <a:off x="2926080" y="4864608"/>
+            <a:ext cx="1005840" cy="777240"/>
           </a:xfrm>
           <a:prstGeom prst="rect">
             <a:avLst/>
@@ -2472,11 +2472,11 @@
           <a:bodyPr wrap="square" rtlCol="0" anchor="ctr"/>
           <a:lstStyle/>
           <a:p>
-            <a:pPr indent="0" marL="0">
-              <a:buNone/>
-            </a:pPr>
-            <a:r>
-              <a:rPr lang="en-US" sz="3200" i="1" dirty="0">
+            <a:pPr algn="l" indent="0" marL="0">
+              <a:buNone/>
+            </a:pPr>
+            <a:r>
+              <a:rPr lang="en-US" sz="2600" i="1" dirty="0">
                 <a:solidFill>
                   <a:srgbClr val="17140F"/>
                 </a:solidFill>
@@ -2486,7 +2486,7 @@
               </a:rPr>
               <a:t>05</a:t>
             </a:r>
-            <a:endParaRPr lang="en-US" sz="3200" dirty="0"/>
+            <a:endParaRPr lang="en-US" sz="2600" dirty="0"/>
           </a:p>
         </p:txBody>
       </p:sp>
@@ -2498,8 +2498,8 @@
         </p:nvSpPr>
         <p:spPr>
           <a:xfrm>
-            <a:off x="3821735" y="3797320"/>
-            <a:ext cx="5840547" cy="355610"/>
+            <a:off x="4023360" y="4956048"/>
+            <a:ext cx="6858000" cy="594360"/>
           </a:xfrm>
           <a:prstGeom prst="rect">
             <a:avLst/>
@@ -2511,11 +2511,11 @@
           <a:bodyPr wrap="square" rtlCol="0" anchor="t"/>
           <a:lstStyle/>
           <a:p>
-            <a:pPr indent="0" marL="0">
-              <a:buNone/>
-            </a:pPr>
-            <a:r>
-              <a:rPr lang="en-US" sz="1800" b="1" dirty="0">
+            <a:pPr algn="l" indent="0" marL="0">
+              <a:buNone/>
+            </a:pPr>
+            <a:r>
+              <a:rPr lang="en-US" sz="2000" b="1" dirty="0">
                 <a:solidFill>
                   <a:srgbClr val="17140F"/>
                 </a:solidFill>
@@ -2525,7 +2525,7 @@
               </a:rPr>
               <a:t>ウェルビーイング</a:t>
             </a:r>
-            <a:endParaRPr lang="en-US" sz="1800" dirty="0"/>
+            <a:endParaRPr lang="en-US" sz="2000" dirty="0"/>
           </a:p>
         </p:txBody>
       </p:sp>
@@ -2537,24 +2537,24 @@
         </p:nvSpPr>
         <p:spPr>
           <a:xfrm>
-            <a:off x="10665379" y="3683020"/>
-            <a:ext cx="761787" cy="508041"/>
-          </a:xfrm>
-          <a:prstGeom prst="rect">
-            <a:avLst/>
-          </a:prstGeom>
-          <a:noFill/>
-          <a:ln/>
-        </p:spPr>
-        <p:txBody>
-          <a:bodyPr wrap="square" rtlCol="0" anchor="ctr"/>
+            <a:off x="10177272" y="5010912"/>
+            <a:ext cx="1097280" cy="457200"/>
+          </a:xfrm>
+          <a:prstGeom prst="rect">
+            <a:avLst/>
+          </a:prstGeom>
+          <a:noFill/>
+          <a:ln/>
+        </p:spPr>
+        <p:txBody>
+          <a:bodyPr wrap="square" rtlCol="0" anchor="t"/>
           <a:lstStyle/>
           <a:p>
             <a:pPr algn="r" indent="0" marL="0">
               <a:buNone/>
             </a:pPr>
             <a:r>
-              <a:rPr lang="en-US" sz="1200" i="1" dirty="0">
+              <a:rPr lang="en-US" sz="1400" i="1" dirty="0">
                 <a:solidFill>
                   <a:srgbClr val="17140F"/>
                 </a:solidFill>
@@ -2564,7 +2564,7 @@
               </a:rPr>
               <a:t>p. 006</a:t>
             </a:r>
-            <a:endParaRPr lang="en-US" sz="1200" dirty="0"/>
+            <a:endParaRPr lang="en-US" sz="1400" dirty="0"/>
           </a:p>
         </p:txBody>
       </p:sp>
@@ -2576,8 +2576,8 @@
         </p:nvSpPr>
         <p:spPr>
           <a:xfrm>
-            <a:off x="2996397" y="4318071"/>
-            <a:ext cx="8430768" cy="13716"/>
+            <a:off x="2926080" y="5715000"/>
+            <a:ext cx="8348472" cy="10973"/>
           </a:xfrm>
           <a:prstGeom prst="rect">
             <a:avLst/>
@@ -2628,8 +2628,8 @@
         </p:nvSpPr>
         <p:spPr>
           <a:xfrm>
-            <a:off x="761787" y="761970"/>
-            <a:ext cx="10665379" cy="2095530"/>
+            <a:off x="914400" y="914400"/>
+            <a:ext cx="10360152" cy="2194560"/>
           </a:xfrm>
           <a:prstGeom prst="rect">
             <a:avLst/>
@@ -2641,7 +2641,7 @@
           <a:bodyPr wrap="square" rtlCol="0" anchor="t"/>
           <a:lstStyle/>
           <a:p>
-            <a:pPr indent="0" marL="0">
+            <a:pPr algn="l" indent="0" marL="0">
               <a:lnSpc>
                 <a:spcPct val="110000"/>
               </a:lnSpc>
@@ -2661,7 +2661,7 @@
             <a:endParaRPr lang="en-US" sz="4200" dirty="0"/>
           </a:p>
           <a:p>
-            <a:pPr indent="0" marL="0">
+            <a:pPr algn="l" indent="0" marL="0">
               <a:lnSpc>
                 <a:spcPct val="110000"/>
               </a:lnSpc>
@@ -2690,8 +2690,8 @@
         </p:nvSpPr>
         <p:spPr>
           <a:xfrm>
-            <a:off x="761787" y="2984510"/>
-            <a:ext cx="5586618" cy="952530"/>
+            <a:off x="914400" y="3246120"/>
+            <a:ext cx="6858000" cy="1097280"/>
           </a:xfrm>
           <a:prstGeom prst="rect">
             <a:avLst/>
@@ -2703,14 +2703,14 @@
           <a:bodyPr wrap="square" rtlCol="0" anchor="t"/>
           <a:lstStyle/>
           <a:p>
-            <a:pPr indent="0" marL="0">
+            <a:pPr algn="l" indent="0" marL="0">
               <a:lnSpc>
                 <a:spcPct val="180000"/>
               </a:lnSpc>
               <a:buNone/>
             </a:pPr>
             <a:r>
-              <a:rPr lang="en-US" sz="1200" dirty="0">
+              <a:rPr lang="en-US" sz="1600" dirty="0">
                 <a:solidFill>
                   <a:srgbClr val="2B251E"/>
                 </a:solidFill>
@@ -2720,17 +2720,17 @@
               </a:rPr>
               <a:t>世界のCO₂排出の約37%は建築に由来する。</a:t>
             </a:r>
-            <a:endParaRPr lang="en-US" sz="1200" dirty="0"/>
-          </a:p>
-          <a:p>
-            <a:pPr indent="0" marL="0">
+            <a:endParaRPr lang="en-US" sz="1600" dirty="0"/>
+          </a:p>
+          <a:p>
+            <a:pPr algn="l" indent="0" marL="0">
               <a:lnSpc>
                 <a:spcPct val="180000"/>
               </a:lnSpc>
               <a:buNone/>
             </a:pPr>
             <a:r>
-              <a:rPr lang="en-US" sz="1200" dirty="0">
+              <a:rPr lang="en-US" sz="1600" dirty="0">
                 <a:solidFill>
                   <a:srgbClr val="2B251E"/>
                 </a:solidFill>
@@ -2740,17 +2740,17 @@
               </a:rPr>
               <a:t>2050年に向けて、設計の前提そのものが</a:t>
             </a:r>
-            <a:endParaRPr lang="en-US" sz="1200" dirty="0"/>
-          </a:p>
-          <a:p>
-            <a:pPr indent="0" marL="0">
+            <a:endParaRPr lang="en-US" sz="1600" dirty="0"/>
+          </a:p>
+          <a:p>
+            <a:pPr algn="l" indent="0" marL="0">
               <a:lnSpc>
                 <a:spcPct val="180000"/>
               </a:lnSpc>
               <a:buNone/>
             </a:pPr>
             <a:r>
-              <a:rPr lang="en-US" sz="1200" dirty="0">
+              <a:rPr lang="en-US" sz="1600" dirty="0">
                 <a:solidFill>
                   <a:srgbClr val="2B251E"/>
                 </a:solidFill>
@@ -2760,7 +2760,7 @@
               </a:rPr>
               <a:t>書き換えられようとしている。</a:t>
             </a:r>
-            <a:endParaRPr lang="en-US" sz="1200" dirty="0"/>
+            <a:endParaRPr lang="en-US" sz="1600" dirty="0"/>
           </a:p>
         </p:txBody>
       </p:sp>
@@ -2772,8 +2772,8 @@
         </p:nvSpPr>
         <p:spPr>
           <a:xfrm>
-            <a:off x="761787" y="4724339"/>
-            <a:ext cx="10665379" cy="36576"/>
+            <a:off x="914400" y="5029200"/>
+            <a:ext cx="10360152" cy="34747"/>
           </a:xfrm>
           <a:prstGeom prst="rect">
             <a:avLst/>
@@ -2792,24 +2792,24 @@
         </p:nvSpPr>
         <p:spPr>
           <a:xfrm>
-            <a:off x="761787" y="4813219"/>
-            <a:ext cx="3809025" cy="139720"/>
-          </a:xfrm>
-          <a:prstGeom prst="rect">
-            <a:avLst/>
-          </a:prstGeom>
-          <a:noFill/>
-          <a:ln/>
-        </p:spPr>
-        <p:txBody>
-          <a:bodyPr wrap="square" rtlCol="0" anchor="ctr"/>
-          <a:lstStyle/>
-          <a:p>
-            <a:pPr indent="0" marL="0">
-              <a:buNone/>
-            </a:pPr>
-            <a:r>
-              <a:rPr lang="en-US" sz="650" spc="50" kern="0" dirty="0">
+            <a:off x="914400" y="5120640"/>
+            <a:ext cx="4572000" cy="274320"/>
+          </a:xfrm>
+          <a:prstGeom prst="rect">
+            <a:avLst/>
+          </a:prstGeom>
+          <a:noFill/>
+          <a:ln/>
+        </p:spPr>
+        <p:txBody>
+          <a:bodyPr wrap="square" rtlCol="0" anchor="t"/>
+          <a:lstStyle/>
+          <a:p>
+            <a:pPr algn="l" indent="0" marL="0">
+              <a:buNone/>
+            </a:pPr>
+            <a:r>
+              <a:rPr lang="en-US" sz="1100" spc="40" kern="0" dirty="0">
                 <a:solidFill>
                   <a:srgbClr val="8B8578"/>
                 </a:solidFill>
@@ -2819,7 +2819,7 @@
               </a:rPr>
               <a:t>建築部門のCO₂排出構造</a:t>
             </a:r>
-            <a:endParaRPr lang="en-US" sz="650" dirty="0"/>
+            <a:endParaRPr lang="en-US" sz="1100" dirty="0"/>
           </a:p>
         </p:txBody>
       </p:sp>
@@ -2831,8 +2831,8 @@
         </p:nvSpPr>
         <p:spPr>
           <a:xfrm>
-            <a:off x="761787" y="5016398"/>
-            <a:ext cx="2539380" cy="190470"/>
+            <a:off x="914400" y="5486400"/>
+            <a:ext cx="3200400" cy="292608"/>
           </a:xfrm>
           <a:prstGeom prst="rect">
             <a:avLst/>
@@ -2844,11 +2844,11 @@
           <a:bodyPr wrap="square" rtlCol="0" anchor="t"/>
           <a:lstStyle/>
           <a:p>
-            <a:pPr indent="0" marL="0">
-              <a:buNone/>
-            </a:pPr>
-            <a:r>
-              <a:rPr lang="en-US" sz="1100" b="1" dirty="0">
+            <a:pPr algn="l" indent="0" marL="0">
+              <a:buNone/>
+            </a:pPr>
+            <a:r>
+              <a:rPr lang="en-US" sz="1400" b="1" dirty="0">
                 <a:solidFill>
                   <a:srgbClr val="17140F"/>
                 </a:solidFill>
@@ -2858,7 +2858,7 @@
               </a:rPr>
               <a:t>運用エネルギー</a:t>
             </a:r>
-            <a:endParaRPr lang="en-US" sz="1100" dirty="0"/>
+            <a:endParaRPr lang="en-US" sz="1400" dirty="0"/>
           </a:p>
         </p:txBody>
       </p:sp>
@@ -2870,8 +2870,8 @@
         </p:nvSpPr>
         <p:spPr>
           <a:xfrm>
-            <a:off x="3428086" y="5016398"/>
-            <a:ext cx="507858" cy="190470"/>
+            <a:off x="4206240" y="5486400"/>
+            <a:ext cx="731520" cy="292608"/>
           </a:xfrm>
           <a:prstGeom prst="rect">
             <a:avLst/>
@@ -2887,7 +2887,7 @@
               <a:buNone/>
             </a:pPr>
             <a:r>
-              <a:rPr lang="en-US" sz="1800" i="1" dirty="0">
+              <a:rPr lang="en-US" sz="2400" i="1" dirty="0">
                 <a:solidFill>
                   <a:srgbClr val="17140F"/>
                 </a:solidFill>
@@ -2897,7 +2897,7 @@
               </a:rPr>
               <a:t>70%</a:t>
             </a:r>
-            <a:endParaRPr lang="en-US" sz="1800" dirty="0"/>
+            <a:endParaRPr lang="en-US" sz="2400" dirty="0"/>
           </a:p>
         </p:txBody>
       </p:sp>
@@ -2909,8 +2909,8 @@
         </p:nvSpPr>
         <p:spPr>
           <a:xfrm>
-            <a:off x="761787" y="5225979"/>
-            <a:ext cx="4469309" cy="54864"/>
+            <a:off x="914400" y="5806440"/>
+            <a:ext cx="4250588" cy="50292"/>
           </a:xfrm>
           <a:prstGeom prst="rect">
             <a:avLst/>
@@ -2929,8 +2929,8 @@
         </p:nvSpPr>
         <p:spPr>
           <a:xfrm>
-            <a:off x="761787" y="5225979"/>
-            <a:ext cx="3128516" cy="54864"/>
+            <a:off x="914400" y="5806440"/>
+            <a:ext cx="2975412" cy="50292"/>
           </a:xfrm>
           <a:prstGeom prst="rect">
             <a:avLst/>
@@ -2949,8 +2949,8 @@
         </p:nvSpPr>
         <p:spPr>
           <a:xfrm>
-            <a:off x="761787" y="5575188"/>
-            <a:ext cx="2539380" cy="190470"/>
+            <a:off x="914400" y="6144768"/>
+            <a:ext cx="3200400" cy="292608"/>
           </a:xfrm>
           <a:prstGeom prst="rect">
             <a:avLst/>
@@ -2962,11 +2962,11 @@
           <a:bodyPr wrap="square" rtlCol="0" anchor="t"/>
           <a:lstStyle/>
           <a:p>
-            <a:pPr indent="0" marL="0">
-              <a:buNone/>
-            </a:pPr>
-            <a:r>
-              <a:rPr lang="en-US" sz="1100" b="1" dirty="0">
+            <a:pPr algn="l" indent="0" marL="0">
+              <a:buNone/>
+            </a:pPr>
+            <a:r>
+              <a:rPr lang="en-US" sz="1400" b="1" dirty="0">
                 <a:solidFill>
                   <a:srgbClr val="17140F"/>
                 </a:solidFill>
@@ -2976,7 +2976,7 @@
               </a:rPr>
               <a:t>材料製造</a:t>
             </a:r>
-            <a:endParaRPr lang="en-US" sz="1100" dirty="0"/>
+            <a:endParaRPr lang="en-US" sz="1400" dirty="0"/>
           </a:p>
         </p:txBody>
       </p:sp>
@@ -2988,8 +2988,8 @@
         </p:nvSpPr>
         <p:spPr>
           <a:xfrm>
-            <a:off x="3428086" y="5575188"/>
-            <a:ext cx="507858" cy="190470"/>
+            <a:off x="4206240" y="6144768"/>
+            <a:ext cx="731520" cy="292608"/>
           </a:xfrm>
           <a:prstGeom prst="rect">
             <a:avLst/>
@@ -3005,7 +3005,7 @@
               <a:buNone/>
             </a:pPr>
             <a:r>
-              <a:rPr lang="en-US" sz="1800" i="1" dirty="0">
+              <a:rPr lang="en-US" sz="2400" i="1" dirty="0">
                 <a:solidFill>
                   <a:srgbClr val="17140F"/>
                 </a:solidFill>
@@ -3015,7 +3015,7 @@
               </a:rPr>
               <a:t>22%</a:t>
             </a:r>
-            <a:endParaRPr lang="en-US" sz="1800" dirty="0"/>
+            <a:endParaRPr lang="en-US" sz="2400" dirty="0"/>
           </a:p>
         </p:txBody>
       </p:sp>
@@ -3027,8 +3027,8 @@
         </p:nvSpPr>
         <p:spPr>
           <a:xfrm>
-            <a:off x="761787" y="5784769"/>
-            <a:ext cx="4469309" cy="54864"/>
+            <a:off x="914400" y="6464808"/>
+            <a:ext cx="4250588" cy="50292"/>
           </a:xfrm>
           <a:prstGeom prst="rect">
             <a:avLst/>
@@ -3047,8 +3047,8 @@
         </p:nvSpPr>
         <p:spPr>
           <a:xfrm>
-            <a:off x="761787" y="5784769"/>
-            <a:ext cx="983248" cy="54864"/>
+            <a:off x="914400" y="6464808"/>
+            <a:ext cx="935129" cy="50292"/>
           </a:xfrm>
           <a:prstGeom prst="rect">
             <a:avLst/>
@@ -3067,8 +3067,8 @@
         </p:nvSpPr>
         <p:spPr>
           <a:xfrm>
-            <a:off x="6348405" y="5016398"/>
-            <a:ext cx="2539380" cy="190470"/>
+            <a:off x="6551676" y="5486400"/>
+            <a:ext cx="3200400" cy="292608"/>
           </a:xfrm>
           <a:prstGeom prst="rect">
             <a:avLst/>
@@ -3080,11 +3080,11 @@
           <a:bodyPr wrap="square" rtlCol="0" anchor="t"/>
           <a:lstStyle/>
           <a:p>
-            <a:pPr indent="0" marL="0">
-              <a:buNone/>
-            </a:pPr>
-            <a:r>
-              <a:rPr lang="en-US" sz="1100" b="1" dirty="0">
+            <a:pPr algn="l" indent="0" marL="0">
+              <a:buNone/>
+            </a:pPr>
+            <a:r>
+              <a:rPr lang="en-US" sz="1400" b="1" dirty="0">
                 <a:solidFill>
                   <a:srgbClr val="17140F"/>
                 </a:solidFill>
@@ -3094,7 +3094,7 @@
               </a:rPr>
               <a:t>解体・廃棄</a:t>
             </a:r>
-            <a:endParaRPr lang="en-US" sz="1100" dirty="0"/>
+            <a:endParaRPr lang="en-US" sz="1400" dirty="0"/>
           </a:p>
         </p:txBody>
       </p:sp>
@@ -3106,8 +3106,8 @@
         </p:nvSpPr>
         <p:spPr>
           <a:xfrm>
-            <a:off x="9014704" y="5016398"/>
-            <a:ext cx="507858" cy="190470"/>
+            <a:off x="9843516" y="5486400"/>
+            <a:ext cx="731520" cy="292608"/>
           </a:xfrm>
           <a:prstGeom prst="rect">
             <a:avLst/>
@@ -3123,7 +3123,7 @@
               <a:buNone/>
             </a:pPr>
             <a:r>
-              <a:rPr lang="en-US" sz="1800" i="1" dirty="0">
+              <a:rPr lang="en-US" sz="2400" i="1" dirty="0">
                 <a:solidFill>
                   <a:srgbClr val="17140F"/>
                 </a:solidFill>
@@ -3133,7 +3133,7 @@
               </a:rPr>
               <a:t>8%</a:t>
             </a:r>
-            <a:endParaRPr lang="en-US" sz="1800" dirty="0"/>
+            <a:endParaRPr lang="en-US" sz="2400" dirty="0"/>
           </a:p>
         </p:txBody>
       </p:sp>
@@ -3145,8 +3145,8 @@
         </p:nvSpPr>
         <p:spPr>
           <a:xfrm>
-            <a:off x="6348405" y="5225979"/>
-            <a:ext cx="4469309" cy="54864"/>
+            <a:off x="6551676" y="5806440"/>
+            <a:ext cx="4250588" cy="50292"/>
           </a:xfrm>
           <a:prstGeom prst="rect">
             <a:avLst/>
@@ -3165,8 +3165,8 @@
         </p:nvSpPr>
         <p:spPr>
           <a:xfrm>
-            <a:off x="6348405" y="5225979"/>
-            <a:ext cx="357545" cy="54864"/>
+            <a:off x="6551676" y="5806440"/>
+            <a:ext cx="340047" cy="50292"/>
           </a:xfrm>
           <a:prstGeom prst="rect">
             <a:avLst/>
@@ -3185,24 +3185,24 @@
         </p:nvSpPr>
         <p:spPr>
           <a:xfrm>
-            <a:off x="6348405" y="5676870"/>
-            <a:ext cx="5078760" cy="152430"/>
-          </a:xfrm>
-          <a:prstGeom prst="rect">
-            <a:avLst/>
-          </a:prstGeom>
-          <a:noFill/>
-          <a:ln/>
-        </p:spPr>
-        <p:txBody>
-          <a:bodyPr wrap="square" rtlCol="0" anchor="ctr"/>
-          <a:lstStyle/>
-          <a:p>
-            <a:pPr indent="0" marL="0">
-              <a:buNone/>
-            </a:pPr>
-            <a:r>
-              <a:rPr lang="en-US" sz="650" spc="40" kern="0" dirty="0">
+            <a:off x="6551676" y="6126480"/>
+            <a:ext cx="4722876" cy="228600"/>
+          </a:xfrm>
+          <a:prstGeom prst="rect">
+            <a:avLst/>
+          </a:prstGeom>
+          <a:noFill/>
+          <a:ln/>
+        </p:spPr>
+        <p:txBody>
+          <a:bodyPr wrap="square" rtlCol="0" anchor="t"/>
+          <a:lstStyle/>
+          <a:p>
+            <a:pPr algn="l" indent="0" marL="0">
+              <a:buNone/>
+            </a:pPr>
+            <a:r>
+              <a:rPr lang="en-US" sz="1100" spc="30" kern="0" dirty="0">
                 <a:solidFill>
                   <a:srgbClr val="8B8578"/>
                 </a:solidFill>
@@ -3212,7 +3212,7 @@
               </a:rPr>
               <a:t>Source · IEA / UNEP, 2024</a:t>
             </a:r>
-            <a:endParaRPr lang="en-US" sz="650" dirty="0"/>
+            <a:endParaRPr lang="en-US" sz="1100" dirty="0"/>
           </a:p>
         </p:txBody>
       </p:sp>
@@ -3256,13 +3256,13 @@
         </p:nvSpPr>
         <p:spPr>
           <a:xfrm>
-            <a:off x="3555187" y="5715183"/>
-            <a:ext cx="1142634" cy="1142634"/>
+            <a:off x="3566160" y="5760720"/>
+            <a:ext cx="1097280" cy="1097280"/>
           </a:xfrm>
           <a:prstGeom prst="ellipse">
             <a:avLst/>
           </a:prstGeom>
-          <a:ln w="19050">
+          <a:ln w="15240">
             <a:solidFill>
               <a:srgbClr val="17140F"/>
             </a:solidFill>
@@ -3278,8 +3278,8 @@
         </p:nvSpPr>
         <p:spPr>
           <a:xfrm>
-            <a:off x="761787" y="761970"/>
-            <a:ext cx="10665379" cy="666780"/>
+            <a:off x="914400" y="914400"/>
+            <a:ext cx="10360152" cy="822960"/>
           </a:xfrm>
           <a:prstGeom prst="rect">
             <a:avLst/>
@@ -3291,7 +3291,7 @@
           <a:bodyPr wrap="square" rtlCol="0" anchor="t"/>
           <a:lstStyle/>
           <a:p>
-            <a:pPr indent="0" marL="0">
+            <a:pPr algn="l" indent="0" marL="0">
               <a:buNone/>
             </a:pPr>
             <a:r>
@@ -3317,8 +3317,8 @@
         </p:nvSpPr>
         <p:spPr>
           <a:xfrm>
-            <a:off x="761787" y="1409639"/>
-            <a:ext cx="6399227" cy="13716"/>
+            <a:off x="914400" y="1719072"/>
+            <a:ext cx="5698084" cy="10973"/>
           </a:xfrm>
           <a:prstGeom prst="rect">
             <a:avLst/>
@@ -3337,24 +3337,24 @@
         </p:nvSpPr>
         <p:spPr>
           <a:xfrm>
-            <a:off x="761787" y="1422349"/>
-            <a:ext cx="6602334" cy="152430"/>
-          </a:xfrm>
-          <a:prstGeom prst="rect">
-            <a:avLst/>
-          </a:prstGeom>
-          <a:noFill/>
-          <a:ln/>
-        </p:spPr>
-        <p:txBody>
-          <a:bodyPr wrap="square" rtlCol="0" anchor="ctr"/>
-          <a:lstStyle/>
-          <a:p>
-            <a:pPr indent="0" marL="0">
-              <a:buNone/>
-            </a:pPr>
-            <a:r>
-              <a:rPr lang="en-US" sz="650" spc="40" kern="0" dirty="0">
+            <a:off x="914400" y="1664208"/>
+            <a:ext cx="5303520" cy="228600"/>
+          </a:xfrm>
+          <a:prstGeom prst="rect">
+            <a:avLst/>
+          </a:prstGeom>
+          <a:noFill/>
+          <a:ln/>
+        </p:spPr>
+        <p:txBody>
+          <a:bodyPr wrap="square" rtlCol="0" anchor="t"/>
+          <a:lstStyle/>
+          <a:p>
+            <a:pPr algn="l" indent="0" marL="0">
+              <a:buNone/>
+            </a:pPr>
+            <a:r>
+              <a:rPr lang="en-US" sz="1100" spc="40" kern="0" dirty="0">
                 <a:solidFill>
                   <a:srgbClr val="8B8578"/>
                 </a:solidFill>
@@ -3364,7 +3364,7 @@
               </a:rPr>
               <a:t>木造建築のマイルストーン</a:t>
             </a:r>
-            <a:endParaRPr lang="en-US" sz="650" dirty="0"/>
+            <a:endParaRPr lang="en-US" sz="1100" dirty="0"/>
           </a:p>
         </p:txBody>
       </p:sp>
@@ -3376,8 +3376,8 @@
         </p:nvSpPr>
         <p:spPr>
           <a:xfrm>
-            <a:off x="761787" y="1587490"/>
-            <a:ext cx="6602334" cy="13716"/>
+            <a:off x="914400" y="1920240"/>
+            <a:ext cx="5303520" cy="10973"/>
           </a:xfrm>
           <a:prstGeom prst="rect">
             <a:avLst/>
@@ -3396,8 +3396,8 @@
         </p:nvSpPr>
         <p:spPr>
           <a:xfrm>
-            <a:off x="761787" y="1638330"/>
-            <a:ext cx="863376" cy="317480"/>
+            <a:off x="914400" y="1993392"/>
+            <a:ext cx="914400" cy="548640"/>
           </a:xfrm>
           <a:prstGeom prst="rect">
             <a:avLst/>
@@ -3409,11 +3409,11 @@
           <a:bodyPr wrap="square" rtlCol="0" anchor="t"/>
           <a:lstStyle/>
           <a:p>
-            <a:pPr indent="0" marL="0">
-              <a:buNone/>
-            </a:pPr>
-            <a:r>
-              <a:rPr lang="en-US" sz="2000" i="1" dirty="0">
+            <a:pPr algn="l" indent="0" marL="0">
+              <a:buNone/>
+            </a:pPr>
+            <a:r>
+              <a:rPr lang="en-US" sz="2400" i="1" dirty="0">
                 <a:solidFill>
                   <a:srgbClr val="17140F"/>
                 </a:solidFill>
@@ -3423,7 +3423,7 @@
               </a:rPr>
               <a:t>2019</a:t>
             </a:r>
-            <a:endParaRPr lang="en-US" sz="2000" dirty="0"/>
+            <a:endParaRPr lang="en-US" sz="2400" dirty="0"/>
           </a:p>
         </p:txBody>
       </p:sp>
@@ -3435,8 +3435,8 @@
         </p:nvSpPr>
         <p:spPr>
           <a:xfrm>
-            <a:off x="1752173" y="1638330"/>
-            <a:ext cx="5459608" cy="647670"/>
+            <a:off x="1920240" y="1993392"/>
+            <a:ext cx="4206240" cy="822960"/>
           </a:xfrm>
           <a:prstGeom prst="rect">
             <a:avLst/>
@@ -3448,14 +3448,14 @@
           <a:bodyPr wrap="square" rtlCol="0" anchor="t"/>
           <a:lstStyle/>
           <a:p>
-            <a:pPr indent="0" marL="0">
+            <a:pPr algn="l" indent="0" marL="0">
               <a:lnSpc>
                 <a:spcPct val="170000"/>
               </a:lnSpc>
               <a:buNone/>
             </a:pPr>
             <a:r>
-              <a:rPr lang="en-US" sz="1200" b="1" dirty="0">
+              <a:rPr lang="en-US" sz="1500" b="1" dirty="0">
                 <a:solidFill>
                   <a:srgbClr val="17140F"/>
                 </a:solidFill>
@@ -3465,14 +3465,14 @@
               </a:rPr>
               <a:t>CLT基準法改正</a:t>
             </a:r>
-            <a:pPr indent="0" marL="0">
+            <a:pPr algn="l" indent="0" marL="0">
               <a:lnSpc>
                 <a:spcPct val="170000"/>
               </a:lnSpc>
               <a:buNone/>
             </a:pPr>
             <a:r>
-              <a:rPr lang="en-US" sz="1200" dirty="0">
+              <a:rPr lang="en-US" sz="1400" dirty="0">
                 <a:solidFill>
                   <a:srgbClr val="000000"/>
                 </a:solidFill>
@@ -3483,14 +3483,14 @@
               <a:t>
 </a:t>
             </a:r>
-            <a:pPr indent="0" marL="0">
+            <a:pPr algn="l" indent="0" marL="0">
               <a:lnSpc>
                 <a:spcPct val="170000"/>
               </a:lnSpc>
               <a:buNone/>
             </a:pPr>
             <a:r>
-              <a:rPr lang="en-US" sz="1100" dirty="0">
+              <a:rPr lang="en-US" sz="1400" dirty="0">
                 <a:solidFill>
                   <a:srgbClr val="2B251E"/>
                 </a:solidFill>
@@ -3500,17 +3500,17 @@
               </a:rPr>
               <a:t>直交集成板が一般的な構造材料として</a:t>
             </a:r>
-            <a:endParaRPr lang="en-US" sz="1200" dirty="0"/>
-          </a:p>
-          <a:p>
-            <a:pPr indent="0" marL="0">
+            <a:endParaRPr lang="en-US" sz="1400" dirty="0"/>
+          </a:p>
+          <a:p>
+            <a:pPr algn="l" indent="0" marL="0">
               <a:lnSpc>
                 <a:spcPct val="170000"/>
               </a:lnSpc>
               <a:buNone/>
             </a:pPr>
             <a:r>
-              <a:rPr lang="en-US" sz="1100" dirty="0">
+              <a:rPr lang="en-US" sz="1400" dirty="0">
                 <a:solidFill>
                   <a:srgbClr val="2B251E"/>
                 </a:solidFill>
@@ -3520,7 +3520,7 @@
               </a:rPr>
               <a:t>基準法に位置づけ。</a:t>
             </a:r>
-            <a:endParaRPr lang="en-US" sz="1200" dirty="0"/>
+            <a:endParaRPr lang="en-US" sz="1400" dirty="0"/>
           </a:p>
         </p:txBody>
       </p:sp>
@@ -3532,8 +3532,8 @@
         </p:nvSpPr>
         <p:spPr>
           <a:xfrm>
-            <a:off x="761787" y="2336749"/>
-            <a:ext cx="6602334" cy="13716"/>
+            <a:off x="914400" y="2834640"/>
+            <a:ext cx="5303520" cy="10973"/>
           </a:xfrm>
           <a:prstGeom prst="rect">
             <a:avLst/>
@@ -3552,8 +3552,8 @@
         </p:nvSpPr>
         <p:spPr>
           <a:xfrm>
-            <a:off x="761787" y="2387590"/>
-            <a:ext cx="863376" cy="317480"/>
+            <a:off x="914400" y="2907792"/>
+            <a:ext cx="914400" cy="548640"/>
           </a:xfrm>
           <a:prstGeom prst="rect">
             <a:avLst/>
@@ -3565,11 +3565,11 @@
           <a:bodyPr wrap="square" rtlCol="0" anchor="t"/>
           <a:lstStyle/>
           <a:p>
-            <a:pPr indent="0" marL="0">
-              <a:buNone/>
-            </a:pPr>
-            <a:r>
-              <a:rPr lang="en-US" sz="2000" i="1" dirty="0">
+            <a:pPr algn="l" indent="0" marL="0">
+              <a:buNone/>
+            </a:pPr>
+            <a:r>
+              <a:rPr lang="en-US" sz="2400" i="1" dirty="0">
                 <a:solidFill>
                   <a:srgbClr val="17140F"/>
                 </a:solidFill>
@@ -3579,7 +3579,7 @@
               </a:rPr>
               <a:t>2022</a:t>
             </a:r>
-            <a:endParaRPr lang="en-US" sz="2000" dirty="0"/>
+            <a:endParaRPr lang="en-US" sz="2400" dirty="0"/>
           </a:p>
         </p:txBody>
       </p:sp>
@@ -3591,8 +3591,8 @@
         </p:nvSpPr>
         <p:spPr>
           <a:xfrm>
-            <a:off x="1752173" y="2387590"/>
-            <a:ext cx="5459608" cy="647670"/>
+            <a:off x="1920240" y="2907792"/>
+            <a:ext cx="4206240" cy="822960"/>
           </a:xfrm>
           <a:prstGeom prst="rect">
             <a:avLst/>
@@ -3604,14 +3604,14 @@
           <a:bodyPr wrap="square" rtlCol="0" anchor="t"/>
           <a:lstStyle/>
           <a:p>
-            <a:pPr indent="0" marL="0">
+            <a:pPr algn="l" indent="0" marL="0">
               <a:lnSpc>
                 <a:spcPct val="170000"/>
               </a:lnSpc>
               <a:buNone/>
             </a:pPr>
             <a:r>
-              <a:rPr lang="en-US" sz="1200" b="1" dirty="0">
+              <a:rPr lang="en-US" sz="1500" b="1" dirty="0">
                 <a:solidFill>
                   <a:srgbClr val="17140F"/>
                 </a:solidFill>
@@ -3621,14 +3621,14 @@
               </a:rPr>
               <a:t>木材利用促進法</a:t>
             </a:r>
-            <a:pPr indent="0" marL="0">
+            <a:pPr algn="l" indent="0" marL="0">
               <a:lnSpc>
                 <a:spcPct val="170000"/>
               </a:lnSpc>
               <a:buNone/>
             </a:pPr>
             <a:r>
-              <a:rPr lang="en-US" sz="1200" dirty="0">
+              <a:rPr lang="en-US" sz="1400" dirty="0">
                 <a:solidFill>
                   <a:srgbClr val="000000"/>
                 </a:solidFill>
@@ -3639,14 +3639,14 @@
               <a:t>
 </a:t>
             </a:r>
-            <a:pPr indent="0" marL="0">
+            <a:pPr algn="l" indent="0" marL="0">
               <a:lnSpc>
                 <a:spcPct val="170000"/>
               </a:lnSpc>
               <a:buNone/>
             </a:pPr>
             <a:r>
-              <a:rPr lang="en-US" sz="1100" dirty="0">
+              <a:rPr lang="en-US" sz="1400" dirty="0">
                 <a:solidFill>
                   <a:srgbClr val="2B251E"/>
                 </a:solidFill>
@@ -3656,17 +3656,17 @@
               </a:rPr>
               <a:t>公共だけでなく民間建築物にも</a:t>
             </a:r>
-            <a:endParaRPr lang="en-US" sz="1200" dirty="0"/>
-          </a:p>
-          <a:p>
-            <a:pPr indent="0" marL="0">
+            <a:endParaRPr lang="en-US" sz="1400" dirty="0"/>
+          </a:p>
+          <a:p>
+            <a:pPr algn="l" indent="0" marL="0">
               <a:lnSpc>
                 <a:spcPct val="170000"/>
               </a:lnSpc>
               <a:buNone/>
             </a:pPr>
             <a:r>
-              <a:rPr lang="en-US" sz="1100" dirty="0">
+              <a:rPr lang="en-US" sz="1400" dirty="0">
                 <a:solidFill>
                   <a:srgbClr val="2B251E"/>
                 </a:solidFill>
@@ -3676,7 +3676,7 @@
               </a:rPr>
               <a:t>木材利用を拡大。</a:t>
             </a:r>
-            <a:endParaRPr lang="en-US" sz="1200" dirty="0"/>
+            <a:endParaRPr lang="en-US" sz="1400" dirty="0"/>
           </a:p>
         </p:txBody>
       </p:sp>
@@ -3688,8 +3688,8 @@
         </p:nvSpPr>
         <p:spPr>
           <a:xfrm>
-            <a:off x="761787" y="3086009"/>
-            <a:ext cx="6602334" cy="13716"/>
+            <a:off x="914400" y="3749040"/>
+            <a:ext cx="5303520" cy="10973"/>
           </a:xfrm>
           <a:prstGeom prst="rect">
             <a:avLst/>
@@ -3708,8 +3708,8 @@
         </p:nvSpPr>
         <p:spPr>
           <a:xfrm>
-            <a:off x="761787" y="3136849"/>
-            <a:ext cx="863376" cy="317480"/>
+            <a:off x="914400" y="3822192"/>
+            <a:ext cx="914400" cy="548640"/>
           </a:xfrm>
           <a:prstGeom prst="rect">
             <a:avLst/>
@@ -3721,11 +3721,11 @@
           <a:bodyPr wrap="square" rtlCol="0" anchor="t"/>
           <a:lstStyle/>
           <a:p>
-            <a:pPr indent="0" marL="0">
-              <a:buNone/>
-            </a:pPr>
-            <a:r>
-              <a:rPr lang="en-US" sz="2000" i="1" dirty="0">
+            <a:pPr algn="l" indent="0" marL="0">
+              <a:buNone/>
+            </a:pPr>
+            <a:r>
+              <a:rPr lang="en-US" sz="2400" i="1" dirty="0">
                 <a:solidFill>
                   <a:srgbClr val="17140F"/>
                 </a:solidFill>
@@ -3735,7 +3735,7 @@
               </a:rPr>
               <a:t>2025</a:t>
             </a:r>
-            <a:endParaRPr lang="en-US" sz="2000" dirty="0"/>
+            <a:endParaRPr lang="en-US" sz="2400" dirty="0"/>
           </a:p>
         </p:txBody>
       </p:sp>
@@ -3747,8 +3747,8 @@
         </p:nvSpPr>
         <p:spPr>
           <a:xfrm>
-            <a:off x="1752173" y="3136849"/>
-            <a:ext cx="5459608" cy="647670"/>
+            <a:off x="1920240" y="3822192"/>
+            <a:ext cx="4206240" cy="822960"/>
           </a:xfrm>
           <a:prstGeom prst="rect">
             <a:avLst/>
@@ -3760,14 +3760,14 @@
           <a:bodyPr wrap="square" rtlCol="0" anchor="t"/>
           <a:lstStyle/>
           <a:p>
-            <a:pPr indent="0" marL="0">
+            <a:pPr algn="l" indent="0" marL="0">
               <a:lnSpc>
                 <a:spcPct val="170000"/>
               </a:lnSpc>
               <a:buNone/>
             </a:pPr>
             <a:r>
-              <a:rPr lang="en-US" sz="1200" b="1" dirty="0">
+              <a:rPr lang="en-US" sz="1500" b="1" dirty="0">
                 <a:solidFill>
                   <a:srgbClr val="17140F"/>
                 </a:solidFill>
@@ -3777,14 +3777,14 @@
               </a:rPr>
               <a:t>中高層木造の増加</a:t>
             </a:r>
-            <a:pPr indent="0" marL="0">
+            <a:pPr algn="l" indent="0" marL="0">
               <a:lnSpc>
                 <a:spcPct val="170000"/>
               </a:lnSpc>
               <a:buNone/>
             </a:pPr>
             <a:r>
-              <a:rPr lang="en-US" sz="1200" dirty="0">
+              <a:rPr lang="en-US" sz="1400" dirty="0">
                 <a:solidFill>
                   <a:srgbClr val="000000"/>
                 </a:solidFill>
@@ -3795,14 +3795,14 @@
               <a:t>
 </a:t>
             </a:r>
-            <a:pPr indent="0" marL="0">
+            <a:pPr algn="l" indent="0" marL="0">
               <a:lnSpc>
                 <a:spcPct val="170000"/>
               </a:lnSpc>
               <a:buNone/>
             </a:pPr>
             <a:r>
-              <a:rPr lang="en-US" sz="1100" dirty="0">
+              <a:rPr lang="en-US" sz="1400" dirty="0">
                 <a:solidFill>
                   <a:srgbClr val="2B251E"/>
                 </a:solidFill>
@@ -3812,17 +3812,17 @@
               </a:rPr>
               <a:t>10階以上の木造ビルが国内で</a:t>
             </a:r>
-            <a:endParaRPr lang="en-US" sz="1200" dirty="0"/>
-          </a:p>
-          <a:p>
-            <a:pPr indent="0" marL="0">
+            <a:endParaRPr lang="en-US" sz="1400" dirty="0"/>
+          </a:p>
+          <a:p>
+            <a:pPr algn="l" indent="0" marL="0">
               <a:lnSpc>
                 <a:spcPct val="170000"/>
               </a:lnSpc>
               <a:buNone/>
             </a:pPr>
             <a:r>
-              <a:rPr lang="en-US" sz="1100" dirty="0">
+              <a:rPr lang="en-US" sz="1400" dirty="0">
                 <a:solidFill>
                   <a:srgbClr val="2B251E"/>
                 </a:solidFill>
@@ -3832,7 +3832,7 @@
               </a:rPr>
               <a:t>複数竣工。</a:t>
             </a:r>
-            <a:endParaRPr lang="en-US" sz="1200" dirty="0"/>
+            <a:endParaRPr lang="en-US" sz="1400" dirty="0"/>
           </a:p>
         </p:txBody>
       </p:sp>
@@ -3844,8 +3844,8 @@
         </p:nvSpPr>
         <p:spPr>
           <a:xfrm>
-            <a:off x="761787" y="3835268"/>
-            <a:ext cx="6602334" cy="13716"/>
+            <a:off x="914400" y="4663440"/>
+            <a:ext cx="5303520" cy="10973"/>
           </a:xfrm>
           <a:prstGeom prst="rect">
             <a:avLst/>
@@ -3864,8 +3864,8 @@
         </p:nvSpPr>
         <p:spPr>
           <a:xfrm>
-            <a:off x="761787" y="3886109"/>
-            <a:ext cx="863376" cy="317480"/>
+            <a:off x="914400" y="4736592"/>
+            <a:ext cx="914400" cy="548640"/>
           </a:xfrm>
           <a:prstGeom prst="rect">
             <a:avLst/>
@@ -3877,11 +3877,11 @@
           <a:bodyPr wrap="square" rtlCol="0" anchor="t"/>
           <a:lstStyle/>
           <a:p>
-            <a:pPr indent="0" marL="0">
-              <a:buNone/>
-            </a:pPr>
-            <a:r>
-              <a:rPr lang="en-US" sz="2000" i="1" dirty="0">
+            <a:pPr algn="l" indent="0" marL="0">
+              <a:buNone/>
+            </a:pPr>
+            <a:r>
+              <a:rPr lang="en-US" sz="2400" i="1" dirty="0">
                 <a:solidFill>
                   <a:srgbClr val="8B8578"/>
                 </a:solidFill>
@@ -3891,7 +3891,7 @@
               </a:rPr>
               <a:t>2030</a:t>
             </a:r>
-            <a:endParaRPr lang="en-US" sz="2000" dirty="0"/>
+            <a:endParaRPr lang="en-US" sz="2400" dirty="0"/>
           </a:p>
         </p:txBody>
       </p:sp>
@@ -3903,8 +3903,8 @@
         </p:nvSpPr>
         <p:spPr>
           <a:xfrm>
-            <a:off x="1752173" y="3886109"/>
-            <a:ext cx="5459608" cy="647670"/>
+            <a:off x="1920240" y="4736592"/>
+            <a:ext cx="4206240" cy="822960"/>
           </a:xfrm>
           <a:prstGeom prst="rect">
             <a:avLst/>
@@ -3916,14 +3916,14 @@
           <a:bodyPr wrap="square" rtlCol="0" anchor="t"/>
           <a:lstStyle/>
           <a:p>
-            <a:pPr indent="0" marL="0">
+            <a:pPr algn="l" indent="0" marL="0">
               <a:lnSpc>
                 <a:spcPct val="170000"/>
               </a:lnSpc>
               <a:buNone/>
             </a:pPr>
             <a:r>
-              <a:rPr lang="en-US" sz="1200" b="1" dirty="0">
+              <a:rPr lang="en-US" sz="1500" b="1" dirty="0">
                 <a:solidFill>
                   <a:srgbClr val="8B8578"/>
                 </a:solidFill>
@@ -3933,14 +3933,14 @@
               </a:rPr>
               <a:t>木造比率目標</a:t>
             </a:r>
-            <a:pPr indent="0" marL="0">
+            <a:pPr algn="l" indent="0" marL="0">
               <a:lnSpc>
                 <a:spcPct val="170000"/>
               </a:lnSpc>
               <a:buNone/>
             </a:pPr>
             <a:r>
-              <a:rPr lang="en-US" sz="1200" dirty="0">
+              <a:rPr lang="en-US" sz="1400" dirty="0">
                 <a:solidFill>
                   <a:srgbClr val="000000"/>
                 </a:solidFill>
@@ -3951,14 +3951,14 @@
               <a:t>
 </a:t>
             </a:r>
-            <a:pPr indent="0" marL="0">
+            <a:pPr algn="l" indent="0" marL="0">
               <a:lnSpc>
                 <a:spcPct val="170000"/>
               </a:lnSpc>
               <a:buNone/>
             </a:pPr>
             <a:r>
-              <a:rPr lang="en-US" sz="1100" dirty="0">
+              <a:rPr lang="en-US" sz="1400" dirty="0">
                 <a:solidFill>
                   <a:srgbClr val="8B8578"/>
                 </a:solidFill>
@@ -3968,17 +3968,17 @@
               </a:rPr>
               <a:t>新築の木造比率</a:t>
             </a:r>
-            <a:endParaRPr lang="en-US" sz="1200" dirty="0"/>
-          </a:p>
-          <a:p>
-            <a:pPr indent="0" marL="0">
+            <a:endParaRPr lang="en-US" sz="1400" dirty="0"/>
+          </a:p>
+          <a:p>
+            <a:pPr algn="l" indent="0" marL="0">
               <a:lnSpc>
                 <a:spcPct val="170000"/>
               </a:lnSpc>
               <a:buNone/>
             </a:pPr>
             <a:r>
-              <a:rPr lang="en-US" sz="1100" dirty="0">
+              <a:rPr lang="en-US" sz="1400" dirty="0">
                 <a:solidFill>
                   <a:srgbClr val="8B8578"/>
                 </a:solidFill>
@@ -3988,7 +3988,7 @@
               </a:rPr>
               <a:t>40% → 55% へ。</a:t>
             </a:r>
-            <a:endParaRPr lang="en-US" sz="1200" dirty="0"/>
+            <a:endParaRPr lang="en-US" sz="1400" dirty="0"/>
           </a:p>
         </p:txBody>
       </p:sp>
@@ -4000,8 +4000,8 @@
         </p:nvSpPr>
         <p:spPr>
           <a:xfrm>
-            <a:off x="761787" y="4584527"/>
-            <a:ext cx="6602334" cy="13716"/>
+            <a:off x="914400" y="5577840"/>
+            <a:ext cx="5303520" cy="10973"/>
           </a:xfrm>
           <a:prstGeom prst="rect">
             <a:avLst/>
@@ -4020,24 +4020,24 @@
         </p:nvSpPr>
         <p:spPr>
           <a:xfrm>
-            <a:off x="7745059" y="1422349"/>
-            <a:ext cx="3682106" cy="152430"/>
-          </a:xfrm>
-          <a:prstGeom prst="rect">
-            <a:avLst/>
-          </a:prstGeom>
-          <a:noFill/>
-          <a:ln/>
-        </p:spPr>
-        <p:txBody>
-          <a:bodyPr wrap="square" rtlCol="0" anchor="ctr"/>
-          <a:lstStyle/>
-          <a:p>
-            <a:pPr indent="0" marL="0">
-              <a:buNone/>
-            </a:pPr>
-            <a:r>
-              <a:rPr lang="en-US" sz="650" spc="40" kern="0" dirty="0">
+            <a:off x="6766560" y="1664208"/>
+            <a:ext cx="4507992" cy="228600"/>
+          </a:xfrm>
+          <a:prstGeom prst="rect">
+            <a:avLst/>
+          </a:prstGeom>
+          <a:noFill/>
+          <a:ln/>
+        </p:spPr>
+        <p:txBody>
+          <a:bodyPr wrap="square" rtlCol="0" anchor="t"/>
+          <a:lstStyle/>
+          <a:p>
+            <a:pPr algn="l" indent="0" marL="0">
+              <a:buNone/>
+            </a:pPr>
+            <a:r>
+              <a:rPr lang="en-US" sz="1100" spc="40" kern="0" dirty="0">
                 <a:solidFill>
                   <a:srgbClr val="8B8578"/>
                 </a:solidFill>
@@ -4047,7 +4047,7 @@
               </a:rPr>
               <a:t>2030年へ向かう、その到達点</a:t>
             </a:r>
-            <a:endParaRPr lang="en-US" sz="650" dirty="0"/>
+            <a:endParaRPr lang="en-US" sz="1100" dirty="0"/>
           </a:p>
         </p:txBody>
       </p:sp>
@@ -4059,8 +4059,8 @@
         </p:nvSpPr>
         <p:spPr>
           <a:xfrm>
-            <a:off x="7745059" y="1587490"/>
-            <a:ext cx="3682106" cy="1714500"/>
+            <a:off x="6766560" y="1920240"/>
+            <a:ext cx="4507992" cy="1737360"/>
           </a:xfrm>
           <a:prstGeom prst="rect">
             <a:avLst/>
@@ -4072,11 +4072,11 @@
           <a:bodyPr wrap="square" rtlCol="0" anchor="t"/>
           <a:lstStyle/>
           <a:p>
-            <a:pPr indent="0" marL="0">
-              <a:buNone/>
-            </a:pPr>
-            <a:r>
-              <a:rPr lang="en-US" sz="11200" b="1" dirty="0">
+            <a:pPr algn="l" indent="0" marL="0">
+              <a:buNone/>
+            </a:pPr>
+            <a:r>
+              <a:rPr lang="en-US" sz="9600" b="1" dirty="0">
                 <a:solidFill>
                   <a:srgbClr val="17140F"/>
                 </a:solidFill>
@@ -4086,11 +4086,11 @@
               </a:rPr>
               <a:t>18</a:t>
             </a:r>
-            <a:pPr indent="0" marL="0">
-              <a:buNone/>
-            </a:pPr>
-            <a:r>
-              <a:rPr lang="en-US" sz="3200" i="1" dirty="0">
+            <a:pPr algn="l" indent="0" marL="0">
+              <a:buNone/>
+            </a:pPr>
+            <a:r>
+              <a:rPr lang="en-US" sz="3600" i="1" dirty="0">
                 <a:solidFill>
                   <a:srgbClr val="17140F"/>
                 </a:solidFill>
@@ -4100,7 +4100,7 @@
               </a:rPr>
               <a:t>階</a:t>
             </a:r>
-            <a:endParaRPr lang="en-US" sz="11200" dirty="0"/>
+            <a:endParaRPr lang="en-US" sz="9600" dirty="0"/>
           </a:p>
         </p:txBody>
       </p:sp>
@@ -4112,8 +4112,8 @@
         </p:nvSpPr>
         <p:spPr>
           <a:xfrm>
-            <a:off x="7745059" y="3352830"/>
-            <a:ext cx="3682106" cy="13716"/>
+            <a:off x="6766560" y="3703320"/>
+            <a:ext cx="4507992" cy="10973"/>
           </a:xfrm>
           <a:prstGeom prst="rect">
             <a:avLst/>
@@ -4132,8 +4132,8 @@
         </p:nvSpPr>
         <p:spPr>
           <a:xfrm>
-            <a:off x="7745059" y="3454420"/>
-            <a:ext cx="3682106" cy="1270010"/>
+            <a:off x="6766560" y="3840480"/>
+            <a:ext cx="4507992" cy="1371600"/>
           </a:xfrm>
           <a:prstGeom prst="rect">
             <a:avLst/>
@@ -4145,14 +4145,14 @@
           <a:bodyPr wrap="square" rtlCol="0" anchor="t"/>
           <a:lstStyle/>
           <a:p>
-            <a:pPr indent="0" marL="0">
+            <a:pPr algn="l" indent="0" marL="0">
               <a:lnSpc>
                 <a:spcPct val="180000"/>
               </a:lnSpc>
               <a:buNone/>
             </a:pPr>
             <a:r>
-              <a:rPr lang="en-US" sz="1100" dirty="0">
+              <a:rPr lang="en-US" sz="1400" dirty="0">
                 <a:solidFill>
                   <a:srgbClr val="2B251E"/>
                 </a:solidFill>
@@ -4162,17 +4162,17 @@
               </a:rPr>
               <a:t>2025年、国内最高の木造ビル。</a:t>
             </a:r>
-            <a:endParaRPr lang="en-US" sz="1100" dirty="0"/>
-          </a:p>
-          <a:p>
-            <a:pPr indent="0" marL="0">
+            <a:endParaRPr lang="en-US" sz="1400" dirty="0"/>
+          </a:p>
+          <a:p>
+            <a:pPr algn="l" indent="0" marL="0">
               <a:lnSpc>
                 <a:spcPct val="180000"/>
               </a:lnSpc>
               <a:buNone/>
             </a:pPr>
             <a:r>
-              <a:rPr lang="en-US" sz="1100" dirty="0">
+              <a:rPr lang="en-US" sz="1400" dirty="0">
                 <a:solidFill>
                   <a:srgbClr val="2B251E"/>
                 </a:solidFill>
@@ -4182,17 +4182,17 @@
               </a:rPr>
               <a:t>CLTとRC造のハイブリッドで、</a:t>
             </a:r>
-            <a:endParaRPr lang="en-US" sz="1100" dirty="0"/>
-          </a:p>
-          <a:p>
-            <a:pPr indent="0" marL="0">
+            <a:endParaRPr lang="en-US" sz="1400" dirty="0"/>
+          </a:p>
+          <a:p>
+            <a:pPr algn="l" indent="0" marL="0">
               <a:lnSpc>
                 <a:spcPct val="180000"/>
               </a:lnSpc>
               <a:buNone/>
             </a:pPr>
             <a:r>
-              <a:rPr lang="en-US" sz="1100" dirty="0">
+              <a:rPr lang="en-US" sz="1400" dirty="0">
                 <a:solidFill>
                   <a:srgbClr val="2B251E"/>
                 </a:solidFill>
@@ -4202,7 +4202,7 @@
               </a:rPr>
               <a:t>木は「風合い」から「骨格」へ還った。</a:t>
             </a:r>
-            <a:endParaRPr lang="en-US" sz="1100" dirty="0"/>
+            <a:endParaRPr lang="en-US" sz="1400" dirty="0"/>
           </a:p>
         </p:txBody>
       </p:sp>
@@ -4246,8 +4246,8 @@
         </p:nvSpPr>
         <p:spPr>
           <a:xfrm>
-            <a:off x="761787" y="761970"/>
-            <a:ext cx="10665379" cy="666780"/>
+            <a:off x="914400" y="914400"/>
+            <a:ext cx="10360152" cy="822960"/>
           </a:xfrm>
           <a:prstGeom prst="rect">
             <a:avLst/>
@@ -4259,7 +4259,7 @@
           <a:bodyPr wrap="square" rtlCol="0" anchor="t"/>
           <a:lstStyle/>
           <a:p>
-            <a:pPr indent="0" marL="0">
+            <a:pPr algn="l" indent="0" marL="0">
               <a:buNone/>
             </a:pPr>
             <a:r>
@@ -4285,8 +4285,8 @@
         </p:nvSpPr>
         <p:spPr>
           <a:xfrm>
-            <a:off x="761787" y="1714500"/>
-            <a:ext cx="3555126" cy="36576"/>
+            <a:off x="914400" y="1920240"/>
+            <a:ext cx="3316224" cy="34747"/>
           </a:xfrm>
           <a:prstGeom prst="rect">
             <a:avLst/>
@@ -4305,8 +4305,8 @@
         </p:nvSpPr>
         <p:spPr>
           <a:xfrm>
-            <a:off x="761787" y="1777959"/>
-            <a:ext cx="3555126" cy="1238280"/>
+            <a:off x="914400" y="1975104"/>
+            <a:ext cx="3316224" cy="1371600"/>
           </a:xfrm>
           <a:prstGeom prst="rect">
             <a:avLst/>
@@ -4318,11 +4318,11 @@
           <a:bodyPr wrap="square" rtlCol="0" anchor="t"/>
           <a:lstStyle/>
           <a:p>
-            <a:pPr indent="0" marL="0">
-              <a:buNone/>
-            </a:pPr>
-            <a:r>
-              <a:rPr lang="en-US" sz="7400" b="1" dirty="0">
+            <a:pPr algn="l" indent="0" marL="0">
+              <a:buNone/>
+            </a:pPr>
+            <a:r>
+              <a:rPr lang="en-US" sz="7200" b="1" dirty="0">
                 <a:solidFill>
                   <a:srgbClr val="17140F"/>
                 </a:solidFill>
@@ -4332,11 +4332,11 @@
               </a:rPr>
               <a:t>−40</a:t>
             </a:r>
-            <a:pPr indent="0" marL="0">
-              <a:buNone/>
-            </a:pPr>
-            <a:r>
-              <a:rPr lang="en-US" sz="2600" i="1" dirty="0">
+            <a:pPr algn="l" indent="0" marL="0">
+              <a:buNone/>
+            </a:pPr>
+            <a:r>
+              <a:rPr lang="en-US" sz="2800" i="1" dirty="0">
                 <a:solidFill>
                   <a:srgbClr val="8B8578"/>
                 </a:solidFill>
@@ -4346,7 +4346,7 @@
               </a:rPr>
               <a:t>%</a:t>
             </a:r>
-            <a:endParaRPr lang="en-US" sz="7400" dirty="0"/>
+            <a:endParaRPr lang="en-US" sz="7200" dirty="0"/>
           </a:p>
         </p:txBody>
       </p:sp>
@@ -4358,8 +4358,8 @@
         </p:nvSpPr>
         <p:spPr>
           <a:xfrm>
-            <a:off x="761787" y="3079791"/>
-            <a:ext cx="3555126" cy="304770"/>
+            <a:off x="914400" y="3429000"/>
+            <a:ext cx="3316224" cy="411480"/>
           </a:xfrm>
           <a:prstGeom prst="rect">
             <a:avLst/>
@@ -4371,11 +4371,11 @@
           <a:bodyPr wrap="square" rtlCol="0" anchor="t"/>
           <a:lstStyle/>
           <a:p>
-            <a:pPr indent="0" marL="0">
-              <a:buNone/>
-            </a:pPr>
-            <a:r>
-              <a:rPr lang="en-US" sz="1500" b="1" dirty="0">
+            <a:pPr algn="l" indent="0" marL="0">
+              <a:buNone/>
+            </a:pPr>
+            <a:r>
+              <a:rPr lang="en-US" sz="1800" b="1" dirty="0">
                 <a:solidFill>
                   <a:srgbClr val="17140F"/>
                 </a:solidFill>
@@ -4385,7 +4385,7 @@
               </a:rPr>
               <a:t>設計期間</a:t>
             </a:r>
-            <a:endParaRPr lang="en-US" sz="1500" dirty="0"/>
+            <a:endParaRPr lang="en-US" sz="1800" dirty="0"/>
           </a:p>
         </p:txBody>
       </p:sp>
@@ -4397,8 +4397,8 @@
         </p:nvSpPr>
         <p:spPr>
           <a:xfrm>
-            <a:off x="761787" y="3441710"/>
-            <a:ext cx="3555126" cy="1270010"/>
+            <a:off x="914400" y="3886200"/>
+            <a:ext cx="3316224" cy="1645920"/>
           </a:xfrm>
           <a:prstGeom prst="rect">
             <a:avLst/>
@@ -4410,14 +4410,14 @@
           <a:bodyPr wrap="square" rtlCol="0" anchor="t"/>
           <a:lstStyle/>
           <a:p>
-            <a:pPr indent="0" marL="0">
+            <a:pPr algn="l" indent="0" marL="0">
               <a:lnSpc>
                 <a:spcPct val="175000"/>
               </a:lnSpc>
               <a:buNone/>
             </a:pPr>
             <a:r>
-              <a:rPr lang="en-US" sz="1100" dirty="0">
+              <a:rPr lang="en-US" sz="1400" dirty="0">
                 <a:solidFill>
                   <a:srgbClr val="2B251E"/>
                 </a:solidFill>
@@ -4427,17 +4427,17 @@
               </a:rPr>
               <a:t>法規チェック、構造計算、</a:t>
             </a:r>
-            <a:endParaRPr lang="en-US" sz="1100" dirty="0"/>
-          </a:p>
-          <a:p>
-            <a:pPr indent="0" marL="0">
+            <a:endParaRPr lang="en-US" sz="1400" dirty="0"/>
+          </a:p>
+          <a:p>
+            <a:pPr algn="l" indent="0" marL="0">
               <a:lnSpc>
                 <a:spcPct val="175000"/>
               </a:lnSpc>
               <a:buNone/>
             </a:pPr>
             <a:r>
-              <a:rPr lang="en-US" sz="1100" dirty="0">
+              <a:rPr lang="en-US" sz="1400" dirty="0">
                 <a:solidFill>
                   <a:srgbClr val="2B251E"/>
                 </a:solidFill>
@@ -4447,17 +4447,17 @@
               </a:rPr>
               <a:t>ドキュメント生成。</a:t>
             </a:r>
-            <a:endParaRPr lang="en-US" sz="1100" dirty="0"/>
-          </a:p>
-          <a:p>
-            <a:pPr indent="0" marL="0">
+            <a:endParaRPr lang="en-US" sz="1400" dirty="0"/>
+          </a:p>
+          <a:p>
+            <a:pPr algn="l" indent="0" marL="0">
               <a:lnSpc>
                 <a:spcPct val="175000"/>
               </a:lnSpc>
               <a:buNone/>
             </a:pPr>
             <a:r>
-              <a:rPr lang="en-US" sz="1100" dirty="0">
+              <a:rPr lang="en-US" sz="1400" dirty="0">
                 <a:solidFill>
                   <a:srgbClr val="2B251E"/>
                 </a:solidFill>
@@ -4467,7 +4467,7 @@
               </a:rPr>
               <a:t>手仕事の大半が自動化される。</a:t>
             </a:r>
-            <a:endParaRPr lang="en-US" sz="1100" dirty="0"/>
+            <a:endParaRPr lang="en-US" sz="1400" dirty="0"/>
           </a:p>
         </p:txBody>
       </p:sp>
@@ -4479,8 +4479,8 @@
         </p:nvSpPr>
         <p:spPr>
           <a:xfrm>
-            <a:off x="4469252" y="1714500"/>
-            <a:ext cx="3402787" cy="36576"/>
+            <a:off x="4367784" y="1920240"/>
+            <a:ext cx="3316224" cy="34747"/>
           </a:xfrm>
           <a:prstGeom prst="rect">
             <a:avLst/>
@@ -4499,8 +4499,8 @@
         </p:nvSpPr>
         <p:spPr>
           <a:xfrm>
-            <a:off x="4469252" y="1777959"/>
-            <a:ext cx="3402787" cy="1238280"/>
+            <a:off x="4367784" y="1975104"/>
+            <a:ext cx="3316224" cy="1371600"/>
           </a:xfrm>
           <a:prstGeom prst="rect">
             <a:avLst/>
@@ -4512,11 +4512,11 @@
           <a:bodyPr wrap="square" rtlCol="0" anchor="t"/>
           <a:lstStyle/>
           <a:p>
-            <a:pPr indent="0" marL="0">
-              <a:buNone/>
-            </a:pPr>
-            <a:r>
-              <a:rPr lang="en-US" sz="7400" b="1" dirty="0">
+            <a:pPr algn="l" indent="0" marL="0">
+              <a:buNone/>
+            </a:pPr>
+            <a:r>
+              <a:rPr lang="en-US" sz="7200" b="1" dirty="0">
                 <a:solidFill>
                   <a:srgbClr val="17140F"/>
                 </a:solidFill>
@@ -4526,11 +4526,11 @@
               </a:rPr>
               <a:t>−25</a:t>
             </a:r>
-            <a:pPr indent="0" marL="0">
-              <a:buNone/>
-            </a:pPr>
-            <a:r>
-              <a:rPr lang="en-US" sz="2600" i="1" dirty="0">
+            <a:pPr algn="l" indent="0" marL="0">
+              <a:buNone/>
+            </a:pPr>
+            <a:r>
+              <a:rPr lang="en-US" sz="2800" i="1" dirty="0">
                 <a:solidFill>
                   <a:srgbClr val="8B8578"/>
                 </a:solidFill>
@@ -4540,7 +4540,7 @@
               </a:rPr>
               <a:t>%</a:t>
             </a:r>
-            <a:endParaRPr lang="en-US" sz="7400" dirty="0"/>
+            <a:endParaRPr lang="en-US" sz="7200" dirty="0"/>
           </a:p>
         </p:txBody>
       </p:sp>
@@ -4552,8 +4552,8 @@
         </p:nvSpPr>
         <p:spPr>
           <a:xfrm>
-            <a:off x="4469252" y="3079791"/>
-            <a:ext cx="3402787" cy="304770"/>
+            <a:off x="4367784" y="3429000"/>
+            <a:ext cx="3316224" cy="411480"/>
           </a:xfrm>
           <a:prstGeom prst="rect">
             <a:avLst/>
@@ -4565,11 +4565,11 @@
           <a:bodyPr wrap="square" rtlCol="0" anchor="t"/>
           <a:lstStyle/>
           <a:p>
-            <a:pPr indent="0" marL="0">
-              <a:buNone/>
-            </a:pPr>
-            <a:r>
-              <a:rPr lang="en-US" sz="1500" b="1" dirty="0">
+            <a:pPr algn="l" indent="0" marL="0">
+              <a:buNone/>
+            </a:pPr>
+            <a:r>
+              <a:rPr lang="en-US" sz="1800" b="1" dirty="0">
                 <a:solidFill>
                   <a:srgbClr val="17140F"/>
                 </a:solidFill>
@@ -4579,7 +4579,7 @@
               </a:rPr>
               <a:t>施工コスト</a:t>
             </a:r>
-            <a:endParaRPr lang="en-US" sz="1500" dirty="0"/>
+            <a:endParaRPr lang="en-US" sz="1800" dirty="0"/>
           </a:p>
         </p:txBody>
       </p:sp>
@@ -4591,8 +4591,8 @@
         </p:nvSpPr>
         <p:spPr>
           <a:xfrm>
-            <a:off x="4469252" y="3441710"/>
-            <a:ext cx="3402787" cy="1270010"/>
+            <a:off x="4367784" y="3886200"/>
+            <a:ext cx="3316224" cy="1645920"/>
           </a:xfrm>
           <a:prstGeom prst="rect">
             <a:avLst/>
@@ -4604,14 +4604,14 @@
           <a:bodyPr wrap="square" rtlCol="0" anchor="t"/>
           <a:lstStyle/>
           <a:p>
-            <a:pPr indent="0" marL="0">
+            <a:pPr algn="l" indent="0" marL="0">
               <a:lnSpc>
                 <a:spcPct val="175000"/>
               </a:lnSpc>
               <a:buNone/>
             </a:pPr>
             <a:r>
-              <a:rPr lang="en-US" sz="1100" dirty="0">
+              <a:rPr lang="en-US" sz="1400" dirty="0">
                 <a:solidFill>
                   <a:srgbClr val="2B251E"/>
                 </a:solidFill>
@@ -4621,17 +4621,17 @@
               </a:rPr>
               <a:t>BIMデータから自動積算、</a:t>
             </a:r>
-            <a:endParaRPr lang="en-US" sz="1100" dirty="0"/>
-          </a:p>
-          <a:p>
-            <a:pPr indent="0" marL="0">
+            <a:endParaRPr lang="en-US" sz="1400" dirty="0"/>
+          </a:p>
+          <a:p>
+            <a:pPr algn="l" indent="0" marL="0">
               <a:lnSpc>
                 <a:spcPct val="175000"/>
               </a:lnSpc>
               <a:buNone/>
             </a:pPr>
             <a:r>
-              <a:rPr lang="en-US" sz="1100" dirty="0">
+              <a:rPr lang="en-US" sz="1400" dirty="0">
                 <a:solidFill>
                   <a:srgbClr val="2B251E"/>
                 </a:solidFill>
@@ -4641,17 +4641,17 @@
               </a:rPr>
               <a:t>工程最適化。</a:t>
             </a:r>
-            <a:endParaRPr lang="en-US" sz="1100" dirty="0"/>
-          </a:p>
-          <a:p>
-            <a:pPr indent="0" marL="0">
+            <a:endParaRPr lang="en-US" sz="1400" dirty="0"/>
+          </a:p>
+          <a:p>
+            <a:pPr algn="l" indent="0" marL="0">
               <a:lnSpc>
                 <a:spcPct val="175000"/>
               </a:lnSpc>
               <a:buNone/>
             </a:pPr>
             <a:r>
-              <a:rPr lang="en-US" sz="1100" dirty="0">
+              <a:rPr lang="en-US" sz="1400" dirty="0">
                 <a:solidFill>
                   <a:srgbClr val="2B251E"/>
                 </a:solidFill>
@@ -4661,7 +4661,7 @@
               </a:rPr>
               <a:t>見積の透明度が一段上がる。</a:t>
             </a:r>
-            <a:endParaRPr lang="en-US" sz="1100" dirty="0"/>
+            <a:endParaRPr lang="en-US" sz="1400" dirty="0"/>
           </a:p>
         </p:txBody>
       </p:sp>
@@ -4673,8 +4673,8 @@
         </p:nvSpPr>
         <p:spPr>
           <a:xfrm>
-            <a:off x="8024378" y="1714500"/>
-            <a:ext cx="3402787" cy="36576"/>
+            <a:off x="7821168" y="1920240"/>
+            <a:ext cx="3316224" cy="34747"/>
           </a:xfrm>
           <a:prstGeom prst="rect">
             <a:avLst/>
@@ -4693,8 +4693,8 @@
         </p:nvSpPr>
         <p:spPr>
           <a:xfrm>
-            <a:off x="8024378" y="1777959"/>
-            <a:ext cx="3402787" cy="1238280"/>
+            <a:off x="7821168" y="1975104"/>
+            <a:ext cx="3316224" cy="1371600"/>
           </a:xfrm>
           <a:prstGeom prst="rect">
             <a:avLst/>
@@ -4706,11 +4706,11 @@
           <a:bodyPr wrap="square" rtlCol="0" anchor="t"/>
           <a:lstStyle/>
           <a:p>
-            <a:pPr indent="0" marL="0">
-              <a:buNone/>
-            </a:pPr>
-            <a:r>
-              <a:rPr lang="en-US" sz="7400" b="1" dirty="0">
+            <a:pPr algn="l" indent="0" marL="0">
+              <a:buNone/>
+            </a:pPr>
+            <a:r>
+              <a:rPr lang="en-US" sz="7200" b="1" dirty="0">
                 <a:solidFill>
                   <a:srgbClr val="17140F"/>
                 </a:solidFill>
@@ -4720,11 +4720,11 @@
               </a:rPr>
               <a:t>+60</a:t>
             </a:r>
-            <a:pPr indent="0" marL="0">
-              <a:buNone/>
-            </a:pPr>
-            <a:r>
-              <a:rPr lang="en-US" sz="2600" i="1" dirty="0">
+            <a:pPr algn="l" indent="0" marL="0">
+              <a:buNone/>
+            </a:pPr>
+            <a:r>
+              <a:rPr lang="en-US" sz="2800" i="1" dirty="0">
                 <a:solidFill>
                   <a:srgbClr val="8B8578"/>
                 </a:solidFill>
@@ -4734,7 +4734,7 @@
               </a:rPr>
               <a:t>%</a:t>
             </a:r>
-            <a:endParaRPr lang="en-US" sz="7400" dirty="0"/>
+            <a:endParaRPr lang="en-US" sz="7200" dirty="0"/>
           </a:p>
         </p:txBody>
       </p:sp>
@@ -4746,8 +4746,8 @@
         </p:nvSpPr>
         <p:spPr>
           <a:xfrm>
-            <a:off x="8024378" y="3079791"/>
-            <a:ext cx="3402787" cy="304770"/>
+            <a:off x="7821168" y="3429000"/>
+            <a:ext cx="3316224" cy="411480"/>
           </a:xfrm>
           <a:prstGeom prst="rect">
             <a:avLst/>
@@ -4759,11 +4759,11 @@
           <a:bodyPr wrap="square" rtlCol="0" anchor="t"/>
           <a:lstStyle/>
           <a:p>
-            <a:pPr indent="0" marL="0">
-              <a:buNone/>
-            </a:pPr>
-            <a:r>
-              <a:rPr lang="en-US" sz="1500" b="1" dirty="0">
+            <a:pPr algn="l" indent="0" marL="0">
+              <a:buNone/>
+            </a:pPr>
+            <a:r>
+              <a:rPr lang="en-US" sz="1800" b="1" dirty="0">
                 <a:solidFill>
                   <a:srgbClr val="17140F"/>
                 </a:solidFill>
@@ -4773,7 +4773,7 @@
               </a:rPr>
               <a:t>維持管理の精度</a:t>
             </a:r>
-            <a:endParaRPr lang="en-US" sz="1500" dirty="0"/>
+            <a:endParaRPr lang="en-US" sz="1800" dirty="0"/>
           </a:p>
         </p:txBody>
       </p:sp>
@@ -4785,8 +4785,8 @@
         </p:nvSpPr>
         <p:spPr>
           <a:xfrm>
-            <a:off x="8024378" y="3441710"/>
-            <a:ext cx="3402787" cy="1270010"/>
+            <a:off x="7821168" y="3886200"/>
+            <a:ext cx="3316224" cy="1645920"/>
           </a:xfrm>
           <a:prstGeom prst="rect">
             <a:avLst/>
@@ -4798,14 +4798,14 @@
           <a:bodyPr wrap="square" rtlCol="0" anchor="t"/>
           <a:lstStyle/>
           <a:p>
-            <a:pPr indent="0" marL="0">
+            <a:pPr algn="l" indent="0" marL="0">
               <a:lnSpc>
                 <a:spcPct val="175000"/>
               </a:lnSpc>
               <a:buNone/>
             </a:pPr>
             <a:r>
-              <a:rPr lang="en-US" sz="1100" dirty="0">
+              <a:rPr lang="en-US" sz="1400" dirty="0">
                 <a:solidFill>
                   <a:srgbClr val="2B251E"/>
                 </a:solidFill>
@@ -4815,17 +4815,17 @@
               </a:rPr>
               <a:t>IoTセンサー × AI予測により、</a:t>
             </a:r>
-            <a:endParaRPr lang="en-US" sz="1100" dirty="0"/>
-          </a:p>
-          <a:p>
-            <a:pPr indent="0" marL="0">
+            <a:endParaRPr lang="en-US" sz="1400" dirty="0"/>
+          </a:p>
+          <a:p>
+            <a:pPr algn="l" indent="0" marL="0">
               <a:lnSpc>
                 <a:spcPct val="175000"/>
               </a:lnSpc>
               <a:buNone/>
             </a:pPr>
             <a:r>
-              <a:rPr lang="en-US" sz="1100" dirty="0">
+              <a:rPr lang="en-US" sz="1400" dirty="0">
                 <a:solidFill>
                   <a:srgbClr val="2B251E"/>
                 </a:solidFill>
@@ -4835,17 +4835,17 @@
               </a:rPr>
               <a:t>建物は「使われながら学習する」</a:t>
             </a:r>
-            <a:endParaRPr lang="en-US" sz="1100" dirty="0"/>
-          </a:p>
-          <a:p>
-            <a:pPr indent="0" marL="0">
+            <a:endParaRPr lang="en-US" sz="1400" dirty="0"/>
+          </a:p>
+          <a:p>
+            <a:pPr algn="l" indent="0" marL="0">
               <a:lnSpc>
                 <a:spcPct val="175000"/>
               </a:lnSpc>
               <a:buNone/>
             </a:pPr>
             <a:r>
-              <a:rPr lang="en-US" sz="1100" dirty="0">
+              <a:rPr lang="en-US" sz="1400" dirty="0">
                 <a:solidFill>
                   <a:srgbClr val="2B251E"/>
                 </a:solidFill>
@@ -4855,7 +4855,7 @@
               </a:rPr>
               <a:t>対象に。</a:t>
             </a:r>
-            <a:endParaRPr lang="en-US" sz="1100" dirty="0"/>
+            <a:endParaRPr lang="en-US" sz="1400" dirty="0"/>
           </a:p>
         </p:txBody>
       </p:sp>
@@ -4867,8 +4867,8 @@
         </p:nvSpPr>
         <p:spPr>
           <a:xfrm>
-            <a:off x="761787" y="5816590"/>
-            <a:ext cx="25420" cy="330190"/>
+            <a:off x="914400" y="5760720"/>
+            <a:ext cx="27432" cy="457200"/>
           </a:xfrm>
           <a:prstGeom prst="rect">
             <a:avLst/>
@@ -4887,27 +4887,27 @@
         </p:nvSpPr>
         <p:spPr>
           <a:xfrm>
-            <a:off x="901416" y="5791170"/>
-            <a:ext cx="10665379" cy="457200"/>
-          </a:xfrm>
-          <a:prstGeom prst="rect">
-            <a:avLst/>
-          </a:prstGeom>
-          <a:noFill/>
-          <a:ln/>
-        </p:spPr>
-        <p:txBody>
-          <a:bodyPr wrap="square" rtlCol="0" anchor="ctr"/>
-          <a:lstStyle/>
-          <a:p>
-            <a:pPr indent="0" marL="0">
+            <a:off x="1078992" y="5715000"/>
+            <a:ext cx="10360152" cy="594360"/>
+          </a:xfrm>
+          <a:prstGeom prst="rect">
+            <a:avLst/>
+          </a:prstGeom>
+          <a:noFill/>
+          <a:ln/>
+        </p:spPr>
+        <p:txBody>
+          <a:bodyPr wrap="square" rtlCol="0" anchor="t"/>
+          <a:lstStyle/>
+          <a:p>
+            <a:pPr algn="l" indent="0" marL="0">
               <a:lnSpc>
                 <a:spcPct val="160000"/>
               </a:lnSpc>
               <a:buNone/>
             </a:pPr>
             <a:r>
-              <a:rPr lang="en-US" sz="1200" i="1" dirty="0">
+              <a:rPr lang="en-US" sz="1500" i="1" dirty="0">
                 <a:solidFill>
                   <a:srgbClr val="2B251E"/>
                 </a:solidFill>
@@ -4917,17 +4917,17 @@
               </a:rPr>
               <a:t>— 創造性の輪郭は変わらない。</a:t>
             </a:r>
-            <a:endParaRPr lang="en-US" sz="1200" dirty="0"/>
-          </a:p>
-          <a:p>
-            <a:pPr indent="0" marL="0">
+            <a:endParaRPr lang="en-US" sz="1500" dirty="0"/>
+          </a:p>
+          <a:p>
+            <a:pPr algn="l" indent="0" marL="0">
               <a:lnSpc>
                 <a:spcPct val="160000"/>
               </a:lnSpc>
               <a:buNone/>
             </a:pPr>
             <a:r>
-              <a:rPr lang="en-US" sz="1200" i="1" dirty="0">
+              <a:rPr lang="en-US" sz="1500" i="1" dirty="0">
                 <a:solidFill>
                   <a:srgbClr val="2B251E"/>
                 </a:solidFill>
@@ -4937,7 +4937,7 @@
               </a:rPr>
               <a:t>ただ、そこに至る道のりが短くなる。</a:t>
             </a:r>
-            <a:endParaRPr lang="en-US" sz="1200" dirty="0"/>
+            <a:endParaRPr lang="en-US" sz="1500" dirty="0"/>
           </a:p>
         </p:txBody>
       </p:sp>
@@ -4981,13 +4981,13 @@
         </p:nvSpPr>
         <p:spPr>
           <a:xfrm>
-            <a:off x="11173236" y="-381030"/>
-            <a:ext cx="1396655" cy="1396655"/>
+            <a:off x="11365992" y="-1737360"/>
+            <a:ext cx="2560320" cy="2560320"/>
           </a:xfrm>
           <a:prstGeom prst="ellipse">
             <a:avLst/>
           </a:prstGeom>
-          <a:ln w="19050">
+          <a:ln w="15240">
             <a:solidFill>
               <a:srgbClr val="17140F"/>
             </a:solidFill>
@@ -5003,8 +5003,8 @@
         </p:nvSpPr>
         <p:spPr>
           <a:xfrm>
-            <a:off x="6088121" y="761970"/>
-            <a:ext cx="12710" cy="5486400"/>
+            <a:off x="6085332" y="914400"/>
+            <a:ext cx="13716" cy="5349240"/>
           </a:xfrm>
           <a:prstGeom prst="rect">
             <a:avLst/>
@@ -5023,8 +5023,8 @@
         </p:nvSpPr>
         <p:spPr>
           <a:xfrm>
-            <a:off x="761787" y="761970"/>
-            <a:ext cx="5097826" cy="558790"/>
+            <a:off x="914400" y="914400"/>
+            <a:ext cx="4942332" cy="731520"/>
           </a:xfrm>
           <a:prstGeom prst="rect">
             <a:avLst/>
@@ -5036,7 +5036,7 @@
           <a:bodyPr wrap="square" rtlCol="0" anchor="t"/>
           <a:lstStyle/>
           <a:p>
-            <a:pPr indent="0" marL="0">
+            <a:pPr algn="l" indent="0" marL="0">
               <a:buNone/>
             </a:pPr>
             <a:r>
@@ -5062,8 +5062,8 @@
         </p:nvSpPr>
         <p:spPr>
           <a:xfrm>
-            <a:off x="761787" y="1320759"/>
-            <a:ext cx="5097826" cy="1238280"/>
+            <a:off x="914400" y="1645920"/>
+            <a:ext cx="4942332" cy="1645920"/>
           </a:xfrm>
           <a:prstGeom prst="rect">
             <a:avLst/>
@@ -5075,14 +5075,14 @@
           <a:bodyPr wrap="square" rtlCol="0" anchor="t"/>
           <a:lstStyle/>
           <a:p>
-            <a:pPr indent="0" marL="0">
+            <a:pPr algn="l" indent="0" marL="0">
               <a:lnSpc>
                 <a:spcPct val="105000"/>
               </a:lnSpc>
               <a:buNone/>
             </a:pPr>
             <a:r>
-              <a:rPr lang="en-US" sz="4000" b="1" dirty="0">
+              <a:rPr lang="en-US" sz="4400" b="1" dirty="0">
                 <a:solidFill>
                   <a:srgbClr val="17140F"/>
                 </a:solidFill>
@@ -5092,40 +5092,321 @@
               </a:rPr>
               <a:t>既存を</a:t>
             </a:r>
+            <a:endParaRPr lang="en-US" sz="4400" dirty="0"/>
+          </a:p>
+          <a:p>
+            <a:pPr algn="l" indent="0" marL="0">
+              <a:lnSpc>
+                <a:spcPct val="105000"/>
+              </a:lnSpc>
+              <a:buNone/>
+            </a:pPr>
+            <a:r>
+              <a:rPr lang="en-US" sz="4400" b="1" dirty="0">
+                <a:solidFill>
+                  <a:srgbClr val="17140F"/>
+                </a:solidFill>
+                <a:latin typeface="游明朝" pitchFamily="34" charset="0"/>
+                <a:ea typeface="游明朝" pitchFamily="34" charset="-122"/>
+                <a:cs typeface="游明朝" pitchFamily="34" charset="-120"/>
+              </a:rPr>
+              <a:t>読み直す。</a:t>
+            </a:r>
+            <a:endParaRPr lang="en-US" sz="4400" dirty="0"/>
+          </a:p>
+        </p:txBody>
+      </p:sp>
+      <p:sp>
+        <p:nvSpPr>
+          <p:cNvPr id="6" name="Text 4"/>
+          <p:cNvSpPr/>
+          <p:nvPr/>
+        </p:nvSpPr>
+        <p:spPr>
+          <a:xfrm>
+            <a:off x="914400" y="3337560"/>
+            <a:ext cx="4942332" cy="1737360"/>
+          </a:xfrm>
+          <a:prstGeom prst="rect">
+            <a:avLst/>
+          </a:prstGeom>
+          <a:noFill/>
+          <a:ln/>
+        </p:spPr>
+        <p:txBody>
+          <a:bodyPr wrap="square" rtlCol="0" anchor="t"/>
+          <a:lstStyle/>
+          <a:p>
+            <a:pPr algn="l" indent="0" marL="0">
+              <a:lnSpc>
+                <a:spcPct val="185000"/>
+              </a:lnSpc>
+              <a:buNone/>
+            </a:pPr>
+            <a:r>
+              <a:rPr lang="en-US" sz="1400" dirty="0">
+                <a:solidFill>
+                  <a:srgbClr val="2B251E"/>
+                </a:solidFill>
+                <a:latin typeface="游明朝" pitchFamily="34" charset="0"/>
+                <a:ea typeface="游明朝" pitchFamily="34" charset="-122"/>
+                <a:cs typeface="游明朝" pitchFamily="34" charset="-120"/>
+              </a:rPr>
+              <a:t>新築の時代から、</a:t>
+            </a:r>
+            <a:endParaRPr lang="en-US" sz="1400" dirty="0"/>
+          </a:p>
+          <a:p>
+            <a:pPr algn="l" indent="0" marL="0">
+              <a:lnSpc>
+                <a:spcPct val="185000"/>
+              </a:lnSpc>
+              <a:buNone/>
+            </a:pPr>
+            <a:r>
+              <a:rPr lang="en-US" sz="1400" dirty="0">
+                <a:solidFill>
+                  <a:srgbClr val="2B251E"/>
+                </a:solidFill>
+                <a:latin typeface="游明朝" pitchFamily="34" charset="0"/>
+                <a:ea typeface="游明朝" pitchFamily="34" charset="-122"/>
+                <a:cs typeface="游明朝" pitchFamily="34" charset="-120"/>
+              </a:rPr>
+              <a:t>ストック更新の時代へ。</a:t>
+            </a:r>
+            <a:endParaRPr lang="en-US" sz="1400" dirty="0"/>
+          </a:p>
+          <a:p>
+            <a:pPr algn="l" indent="0" marL="0">
+              <a:lnSpc>
+                <a:spcPct val="185000"/>
+              </a:lnSpc>
+              <a:buNone/>
+            </a:pPr>
+            <a:r>
+              <a:rPr lang="en-US" sz="1400" dirty="0">
+                <a:solidFill>
+                  <a:srgbClr val="2B251E"/>
+                </a:solidFill>
+                <a:latin typeface="游明朝" pitchFamily="34" charset="0"/>
+                <a:ea typeface="游明朝" pitchFamily="34" charset="-122"/>
+                <a:cs typeface="游明朝" pitchFamily="34" charset="-120"/>
+              </a:rPr>
+              <a:t>既存躯体の価値を読み解き、</a:t>
+            </a:r>
+            <a:endParaRPr lang="en-US" sz="1400" dirty="0"/>
+          </a:p>
+          <a:p>
+            <a:pPr algn="l" indent="0" marL="0">
+              <a:lnSpc>
+                <a:spcPct val="185000"/>
+              </a:lnSpc>
+              <a:buNone/>
+            </a:pPr>
+            <a:r>
+              <a:rPr lang="en-US" sz="1400" dirty="0">
+                <a:solidFill>
+                  <a:srgbClr val="2B251E"/>
+                </a:solidFill>
+                <a:latin typeface="游明朝" pitchFamily="34" charset="0"/>
+                <a:ea typeface="游明朝" pitchFamily="34" charset="-122"/>
+                <a:cs typeface="游明朝" pitchFamily="34" charset="-120"/>
+              </a:rPr>
+              <a:t>手を入れることで街が変わる。</a:t>
+            </a:r>
+            <a:endParaRPr lang="en-US" sz="1400" dirty="0"/>
+          </a:p>
+        </p:txBody>
+      </p:sp>
+      <p:sp>
+        <p:nvSpPr>
+          <p:cNvPr id="7" name="Text 5"/>
+          <p:cNvSpPr/>
+          <p:nvPr/>
+        </p:nvSpPr>
+        <p:spPr>
+          <a:xfrm>
+            <a:off x="914400" y="5074920"/>
+            <a:ext cx="4942332" cy="1005840"/>
+          </a:xfrm>
+          <a:prstGeom prst="rect">
+            <a:avLst/>
+          </a:prstGeom>
+          <a:noFill/>
+          <a:ln/>
+        </p:spPr>
+        <p:txBody>
+          <a:bodyPr wrap="square" rtlCol="0" anchor="t"/>
+          <a:lstStyle/>
+          <a:p>
+            <a:pPr algn="l" indent="0" marL="0">
+              <a:buNone/>
+            </a:pPr>
+            <a:r>
+              <a:rPr lang="en-US" sz="6000" b="1" dirty="0">
+                <a:solidFill>
+                  <a:srgbClr val="17140F"/>
+                </a:solidFill>
+                <a:latin typeface="游明朝" pitchFamily="34" charset="0"/>
+                <a:ea typeface="游明朝" pitchFamily="34" charset="-122"/>
+                <a:cs typeface="游明朝" pitchFamily="34" charset="-120"/>
+              </a:rPr>
+              <a:t>64%</a:t>
+            </a:r>
+            <a:endParaRPr lang="en-US" sz="6000" dirty="0"/>
+          </a:p>
+        </p:txBody>
+      </p:sp>
+      <p:sp>
+        <p:nvSpPr>
+          <p:cNvPr id="8" name="Text 6"/>
+          <p:cNvSpPr/>
+          <p:nvPr/>
+        </p:nvSpPr>
+        <p:spPr>
+          <a:xfrm>
+            <a:off x="914400" y="6080760"/>
+            <a:ext cx="4942332" cy="411480"/>
+          </a:xfrm>
+          <a:prstGeom prst="rect">
+            <a:avLst/>
+          </a:prstGeom>
+          <a:noFill/>
+          <a:ln/>
+        </p:spPr>
+        <p:txBody>
+          <a:bodyPr wrap="square" rtlCol="0" anchor="t"/>
+          <a:lstStyle/>
+          <a:p>
+            <a:pPr algn="l" indent="0" marL="0">
+              <a:buNone/>
+            </a:pPr>
+            <a:r>
+              <a:rPr lang="en-US" sz="1300" dirty="0">
+                <a:solidFill>
+                  <a:srgbClr val="8B8578"/>
+                </a:solidFill>
+                <a:latin typeface="游明朝" pitchFamily="34" charset="0"/>
+                <a:ea typeface="游明朝" pitchFamily="34" charset="-122"/>
+                <a:cs typeface="游明朝" pitchFamily="34" charset="-120"/>
+              </a:rPr>
+              <a:t>2030年 リノベ市場比率の予測</a:t>
+            </a:r>
+            <a:endParaRPr lang="en-US" sz="1300" dirty="0"/>
+          </a:p>
+        </p:txBody>
+      </p:sp>
+      <p:sp>
+        <p:nvSpPr>
+          <p:cNvPr id="9" name="Text 7"/>
+          <p:cNvSpPr/>
+          <p:nvPr/>
+        </p:nvSpPr>
+        <p:spPr>
+          <a:xfrm>
+            <a:off x="6542532" y="914400"/>
+            <a:ext cx="4732020" cy="731520"/>
+          </a:xfrm>
+          <a:prstGeom prst="rect">
+            <a:avLst/>
+          </a:prstGeom>
+          <a:noFill/>
+          <a:ln/>
+        </p:spPr>
+        <p:txBody>
+          <a:bodyPr wrap="square" rtlCol="0" anchor="t"/>
+          <a:lstStyle/>
+          <a:p>
+            <a:pPr algn="l" indent="0" marL="0">
+              <a:buNone/>
+            </a:pPr>
+            <a:r>
+              <a:rPr lang="en-US" sz="4000" i="1" dirty="0">
+                <a:solidFill>
+                  <a:srgbClr val="17140F"/>
+                </a:solidFill>
+                <a:latin typeface="游明朝" pitchFamily="34" charset="0"/>
+                <a:ea typeface="游明朝" pitchFamily="34" charset="-122"/>
+                <a:cs typeface="游明朝" pitchFamily="34" charset="-120"/>
+              </a:rPr>
+              <a:t>05</a:t>
+            </a:r>
             <a:endParaRPr lang="en-US" sz="4000" dirty="0"/>
           </a:p>
-          <a:p>
-            <a:pPr indent="0" marL="0">
+        </p:txBody>
+      </p:sp>
+      <p:sp>
+        <p:nvSpPr>
+          <p:cNvPr id="10" name="Text 8"/>
+          <p:cNvSpPr/>
+          <p:nvPr/>
+        </p:nvSpPr>
+        <p:spPr>
+          <a:xfrm>
+            <a:off x="6542532" y="1645920"/>
+            <a:ext cx="4732020" cy="1645920"/>
+          </a:xfrm>
+          <a:prstGeom prst="rect">
+            <a:avLst/>
+          </a:prstGeom>
+          <a:noFill/>
+          <a:ln/>
+        </p:spPr>
+        <p:txBody>
+          <a:bodyPr wrap="square" rtlCol="0" anchor="t"/>
+          <a:lstStyle/>
+          <a:p>
+            <a:pPr algn="l" indent="0" marL="0">
               <a:lnSpc>
                 <a:spcPct val="105000"/>
               </a:lnSpc>
               <a:buNone/>
             </a:pPr>
             <a:r>
-              <a:rPr lang="en-US" sz="4000" b="1" dirty="0">
-                <a:solidFill>
-                  <a:srgbClr val="17140F"/>
-                </a:solidFill>
-                <a:latin typeface="游明朝" pitchFamily="34" charset="0"/>
-                <a:ea typeface="游明朝" pitchFamily="34" charset="-122"/>
-                <a:cs typeface="游明朝" pitchFamily="34" charset="-120"/>
-              </a:rPr>
-              <a:t>読み直す。</a:t>
-            </a:r>
-            <a:endParaRPr lang="en-US" sz="4000" dirty="0"/>
-          </a:p>
-        </p:txBody>
-      </p:sp>
-      <p:sp>
-        <p:nvSpPr>
-          <p:cNvPr id="6" name="Text 4"/>
-          <p:cNvSpPr/>
-          <p:nvPr/>
-        </p:nvSpPr>
-        <p:spPr>
-          <a:xfrm>
-            <a:off x="761787" y="2635209"/>
-            <a:ext cx="5097826" cy="1524030"/>
+              <a:rPr lang="en-US" sz="4400" b="1" dirty="0">
+                <a:solidFill>
+                  <a:srgbClr val="17140F"/>
+                </a:solidFill>
+                <a:latin typeface="游明朝" pitchFamily="34" charset="0"/>
+                <a:ea typeface="游明朝" pitchFamily="34" charset="-122"/>
+                <a:cs typeface="游明朝" pitchFamily="34" charset="-120"/>
+              </a:rPr>
+              <a:t>建築は、</a:t>
+            </a:r>
+            <a:endParaRPr lang="en-US" sz="4400" dirty="0"/>
+          </a:p>
+          <a:p>
+            <a:pPr algn="l" indent="0" marL="0">
+              <a:lnSpc>
+                <a:spcPct val="105000"/>
+              </a:lnSpc>
+              <a:buNone/>
+            </a:pPr>
+            <a:r>
+              <a:rPr lang="en-US" sz="4400" b="1" dirty="0">
+                <a:solidFill>
+                  <a:srgbClr val="17140F"/>
+                </a:solidFill>
+                <a:latin typeface="游明朝" pitchFamily="34" charset="0"/>
+                <a:ea typeface="游明朝" pitchFamily="34" charset="-122"/>
+                <a:cs typeface="游明朝" pitchFamily="34" charset="-120"/>
+              </a:rPr>
+              <a:t>ケアになる。</a:t>
+            </a:r>
+            <a:endParaRPr lang="en-US" sz="4400" dirty="0"/>
+          </a:p>
+        </p:txBody>
+      </p:sp>
+      <p:sp>
+        <p:nvSpPr>
+          <p:cNvPr id="11" name="Text 9"/>
+          <p:cNvSpPr/>
+          <p:nvPr/>
+        </p:nvSpPr>
+        <p:spPr>
+          <a:xfrm>
+            <a:off x="6542532" y="3337560"/>
+            <a:ext cx="4732020" cy="1737360"/>
           </a:xfrm>
           <a:prstGeom prst="rect">
             <a:avLst/>
@@ -5137,14 +5418,14 @@
           <a:bodyPr wrap="square" rtlCol="0" anchor="t"/>
           <a:lstStyle/>
           <a:p>
-            <a:pPr indent="0" marL="0">
+            <a:pPr algn="l" indent="0" marL="0">
               <a:lnSpc>
                 <a:spcPct val="185000"/>
               </a:lnSpc>
               <a:buNone/>
             </a:pPr>
             <a:r>
-              <a:rPr lang="en-US" sz="1100" dirty="0">
+              <a:rPr lang="en-US" sz="1400" dirty="0">
                 <a:solidFill>
                   <a:srgbClr val="2B251E"/>
                 </a:solidFill>
@@ -5152,19 +5433,19 @@
                 <a:ea typeface="游明朝" pitchFamily="34" charset="-122"/>
                 <a:cs typeface="游明朝" pitchFamily="34" charset="-120"/>
               </a:rPr>
-              <a:t>新築の時代から、</a:t>
-            </a:r>
-            <a:endParaRPr lang="en-US" sz="1100" dirty="0"/>
-          </a:p>
-          <a:p>
-            <a:pPr indent="0" marL="0">
+              <a:t>WELL認証、CASBEE-ウェルネス、</a:t>
+            </a:r>
+            <a:endParaRPr lang="en-US" sz="1400" dirty="0"/>
+          </a:p>
+          <a:p>
+            <a:pPr algn="l" indent="0" marL="0">
               <a:lnSpc>
                 <a:spcPct val="185000"/>
               </a:lnSpc>
               <a:buNone/>
             </a:pPr>
             <a:r>
-              <a:rPr lang="en-US" sz="1100" dirty="0">
+              <a:rPr lang="en-US" sz="1400" dirty="0">
                 <a:solidFill>
                   <a:srgbClr val="2B251E"/>
                 </a:solidFill>
@@ -5172,19 +5453,19 @@
                 <a:ea typeface="游明朝" pitchFamily="34" charset="-122"/>
                 <a:cs typeface="游明朝" pitchFamily="34" charset="-120"/>
               </a:rPr>
-              <a:t>ストック更新の時代へ。</a:t>
-            </a:r>
-            <a:endParaRPr lang="en-US" sz="1100" dirty="0"/>
-          </a:p>
-          <a:p>
-            <a:pPr indent="0" marL="0">
+              <a:t>環境IoTによる快適性の数値化。</a:t>
+            </a:r>
+            <a:endParaRPr lang="en-US" sz="1400" dirty="0"/>
+          </a:p>
+          <a:p>
+            <a:pPr algn="l" indent="0" marL="0">
               <a:lnSpc>
                 <a:spcPct val="185000"/>
               </a:lnSpc>
               <a:buNone/>
             </a:pPr>
             <a:r>
-              <a:rPr lang="en-US" sz="1100" dirty="0">
+              <a:rPr lang="en-US" sz="1400" dirty="0">
                 <a:solidFill>
                   <a:srgbClr val="2B251E"/>
                 </a:solidFill>
@@ -5192,19 +5473,19 @@
                 <a:ea typeface="游明朝" pitchFamily="34" charset="-122"/>
                 <a:cs typeface="游明朝" pitchFamily="34" charset="-120"/>
               </a:rPr>
-              <a:t>既存躯体の価値を読み解き、</a:t>
-            </a:r>
-            <a:endParaRPr lang="en-US" sz="1100" dirty="0"/>
-          </a:p>
-          <a:p>
-            <a:pPr indent="0" marL="0">
+              <a:t>空間は「健康を手当てする装置」</a:t>
+            </a:r>
+            <a:endParaRPr lang="en-US" sz="1400" dirty="0"/>
+          </a:p>
+          <a:p>
+            <a:pPr algn="l" indent="0" marL="0">
               <a:lnSpc>
                 <a:spcPct val="185000"/>
               </a:lnSpc>
               <a:buNone/>
             </a:pPr>
             <a:r>
-              <a:rPr lang="en-US" sz="1100" dirty="0">
+              <a:rPr lang="en-US" sz="1400" dirty="0">
                 <a:solidFill>
                   <a:srgbClr val="2B251E"/>
                 </a:solidFill>
@@ -5212,22 +5493,22 @@
                 <a:ea typeface="游明朝" pitchFamily="34" charset="-122"/>
                 <a:cs typeface="游明朝" pitchFamily="34" charset="-120"/>
               </a:rPr>
-              <a:t>手を入れることで街が変わる。</a:t>
-            </a:r>
-            <a:endParaRPr lang="en-US" sz="1100" dirty="0"/>
-          </a:p>
-        </p:txBody>
-      </p:sp>
-      <p:sp>
-        <p:nvSpPr>
-          <p:cNvPr id="7" name="Text 5"/>
-          <p:cNvSpPr/>
-          <p:nvPr/>
-        </p:nvSpPr>
-        <p:spPr>
-          <a:xfrm>
-            <a:off x="761787" y="4190970"/>
-            <a:ext cx="5097826" cy="984260"/>
+              <a:t>として設計される。</a:t>
+            </a:r>
+            <a:endParaRPr lang="en-US" sz="1400" dirty="0"/>
+          </a:p>
+        </p:txBody>
+      </p:sp>
+      <p:sp>
+        <p:nvSpPr>
+          <p:cNvPr id="12" name="Text 10"/>
+          <p:cNvSpPr/>
+          <p:nvPr/>
+        </p:nvSpPr>
+        <p:spPr>
+          <a:xfrm>
+            <a:off x="6542532" y="5074920"/>
+            <a:ext cx="4732020" cy="1005840"/>
           </a:xfrm>
           <a:prstGeom prst="rect">
             <a:avLst/>
@@ -5239,34 +5520,34 @@
           <a:bodyPr wrap="square" rtlCol="0" anchor="t"/>
           <a:lstStyle/>
           <a:p>
-            <a:pPr indent="0" marL="0">
-              <a:buNone/>
-            </a:pPr>
-            <a:r>
-              <a:rPr lang="en-US" sz="6400" b="1" dirty="0">
-                <a:solidFill>
-                  <a:srgbClr val="17140F"/>
-                </a:solidFill>
-                <a:latin typeface="游明朝" pitchFamily="34" charset="0"/>
-                <a:ea typeface="游明朝" pitchFamily="34" charset="-122"/>
-                <a:cs typeface="游明朝" pitchFamily="34" charset="-120"/>
-              </a:rPr>
-              <a:t>64%</a:t>
-            </a:r>
-            <a:endParaRPr lang="en-US" sz="6400" dirty="0"/>
-          </a:p>
-        </p:txBody>
-      </p:sp>
-      <p:sp>
-        <p:nvSpPr>
-          <p:cNvPr id="8" name="Text 6"/>
-          <p:cNvSpPr/>
-          <p:nvPr/>
-        </p:nvSpPr>
-        <p:spPr>
-          <a:xfrm>
-            <a:off x="761787" y="5206959"/>
-            <a:ext cx="5097826" cy="317480"/>
+            <a:pPr algn="l" indent="0" marL="0">
+              <a:buNone/>
+            </a:pPr>
+            <a:r>
+              <a:rPr lang="en-US" sz="6000" b="1" dirty="0">
+                <a:solidFill>
+                  <a:srgbClr val="17140F"/>
+                </a:solidFill>
+                <a:latin typeface="游明朝" pitchFamily="34" charset="0"/>
+                <a:ea typeface="游明朝" pitchFamily="34" charset="-122"/>
+                <a:cs typeface="游明朝" pitchFamily="34" charset="-120"/>
+              </a:rPr>
+              <a:t>×3.2</a:t>
+            </a:r>
+            <a:endParaRPr lang="en-US" sz="6000" dirty="0"/>
+          </a:p>
+        </p:txBody>
+      </p:sp>
+      <p:sp>
+        <p:nvSpPr>
+          <p:cNvPr id="13" name="Text 11"/>
+          <p:cNvSpPr/>
+          <p:nvPr/>
+        </p:nvSpPr>
+        <p:spPr>
+          <a:xfrm>
+            <a:off x="6542532" y="6080760"/>
+            <a:ext cx="4732020" cy="411480"/>
           </a:xfrm>
           <a:prstGeom prst="rect">
             <a:avLst/>
@@ -5278,11 +5559,11 @@
           <a:bodyPr wrap="square" rtlCol="0" anchor="t"/>
           <a:lstStyle/>
           <a:p>
-            <a:pPr indent="0" marL="0">
-              <a:buNone/>
-            </a:pPr>
-            <a:r>
-              <a:rPr lang="en-US" sz="1100" dirty="0">
+            <a:pPr algn="l" indent="0" marL="0">
+              <a:buNone/>
+            </a:pPr>
+            <a:r>
+              <a:rPr lang="en-US" sz="1300" dirty="0">
                 <a:solidFill>
                   <a:srgbClr val="8B8578"/>
                 </a:solidFill>
@@ -5290,290 +5571,9 @@
                 <a:ea typeface="游明朝" pitchFamily="34" charset="-122"/>
                 <a:cs typeface="游明朝" pitchFamily="34" charset="-120"/>
               </a:rPr>
-              <a:t>2030年 リノベ市場比率の予測</a:t>
-            </a:r>
-            <a:endParaRPr lang="en-US" sz="1100" dirty="0"/>
-          </a:p>
-        </p:txBody>
-      </p:sp>
-      <p:sp>
-        <p:nvSpPr>
-          <p:cNvPr id="9" name="Text 7"/>
-          <p:cNvSpPr/>
-          <p:nvPr/>
-        </p:nvSpPr>
-        <p:spPr>
-          <a:xfrm>
-            <a:off x="6545229" y="761970"/>
-            <a:ext cx="4881936" cy="558790"/>
-          </a:xfrm>
-          <a:prstGeom prst="rect">
-            <a:avLst/>
-          </a:prstGeom>
-          <a:noFill/>
-          <a:ln/>
-        </p:spPr>
-        <p:txBody>
-          <a:bodyPr wrap="square" rtlCol="0" anchor="t"/>
-          <a:lstStyle/>
-          <a:p>
-            <a:pPr indent="0" marL="0">
-              <a:buNone/>
-            </a:pPr>
-            <a:r>
-              <a:rPr lang="en-US" sz="4000" i="1" dirty="0">
-                <a:solidFill>
-                  <a:srgbClr val="17140F"/>
-                </a:solidFill>
-                <a:latin typeface="游明朝" pitchFamily="34" charset="0"/>
-                <a:ea typeface="游明朝" pitchFamily="34" charset="-122"/>
-                <a:cs typeface="游明朝" pitchFamily="34" charset="-120"/>
-              </a:rPr>
-              <a:t>05</a:t>
-            </a:r>
-            <a:endParaRPr lang="en-US" sz="4000" dirty="0"/>
-          </a:p>
-        </p:txBody>
-      </p:sp>
-      <p:sp>
-        <p:nvSpPr>
-          <p:cNvPr id="10" name="Text 8"/>
-          <p:cNvSpPr/>
-          <p:nvPr/>
-        </p:nvSpPr>
-        <p:spPr>
-          <a:xfrm>
-            <a:off x="6545229" y="1320759"/>
-            <a:ext cx="4881936" cy="1238280"/>
-          </a:xfrm>
-          <a:prstGeom prst="rect">
-            <a:avLst/>
-          </a:prstGeom>
-          <a:noFill/>
-          <a:ln/>
-        </p:spPr>
-        <p:txBody>
-          <a:bodyPr wrap="square" rtlCol="0" anchor="t"/>
-          <a:lstStyle/>
-          <a:p>
-            <a:pPr indent="0" marL="0">
-              <a:lnSpc>
-                <a:spcPct val="105000"/>
-              </a:lnSpc>
-              <a:buNone/>
-            </a:pPr>
-            <a:r>
-              <a:rPr lang="en-US" sz="4000" b="1" dirty="0">
-                <a:solidFill>
-                  <a:srgbClr val="17140F"/>
-                </a:solidFill>
-                <a:latin typeface="游明朝" pitchFamily="34" charset="0"/>
-                <a:ea typeface="游明朝" pitchFamily="34" charset="-122"/>
-                <a:cs typeface="游明朝" pitchFamily="34" charset="-120"/>
-              </a:rPr>
-              <a:t>建築は、</a:t>
-            </a:r>
-            <a:endParaRPr lang="en-US" sz="4000" dirty="0"/>
-          </a:p>
-          <a:p>
-            <a:pPr indent="0" marL="0">
-              <a:lnSpc>
-                <a:spcPct val="105000"/>
-              </a:lnSpc>
-              <a:buNone/>
-            </a:pPr>
-            <a:r>
-              <a:rPr lang="en-US" sz="4000" b="1" dirty="0">
-                <a:solidFill>
-                  <a:srgbClr val="17140F"/>
-                </a:solidFill>
-                <a:latin typeface="游明朝" pitchFamily="34" charset="0"/>
-                <a:ea typeface="游明朝" pitchFamily="34" charset="-122"/>
-                <a:cs typeface="游明朝" pitchFamily="34" charset="-120"/>
-              </a:rPr>
-              <a:t>ケアになる。</a:t>
-            </a:r>
-            <a:endParaRPr lang="en-US" sz="4000" dirty="0"/>
-          </a:p>
-        </p:txBody>
-      </p:sp>
-      <p:sp>
-        <p:nvSpPr>
-          <p:cNvPr id="11" name="Text 9"/>
-          <p:cNvSpPr/>
-          <p:nvPr/>
-        </p:nvSpPr>
-        <p:spPr>
-          <a:xfrm>
-            <a:off x="6545229" y="2635209"/>
-            <a:ext cx="4881936" cy="1524030"/>
-          </a:xfrm>
-          <a:prstGeom prst="rect">
-            <a:avLst/>
-          </a:prstGeom>
-          <a:noFill/>
-          <a:ln/>
-        </p:spPr>
-        <p:txBody>
-          <a:bodyPr wrap="square" rtlCol="0" anchor="t"/>
-          <a:lstStyle/>
-          <a:p>
-            <a:pPr indent="0" marL="0">
-              <a:lnSpc>
-                <a:spcPct val="185000"/>
-              </a:lnSpc>
-              <a:buNone/>
-            </a:pPr>
-            <a:r>
-              <a:rPr lang="en-US" sz="1100" dirty="0">
-                <a:solidFill>
-                  <a:srgbClr val="2B251E"/>
-                </a:solidFill>
-                <a:latin typeface="游明朝" pitchFamily="34" charset="0"/>
-                <a:ea typeface="游明朝" pitchFamily="34" charset="-122"/>
-                <a:cs typeface="游明朝" pitchFamily="34" charset="-120"/>
-              </a:rPr>
-              <a:t>WELL認証、CASBEE-ウェルネス、</a:t>
-            </a:r>
-            <a:endParaRPr lang="en-US" sz="1100" dirty="0"/>
-          </a:p>
-          <a:p>
-            <a:pPr indent="0" marL="0">
-              <a:lnSpc>
-                <a:spcPct val="185000"/>
-              </a:lnSpc>
-              <a:buNone/>
-            </a:pPr>
-            <a:r>
-              <a:rPr lang="en-US" sz="1100" dirty="0">
-                <a:solidFill>
-                  <a:srgbClr val="2B251E"/>
-                </a:solidFill>
-                <a:latin typeface="游明朝" pitchFamily="34" charset="0"/>
-                <a:ea typeface="游明朝" pitchFamily="34" charset="-122"/>
-                <a:cs typeface="游明朝" pitchFamily="34" charset="-120"/>
-              </a:rPr>
-              <a:t>環境IoTによる快適性の数値化。</a:t>
-            </a:r>
-            <a:endParaRPr lang="en-US" sz="1100" dirty="0"/>
-          </a:p>
-          <a:p>
-            <a:pPr indent="0" marL="0">
-              <a:lnSpc>
-                <a:spcPct val="185000"/>
-              </a:lnSpc>
-              <a:buNone/>
-            </a:pPr>
-            <a:r>
-              <a:rPr lang="en-US" sz="1100" dirty="0">
-                <a:solidFill>
-                  <a:srgbClr val="2B251E"/>
-                </a:solidFill>
-                <a:latin typeface="游明朝" pitchFamily="34" charset="0"/>
-                <a:ea typeface="游明朝" pitchFamily="34" charset="-122"/>
-                <a:cs typeface="游明朝" pitchFamily="34" charset="-120"/>
-              </a:rPr>
-              <a:t>空間は「健康を手当てする装置」</a:t>
-            </a:r>
-            <a:endParaRPr lang="en-US" sz="1100" dirty="0"/>
-          </a:p>
-          <a:p>
-            <a:pPr indent="0" marL="0">
-              <a:lnSpc>
-                <a:spcPct val="185000"/>
-              </a:lnSpc>
-              <a:buNone/>
-            </a:pPr>
-            <a:r>
-              <a:rPr lang="en-US" sz="1100" dirty="0">
-                <a:solidFill>
-                  <a:srgbClr val="2B251E"/>
-                </a:solidFill>
-                <a:latin typeface="游明朝" pitchFamily="34" charset="0"/>
-                <a:ea typeface="游明朝" pitchFamily="34" charset="-122"/>
-                <a:cs typeface="游明朝" pitchFamily="34" charset="-120"/>
-              </a:rPr>
-              <a:t>として設計される。</a:t>
-            </a:r>
-            <a:endParaRPr lang="en-US" sz="1100" dirty="0"/>
-          </a:p>
-        </p:txBody>
-      </p:sp>
-      <p:sp>
-        <p:nvSpPr>
-          <p:cNvPr id="12" name="Text 10"/>
-          <p:cNvSpPr/>
-          <p:nvPr/>
-        </p:nvSpPr>
-        <p:spPr>
-          <a:xfrm>
-            <a:off x="6545229" y="4190970"/>
-            <a:ext cx="4881936" cy="984260"/>
-          </a:xfrm>
-          <a:prstGeom prst="rect">
-            <a:avLst/>
-          </a:prstGeom>
-          <a:noFill/>
-          <a:ln/>
-        </p:spPr>
-        <p:txBody>
-          <a:bodyPr wrap="square" rtlCol="0" anchor="t"/>
-          <a:lstStyle/>
-          <a:p>
-            <a:pPr indent="0" marL="0">
-              <a:buNone/>
-            </a:pPr>
-            <a:r>
-              <a:rPr lang="en-US" sz="6400" b="1" dirty="0">
-                <a:solidFill>
-                  <a:srgbClr val="17140F"/>
-                </a:solidFill>
-                <a:latin typeface="游明朝" pitchFamily="34" charset="0"/>
-                <a:ea typeface="游明朝" pitchFamily="34" charset="-122"/>
-                <a:cs typeface="游明朝" pitchFamily="34" charset="-120"/>
-              </a:rPr>
-              <a:t>×3.2</a:t>
-            </a:r>
-            <a:endParaRPr lang="en-US" sz="6400" dirty="0"/>
-          </a:p>
-        </p:txBody>
-      </p:sp>
-      <p:sp>
-        <p:nvSpPr>
-          <p:cNvPr id="13" name="Text 11"/>
-          <p:cNvSpPr/>
-          <p:nvPr/>
-        </p:nvSpPr>
-        <p:spPr>
-          <a:xfrm>
-            <a:off x="6545229" y="5206959"/>
-            <a:ext cx="4881936" cy="317480"/>
-          </a:xfrm>
-          <a:prstGeom prst="rect">
-            <a:avLst/>
-          </a:prstGeom>
-          <a:noFill/>
-          <a:ln/>
-        </p:spPr>
-        <p:txBody>
-          <a:bodyPr wrap="square" rtlCol="0" anchor="t"/>
-          <a:lstStyle/>
-          <a:p>
-            <a:pPr indent="0" marL="0">
-              <a:buNone/>
-            </a:pPr>
-            <a:r>
-              <a:rPr lang="en-US" sz="1100" dirty="0">
-                <a:solidFill>
-                  <a:srgbClr val="8B8578"/>
-                </a:solidFill>
-                <a:latin typeface="游明朝" pitchFamily="34" charset="0"/>
-                <a:ea typeface="游明朝" pitchFamily="34" charset="-122"/>
-                <a:cs typeface="游明朝" pitchFamily="34" charset="-120"/>
-              </a:rPr>
               <a:t>健康志向オフィスの生産性指標</a:t>
             </a:r>
-            <a:endParaRPr lang="en-US" sz="1100" dirty="0"/>
+            <a:endParaRPr lang="en-US" sz="1300" dirty="0"/>
           </a:p>
         </p:txBody>
       </p:sp>
@@ -5617,13 +5617,13 @@
         </p:nvSpPr>
         <p:spPr>
           <a:xfrm>
-            <a:off x="11617543" y="6286774"/>
-            <a:ext cx="2666390" cy="2666390"/>
+            <a:off x="11274552" y="5943600"/>
+            <a:ext cx="4023360" cy="4023360"/>
           </a:xfrm>
           <a:prstGeom prst="ellipse">
             <a:avLst/>
           </a:prstGeom>
-          <a:ln w="19050">
+          <a:ln w="15240">
             <a:solidFill>
               <a:srgbClr val="17140F"/>
             </a:solidFill>
@@ -5639,8 +5639,8 @@
         </p:nvSpPr>
         <p:spPr>
           <a:xfrm>
-            <a:off x="761787" y="1651041"/>
-            <a:ext cx="10665379" cy="3683020"/>
+            <a:off x="914400" y="1463040"/>
+            <a:ext cx="10360152" cy="4114800"/>
           </a:xfrm>
           <a:prstGeom prst="rect">
             <a:avLst/>
@@ -5652,14 +5652,14 @@
           <a:bodyPr wrap="square" rtlCol="0" anchor="t"/>
           <a:lstStyle/>
           <a:p>
-            <a:pPr indent="0" marL="0">
-              <a:lnSpc>
-                <a:spcPct val="118000"/>
-              </a:lnSpc>
-              <a:buNone/>
-            </a:pPr>
-            <a:r>
-              <a:rPr lang="en-US" sz="5600" i="1" dirty="0">
+            <a:pPr algn="l" indent="0" marL="0">
+              <a:lnSpc>
+                <a:spcPct val="120000"/>
+              </a:lnSpc>
+              <a:buNone/>
+            </a:pPr>
+            <a:r>
+              <a:rPr lang="en-US" sz="5800" i="1" dirty="0">
                 <a:solidFill>
                   <a:srgbClr val="17140F"/>
                 </a:solidFill>
@@ -5669,14 +5669,14 @@
               </a:rPr>
               <a:t>建築の未来は、</a:t>
             </a:r>
-            <a:pPr indent="0" marL="0">
-              <a:lnSpc>
-                <a:spcPct val="118000"/>
-              </a:lnSpc>
-              <a:buNone/>
-            </a:pPr>
-            <a:r>
-              <a:rPr lang="en-US" sz="5600" i="1" dirty="0">
+            <a:pPr algn="l" indent="0" marL="0">
+              <a:lnSpc>
+                <a:spcPct val="120000"/>
+              </a:lnSpc>
+              <a:buNone/>
+            </a:pPr>
+            <a:r>
+              <a:rPr lang="en-US" sz="5800" i="1" dirty="0">
                 <a:solidFill>
                   <a:srgbClr val="17140F"/>
                 </a:solidFill>
@@ -5687,14 +5687,14 @@
               <a:t>
 </a:t>
             </a:r>
-            <a:pPr indent="0" marL="0">
-              <a:lnSpc>
-                <a:spcPct val="118000"/>
-              </a:lnSpc>
-              <a:buNone/>
-            </a:pPr>
-            <a:r>
-              <a:rPr lang="en-US" sz="5600" b="1" i="1" dirty="0">
+            <a:pPr algn="l" indent="0" marL="0">
+              <a:lnSpc>
+                <a:spcPct val="120000"/>
+              </a:lnSpc>
+              <a:buNone/>
+            </a:pPr>
+            <a:r>
+              <a:rPr lang="en-US" sz="5800" b="1" i="1" dirty="0">
                 <a:solidFill>
                   <a:srgbClr val="17140F"/>
                 </a:solidFill>
@@ -5704,14 +5704,14 @@
               </a:rPr>
               <a:t>環境</a:t>
             </a:r>
-            <a:pPr indent="0" marL="0">
-              <a:lnSpc>
-                <a:spcPct val="118000"/>
-              </a:lnSpc>
-              <a:buNone/>
-            </a:pPr>
-            <a:r>
-              <a:rPr lang="en-US" sz="5600" i="1" dirty="0">
+            <a:pPr algn="l" indent="0" marL="0">
+              <a:lnSpc>
+                <a:spcPct val="120000"/>
+              </a:lnSpc>
+              <a:buNone/>
+            </a:pPr>
+            <a:r>
+              <a:rPr lang="en-US" sz="5800" i="1" dirty="0">
                 <a:solidFill>
                   <a:srgbClr val="17140F"/>
                 </a:solidFill>
@@ -5721,14 +5721,14 @@
               </a:rPr>
               <a:t>と</a:t>
             </a:r>
-            <a:pPr indent="0" marL="0">
-              <a:lnSpc>
-                <a:spcPct val="118000"/>
-              </a:lnSpc>
-              <a:buNone/>
-            </a:pPr>
-            <a:r>
-              <a:rPr lang="en-US" sz="5600" b="1" i="1" dirty="0">
+            <a:pPr algn="l" indent="0" marL="0">
+              <a:lnSpc>
+                <a:spcPct val="120000"/>
+              </a:lnSpc>
+              <a:buNone/>
+            </a:pPr>
+            <a:r>
+              <a:rPr lang="en-US" sz="5800" b="1" i="1" dirty="0">
                 <a:solidFill>
                   <a:srgbClr val="17140F"/>
                 </a:solidFill>
@@ -5738,14 +5738,14 @@
               </a:rPr>
               <a:t>技術</a:t>
             </a:r>
-            <a:pPr indent="0" marL="0">
-              <a:lnSpc>
-                <a:spcPct val="118000"/>
-              </a:lnSpc>
-              <a:buNone/>
-            </a:pPr>
-            <a:r>
-              <a:rPr lang="en-US" sz="5600" i="1" dirty="0">
+            <a:pPr algn="l" indent="0" marL="0">
+              <a:lnSpc>
+                <a:spcPct val="120000"/>
+              </a:lnSpc>
+              <a:buNone/>
+            </a:pPr>
+            <a:r>
+              <a:rPr lang="en-US" sz="5800" i="1" dirty="0">
                 <a:solidFill>
                   <a:srgbClr val="17140F"/>
                 </a:solidFill>
@@ -5755,14 +5755,14 @@
               </a:rPr>
               <a:t>と</a:t>
             </a:r>
-            <a:pPr indent="0" marL="0">
-              <a:lnSpc>
-                <a:spcPct val="118000"/>
-              </a:lnSpc>
-              <a:buNone/>
-            </a:pPr>
-            <a:r>
-              <a:rPr lang="en-US" sz="5600" b="1" i="1" dirty="0">
+            <a:pPr algn="l" indent="0" marL="0">
+              <a:lnSpc>
+                <a:spcPct val="120000"/>
+              </a:lnSpc>
+              <a:buNone/>
+            </a:pPr>
+            <a:r>
+              <a:rPr lang="en-US" sz="5800" b="1" i="1" dirty="0">
                 <a:solidFill>
                   <a:srgbClr val="17140F"/>
                 </a:solidFill>
@@ -5772,14 +5772,14 @@
               </a:rPr>
               <a:t>人</a:t>
             </a:r>
-            <a:pPr indent="0" marL="0">
-              <a:lnSpc>
-                <a:spcPct val="118000"/>
-              </a:lnSpc>
-              <a:buNone/>
-            </a:pPr>
-            <a:r>
-              <a:rPr lang="en-US" sz="5600" i="1" dirty="0">
+            <a:pPr algn="l" indent="0" marL="0">
+              <a:lnSpc>
+                <a:spcPct val="120000"/>
+              </a:lnSpc>
+              <a:buNone/>
+            </a:pPr>
+            <a:r>
+              <a:rPr lang="en-US" sz="5800" i="1" dirty="0">
                 <a:solidFill>
                   <a:srgbClr val="17140F"/>
                 </a:solidFill>
@@ -5789,14 +5789,14 @@
               </a:rPr>
               <a:t>の</a:t>
             </a:r>
-            <a:pPr indent="0" marL="0">
-              <a:lnSpc>
-                <a:spcPct val="118000"/>
-              </a:lnSpc>
-              <a:buNone/>
-            </a:pPr>
-            <a:r>
-              <a:rPr lang="en-US" sz="5600" i="1" dirty="0">
+            <a:pPr algn="l" indent="0" marL="0">
+              <a:lnSpc>
+                <a:spcPct val="120000"/>
+              </a:lnSpc>
+              <a:buNone/>
+            </a:pPr>
+            <a:r>
+              <a:rPr lang="en-US" sz="5800" i="1" dirty="0">
                 <a:solidFill>
                   <a:srgbClr val="17140F"/>
                 </a:solidFill>
@@ -5807,14 +5807,14 @@
               <a:t>
 </a:t>
             </a:r>
-            <a:pPr indent="0" marL="0">
-              <a:lnSpc>
-                <a:spcPct val="118000"/>
-              </a:lnSpc>
-              <a:buNone/>
-            </a:pPr>
-            <a:r>
-              <a:rPr lang="en-US" sz="5600" i="1" dirty="0">
+            <a:pPr algn="l" indent="0" marL="0">
+              <a:lnSpc>
+                <a:spcPct val="120000"/>
+              </a:lnSpc>
+              <a:buNone/>
+            </a:pPr>
+            <a:r>
+              <a:rPr lang="en-US" sz="5800" i="1" dirty="0">
                 <a:solidFill>
                   <a:srgbClr val="17140F"/>
                 </a:solidFill>
@@ -5824,7 +5824,7 @@
               </a:rPr>
               <a:t>交差点にある。</a:t>
             </a:r>
-            <a:endParaRPr lang="en-US" sz="5600" dirty="0"/>
+            <a:endParaRPr lang="en-US" sz="5800" dirty="0"/>
           </a:p>
         </p:txBody>
       </p:sp>
@@ -5836,8 +5836,8 @@
         </p:nvSpPr>
         <p:spPr>
           <a:xfrm>
-            <a:off x="761787" y="5765749"/>
-            <a:ext cx="10665379" cy="13716"/>
+            <a:off x="914400" y="5577840"/>
+            <a:ext cx="10360152" cy="10973"/>
           </a:xfrm>
           <a:prstGeom prst="rect">
             <a:avLst/>
@@ -5856,8 +5856,8 @@
         </p:nvSpPr>
         <p:spPr>
           <a:xfrm>
-            <a:off x="761787" y="5854629"/>
-            <a:ext cx="10665379" cy="317480"/>
+            <a:off x="914400" y="5696712"/>
+            <a:ext cx="10360152" cy="457200"/>
           </a:xfrm>
           <a:prstGeom prst="rect">
             <a:avLst/>
@@ -5873,7 +5873,7 @@
               <a:buNone/>
             </a:pPr>
             <a:r>
-              <a:rPr lang="en-US" sz="1200" i="1" dirty="0">
+              <a:rPr lang="en-US" sz="1500" i="1" dirty="0">
                 <a:solidFill>
                   <a:srgbClr val="17140F"/>
                 </a:solidFill>
@@ -5883,7 +5883,7 @@
               </a:rPr>
               <a:t>— 建築トレンド 2026 / 2026.03.30</a:t>
             </a:r>
-            <a:endParaRPr lang="en-US" sz="1200" dirty="0"/>
+            <a:endParaRPr lang="en-US" sz="1500" dirty="0"/>
           </a:p>
         </p:txBody>
       </p:sp>

--- a/slides/exports/architecture2026_text.pptx
+++ b/slides/exports/architecture2026_text.pptx
@@ -1636,7 +1636,7 @@
             <a:r>
               <a:rPr lang="en-US" sz="1600" dirty="0">
                 <a:solidFill>
-                  <a:srgbClr val="2B251E"/>
+                  <a:srgbClr val="17140F"/>
                 </a:solidFill>
                 <a:latin typeface="游明朝" pitchFamily="34" charset="0"/>
                 <a:ea typeface="游明朝" pitchFamily="34" charset="-122"/>
@@ -1656,7 +1656,7 @@
             <a:r>
               <a:rPr lang="en-US" sz="1600" dirty="0">
                 <a:solidFill>
-                  <a:srgbClr val="2B251E"/>
+                  <a:srgbClr val="17140F"/>
                 </a:solidFill>
                 <a:latin typeface="游明朝" pitchFamily="34" charset="0"/>
                 <a:ea typeface="游明朝" pitchFamily="34" charset="-122"/>
@@ -1676,7 +1676,7 @@
             <a:r>
               <a:rPr lang="en-US" sz="1600" dirty="0">
                 <a:solidFill>
-                  <a:srgbClr val="2B251E"/>
+                  <a:srgbClr val="17140F"/>
                 </a:solidFill>
                 <a:latin typeface="游明朝" pitchFamily="34" charset="0"/>
                 <a:ea typeface="游明朝" pitchFamily="34" charset="-122"/>
@@ -1831,7 +1831,7 @@
             <a:r>
               <a:rPr lang="en-US" sz="1300" dirty="0">
                 <a:solidFill>
-                  <a:srgbClr val="2B251E"/>
+                  <a:srgbClr val="17140F"/>
                 </a:solidFill>
                 <a:latin typeface="游明朝" pitchFamily="34" charset="0"/>
                 <a:ea typeface="游明朝" pitchFamily="34" charset="-122"/>
@@ -1851,7 +1851,7 @@
             <a:r>
               <a:rPr lang="en-US" sz="1300" dirty="0">
                 <a:solidFill>
-                  <a:srgbClr val="2B251E"/>
+                  <a:srgbClr val="17140F"/>
                 </a:solidFill>
                 <a:latin typeface="游明朝" pitchFamily="34" charset="0"/>
                 <a:ea typeface="游明朝" pitchFamily="34" charset="-122"/>
@@ -1871,7 +1871,7 @@
             <a:r>
               <a:rPr lang="en-US" sz="1300" dirty="0">
                 <a:solidFill>
-                  <a:srgbClr val="2B251E"/>
+                  <a:srgbClr val="17140F"/>
                 </a:solidFill>
                 <a:latin typeface="游明朝" pitchFamily="34" charset="0"/>
                 <a:ea typeface="游明朝" pitchFamily="34" charset="-122"/>
@@ -2712,7 +2712,7 @@
             <a:r>
               <a:rPr lang="en-US" sz="1600" dirty="0">
                 <a:solidFill>
-                  <a:srgbClr val="2B251E"/>
+                  <a:srgbClr val="17140F"/>
                 </a:solidFill>
                 <a:latin typeface="游明朝" pitchFamily="34" charset="0"/>
                 <a:ea typeface="游明朝" pitchFamily="34" charset="-122"/>
@@ -2732,7 +2732,7 @@
             <a:r>
               <a:rPr lang="en-US" sz="1600" dirty="0">
                 <a:solidFill>
-                  <a:srgbClr val="2B251E"/>
+                  <a:srgbClr val="17140F"/>
                 </a:solidFill>
                 <a:latin typeface="游明朝" pitchFamily="34" charset="0"/>
                 <a:ea typeface="游明朝" pitchFamily="34" charset="-122"/>
@@ -2752,7 +2752,7 @@
             <a:r>
               <a:rPr lang="en-US" sz="1600" dirty="0">
                 <a:solidFill>
-                  <a:srgbClr val="2B251E"/>
+                  <a:srgbClr val="17140F"/>
                 </a:solidFill>
                 <a:latin typeface="游明朝" pitchFamily="34" charset="0"/>
                 <a:ea typeface="游明朝" pitchFamily="34" charset="-122"/>
@@ -2811,7 +2811,7 @@
             <a:r>
               <a:rPr lang="en-US" sz="1100" spc="40" kern="0" dirty="0">
                 <a:solidFill>
-                  <a:srgbClr val="8B8578"/>
+                  <a:srgbClr val="6B6560"/>
                 </a:solidFill>
                 <a:latin typeface="游明朝" pitchFamily="34" charset="0"/>
                 <a:ea typeface="游明朝" pitchFamily="34" charset="-122"/>
@@ -3204,7 +3204,7 @@
             <a:r>
               <a:rPr lang="en-US" sz="1100" spc="30" kern="0" dirty="0">
                 <a:solidFill>
-                  <a:srgbClr val="8B8578"/>
+                  <a:srgbClr val="6B6560"/>
                 </a:solidFill>
                 <a:latin typeface="游明朝" pitchFamily="34" charset="0"/>
                 <a:ea typeface="游明朝" pitchFamily="34" charset="-122"/>
@@ -3356,7 +3356,7 @@
             <a:r>
               <a:rPr lang="en-US" sz="1100" spc="40" kern="0" dirty="0">
                 <a:solidFill>
-                  <a:srgbClr val="8B8578"/>
+                  <a:srgbClr val="6B6560"/>
                 </a:solidFill>
                 <a:latin typeface="游明朝" pitchFamily="34" charset="0"/>
                 <a:ea typeface="游明朝" pitchFamily="34" charset="-122"/>
@@ -3396,24 +3396,24 @@
         </p:nvSpPr>
         <p:spPr>
           <a:xfrm>
-            <a:off x="914400" y="1993392"/>
-            <a:ext cx="914400" cy="548640"/>
-          </a:xfrm>
-          <a:prstGeom prst="rect">
-            <a:avLst/>
-          </a:prstGeom>
-          <a:noFill/>
-          <a:ln/>
-        </p:spPr>
-        <p:txBody>
-          <a:bodyPr wrap="square" rtlCol="0" anchor="t"/>
-          <a:lstStyle/>
-          <a:p>
-            <a:pPr algn="l" indent="0" marL="0">
-              <a:buNone/>
-            </a:pPr>
-            <a:r>
-              <a:rPr lang="en-US" sz="2400" i="1" dirty="0">
+            <a:off x="914400" y="2011680"/>
+            <a:ext cx="914400" cy="457200"/>
+          </a:xfrm>
+          <a:prstGeom prst="rect">
+            <a:avLst/>
+          </a:prstGeom>
+          <a:noFill/>
+          <a:ln/>
+        </p:spPr>
+        <p:txBody>
+          <a:bodyPr wrap="square" rtlCol="0" anchor="t"/>
+          <a:lstStyle/>
+          <a:p>
+            <a:pPr algn="l" indent="0" marL="0">
+              <a:buNone/>
+            </a:pPr>
+            <a:r>
+              <a:rPr lang="en-US" sz="2200" i="1" dirty="0">
                 <a:solidFill>
                   <a:srgbClr val="17140F"/>
                 </a:solidFill>
@@ -3423,7 +3423,7 @@
               </a:rPr>
               <a:t>2019</a:t>
             </a:r>
-            <a:endParaRPr lang="en-US" sz="2400" dirty="0"/>
+            <a:endParaRPr lang="en-US" sz="2200" dirty="0"/>
           </a:p>
         </p:txBody>
       </p:sp>
@@ -3435,8 +3435,47 @@
         </p:nvSpPr>
         <p:spPr>
           <a:xfrm>
-            <a:off x="1920240" y="1993392"/>
-            <a:ext cx="4206240" cy="822960"/>
+            <a:off x="1920240" y="2011680"/>
+            <a:ext cx="4206240" cy="320040"/>
+          </a:xfrm>
+          <a:prstGeom prst="rect">
+            <a:avLst/>
+          </a:prstGeom>
+          <a:noFill/>
+          <a:ln/>
+        </p:spPr>
+        <p:txBody>
+          <a:bodyPr wrap="square" rtlCol="0" anchor="t"/>
+          <a:lstStyle/>
+          <a:p>
+            <a:pPr algn="l" indent="0" marL="0">
+              <a:buNone/>
+            </a:pPr>
+            <a:r>
+              <a:rPr lang="en-US" sz="1500" b="1" dirty="0">
+                <a:solidFill>
+                  <a:srgbClr val="17140F"/>
+                </a:solidFill>
+                <a:latin typeface="游明朝" pitchFamily="34" charset="0"/>
+                <a:ea typeface="游明朝" pitchFamily="34" charset="-122"/>
+                <a:cs typeface="游明朝" pitchFamily="34" charset="-120"/>
+              </a:rPr>
+              <a:t>CLT基準法改正</a:t>
+            </a:r>
+            <a:endParaRPr lang="en-US" sz="1500" dirty="0"/>
+          </a:p>
+        </p:txBody>
+      </p:sp>
+      <p:sp>
+        <p:nvSpPr>
+          <p:cNvPr id="9" name="Text 7"/>
+          <p:cNvSpPr/>
+          <p:nvPr/>
+        </p:nvSpPr>
+        <p:spPr>
+          <a:xfrm>
+            <a:off x="1920240" y="2359152"/>
+            <a:ext cx="4206240" cy="530352"/>
           </a:xfrm>
           <a:prstGeom prst="rect">
             <a:avLst/>
@@ -3450,89 +3489,34 @@
           <a:p>
             <a:pPr algn="l" indent="0" marL="0">
               <a:lnSpc>
-                <a:spcPct val="170000"/>
+                <a:spcPct val="150000"/>
               </a:lnSpc>
               <a:buNone/>
             </a:pPr>
             <a:r>
-              <a:rPr lang="en-US" sz="1500" b="1" dirty="0">
-                <a:solidFill>
-                  <a:srgbClr val="17140F"/>
-                </a:solidFill>
-                <a:latin typeface="游明朝" pitchFamily="34" charset="0"/>
-                <a:ea typeface="游明朝" pitchFamily="34" charset="-122"/>
-                <a:cs typeface="游明朝" pitchFamily="34" charset="-120"/>
-              </a:rPr>
-              <a:t>CLT基準法改正</a:t>
-            </a:r>
-            <a:pPr algn="l" indent="0" marL="0">
-              <a:lnSpc>
-                <a:spcPct val="170000"/>
-              </a:lnSpc>
-              <a:buNone/>
-            </a:pPr>
-            <a:r>
-              <a:rPr lang="en-US" sz="1400" dirty="0">
-                <a:solidFill>
-                  <a:srgbClr val="000000"/>
-                </a:solidFill>
-                <a:latin typeface="游明朝" pitchFamily="34" charset="0"/>
-                <a:ea typeface="游明朝" pitchFamily="34" charset="-122"/>
-                <a:cs typeface="游明朝" pitchFamily="34" charset="-120"/>
-              </a:rPr>
-              <a:t>
-</a:t>
-            </a:r>
-            <a:pPr algn="l" indent="0" marL="0">
-              <a:lnSpc>
-                <a:spcPct val="170000"/>
-              </a:lnSpc>
-              <a:buNone/>
-            </a:pPr>
-            <a:r>
-              <a:rPr lang="en-US" sz="1400" dirty="0">
-                <a:solidFill>
-                  <a:srgbClr val="2B251E"/>
-                </a:solidFill>
-                <a:latin typeface="游明朝" pitchFamily="34" charset="0"/>
-                <a:ea typeface="游明朝" pitchFamily="34" charset="-122"/>
-                <a:cs typeface="游明朝" pitchFamily="34" charset="-120"/>
-              </a:rPr>
-              <a:t>直交集成板が一般的な構造材料として</a:t>
-            </a:r>
-            <a:endParaRPr lang="en-US" sz="1400" dirty="0"/>
-          </a:p>
-          <a:p>
-            <a:pPr algn="l" indent="0" marL="0">
-              <a:lnSpc>
-                <a:spcPct val="170000"/>
-              </a:lnSpc>
-              <a:buNone/>
-            </a:pPr>
-            <a:r>
-              <a:rPr lang="en-US" sz="1400" dirty="0">
-                <a:solidFill>
-                  <a:srgbClr val="2B251E"/>
-                </a:solidFill>
-                <a:latin typeface="游明朝" pitchFamily="34" charset="0"/>
-                <a:ea typeface="游明朝" pitchFamily="34" charset="-122"/>
-                <a:cs typeface="游明朝" pitchFamily="34" charset="-120"/>
-              </a:rPr>
-              <a:t>基準法に位置づけ。</a:t>
-            </a:r>
-            <a:endParaRPr lang="en-US" sz="1400" dirty="0"/>
-          </a:p>
-        </p:txBody>
-      </p:sp>
-      <p:sp>
-        <p:nvSpPr>
-          <p:cNvPr id="9" name="Shape 7"/>
-          <p:cNvSpPr/>
-          <p:nvPr/>
-        </p:nvSpPr>
-        <p:spPr>
-          <a:xfrm>
-            <a:off x="914400" y="2834640"/>
+              <a:rPr lang="en-US" sz="1300" dirty="0">
+                <a:solidFill>
+                  <a:srgbClr val="17140F"/>
+                </a:solidFill>
+                <a:latin typeface="游明朝" pitchFamily="34" charset="0"/>
+                <a:ea typeface="游明朝" pitchFamily="34" charset="-122"/>
+                <a:cs typeface="游明朝" pitchFamily="34" charset="-120"/>
+              </a:rPr>
+              <a:t>直交集成板が一般的な構造材料として基準法に位置づけ。</a:t>
+            </a:r>
+            <a:endParaRPr lang="en-US" sz="1300" dirty="0"/>
+          </a:p>
+        </p:txBody>
+      </p:sp>
+      <p:sp>
+        <p:nvSpPr>
+          <p:cNvPr id="10" name="Shape 8"/>
+          <p:cNvSpPr/>
+          <p:nvPr/>
+        </p:nvSpPr>
+        <p:spPr>
+          <a:xfrm>
+            <a:off x="914400" y="2971800"/>
             <a:ext cx="5303520" cy="10973"/>
           </a:xfrm>
           <a:prstGeom prst="rect">
@@ -3546,30 +3530,30 @@
       </p:sp>
       <p:sp>
         <p:nvSpPr>
-          <p:cNvPr id="10" name="Text 8"/>
-          <p:cNvSpPr/>
-          <p:nvPr/>
-        </p:nvSpPr>
-        <p:spPr>
-          <a:xfrm>
-            <a:off x="914400" y="2907792"/>
-            <a:ext cx="914400" cy="548640"/>
-          </a:xfrm>
-          <a:prstGeom prst="rect">
-            <a:avLst/>
-          </a:prstGeom>
-          <a:noFill/>
-          <a:ln/>
-        </p:spPr>
-        <p:txBody>
-          <a:bodyPr wrap="square" rtlCol="0" anchor="t"/>
-          <a:lstStyle/>
-          <a:p>
-            <a:pPr algn="l" indent="0" marL="0">
-              <a:buNone/>
-            </a:pPr>
-            <a:r>
-              <a:rPr lang="en-US" sz="2400" i="1" dirty="0">
+          <p:cNvPr id="11" name="Text 9"/>
+          <p:cNvSpPr/>
+          <p:nvPr/>
+        </p:nvSpPr>
+        <p:spPr>
+          <a:xfrm>
+            <a:off x="914400" y="3063240"/>
+            <a:ext cx="914400" cy="457200"/>
+          </a:xfrm>
+          <a:prstGeom prst="rect">
+            <a:avLst/>
+          </a:prstGeom>
+          <a:noFill/>
+          <a:ln/>
+        </p:spPr>
+        <p:txBody>
+          <a:bodyPr wrap="square" rtlCol="0" anchor="t"/>
+          <a:lstStyle/>
+          <a:p>
+            <a:pPr algn="l" indent="0" marL="0">
+              <a:buNone/>
+            </a:pPr>
+            <a:r>
+              <a:rPr lang="en-US" sz="2200" i="1" dirty="0">
                 <a:solidFill>
                   <a:srgbClr val="17140F"/>
                 </a:solidFill>
@@ -3579,20 +3563,59 @@
               </a:rPr>
               <a:t>2022</a:t>
             </a:r>
-            <a:endParaRPr lang="en-US" sz="2400" dirty="0"/>
-          </a:p>
-        </p:txBody>
-      </p:sp>
-      <p:sp>
-        <p:nvSpPr>
-          <p:cNvPr id="11" name="Text 9"/>
-          <p:cNvSpPr/>
-          <p:nvPr/>
-        </p:nvSpPr>
-        <p:spPr>
-          <a:xfrm>
-            <a:off x="1920240" y="2907792"/>
-            <a:ext cx="4206240" cy="822960"/>
+            <a:endParaRPr lang="en-US" sz="2200" dirty="0"/>
+          </a:p>
+        </p:txBody>
+      </p:sp>
+      <p:sp>
+        <p:nvSpPr>
+          <p:cNvPr id="12" name="Text 10"/>
+          <p:cNvSpPr/>
+          <p:nvPr/>
+        </p:nvSpPr>
+        <p:spPr>
+          <a:xfrm>
+            <a:off x="1920240" y="3063240"/>
+            <a:ext cx="4206240" cy="320040"/>
+          </a:xfrm>
+          <a:prstGeom prst="rect">
+            <a:avLst/>
+          </a:prstGeom>
+          <a:noFill/>
+          <a:ln/>
+        </p:spPr>
+        <p:txBody>
+          <a:bodyPr wrap="square" rtlCol="0" anchor="t"/>
+          <a:lstStyle/>
+          <a:p>
+            <a:pPr algn="l" indent="0" marL="0">
+              <a:buNone/>
+            </a:pPr>
+            <a:r>
+              <a:rPr lang="en-US" sz="1500" b="1" dirty="0">
+                <a:solidFill>
+                  <a:srgbClr val="17140F"/>
+                </a:solidFill>
+                <a:latin typeface="游明朝" pitchFamily="34" charset="0"/>
+                <a:ea typeface="游明朝" pitchFamily="34" charset="-122"/>
+                <a:cs typeface="游明朝" pitchFamily="34" charset="-120"/>
+              </a:rPr>
+              <a:t>木材利用促進法</a:t>
+            </a:r>
+            <a:endParaRPr lang="en-US" sz="1500" dirty="0"/>
+          </a:p>
+        </p:txBody>
+      </p:sp>
+      <p:sp>
+        <p:nvSpPr>
+          <p:cNvPr id="13" name="Text 11"/>
+          <p:cNvSpPr/>
+          <p:nvPr/>
+        </p:nvSpPr>
+        <p:spPr>
+          <a:xfrm>
+            <a:off x="1920240" y="3410712"/>
+            <a:ext cx="4206240" cy="530352"/>
           </a:xfrm>
           <a:prstGeom prst="rect">
             <a:avLst/>
@@ -3606,89 +3629,34 @@
           <a:p>
             <a:pPr algn="l" indent="0" marL="0">
               <a:lnSpc>
-                <a:spcPct val="170000"/>
+                <a:spcPct val="150000"/>
               </a:lnSpc>
               <a:buNone/>
             </a:pPr>
             <a:r>
-              <a:rPr lang="en-US" sz="1500" b="1" dirty="0">
-                <a:solidFill>
-                  <a:srgbClr val="17140F"/>
-                </a:solidFill>
-                <a:latin typeface="游明朝" pitchFamily="34" charset="0"/>
-                <a:ea typeface="游明朝" pitchFamily="34" charset="-122"/>
-                <a:cs typeface="游明朝" pitchFamily="34" charset="-120"/>
-              </a:rPr>
-              <a:t>木材利用促進法</a:t>
-            </a:r>
-            <a:pPr algn="l" indent="0" marL="0">
-              <a:lnSpc>
-                <a:spcPct val="170000"/>
-              </a:lnSpc>
-              <a:buNone/>
-            </a:pPr>
-            <a:r>
-              <a:rPr lang="en-US" sz="1400" dirty="0">
-                <a:solidFill>
-                  <a:srgbClr val="000000"/>
-                </a:solidFill>
-                <a:latin typeface="游明朝" pitchFamily="34" charset="0"/>
-                <a:ea typeface="游明朝" pitchFamily="34" charset="-122"/>
-                <a:cs typeface="游明朝" pitchFamily="34" charset="-120"/>
-              </a:rPr>
-              <a:t>
-</a:t>
-            </a:r>
-            <a:pPr algn="l" indent="0" marL="0">
-              <a:lnSpc>
-                <a:spcPct val="170000"/>
-              </a:lnSpc>
-              <a:buNone/>
-            </a:pPr>
-            <a:r>
-              <a:rPr lang="en-US" sz="1400" dirty="0">
-                <a:solidFill>
-                  <a:srgbClr val="2B251E"/>
-                </a:solidFill>
-                <a:latin typeface="游明朝" pitchFamily="34" charset="0"/>
-                <a:ea typeface="游明朝" pitchFamily="34" charset="-122"/>
-                <a:cs typeface="游明朝" pitchFamily="34" charset="-120"/>
-              </a:rPr>
-              <a:t>公共だけでなく民間建築物にも</a:t>
-            </a:r>
-            <a:endParaRPr lang="en-US" sz="1400" dirty="0"/>
-          </a:p>
-          <a:p>
-            <a:pPr algn="l" indent="0" marL="0">
-              <a:lnSpc>
-                <a:spcPct val="170000"/>
-              </a:lnSpc>
-              <a:buNone/>
-            </a:pPr>
-            <a:r>
-              <a:rPr lang="en-US" sz="1400" dirty="0">
-                <a:solidFill>
-                  <a:srgbClr val="2B251E"/>
-                </a:solidFill>
-                <a:latin typeface="游明朝" pitchFamily="34" charset="0"/>
-                <a:ea typeface="游明朝" pitchFamily="34" charset="-122"/>
-                <a:cs typeface="游明朝" pitchFamily="34" charset="-120"/>
-              </a:rPr>
-              <a:t>木材利用を拡大。</a:t>
-            </a:r>
-            <a:endParaRPr lang="en-US" sz="1400" dirty="0"/>
-          </a:p>
-        </p:txBody>
-      </p:sp>
-      <p:sp>
-        <p:nvSpPr>
-          <p:cNvPr id="12" name="Shape 10"/>
-          <p:cNvSpPr/>
-          <p:nvPr/>
-        </p:nvSpPr>
-        <p:spPr>
-          <a:xfrm>
-            <a:off x="914400" y="3749040"/>
+              <a:rPr lang="en-US" sz="1300" dirty="0">
+                <a:solidFill>
+                  <a:srgbClr val="17140F"/>
+                </a:solidFill>
+                <a:latin typeface="游明朝" pitchFamily="34" charset="0"/>
+                <a:ea typeface="游明朝" pitchFamily="34" charset="-122"/>
+                <a:cs typeface="游明朝" pitchFamily="34" charset="-120"/>
+              </a:rPr>
+              <a:t>公共だけでなく民間建築物にも木材利用を拡大。</a:t>
+            </a:r>
+            <a:endParaRPr lang="en-US" sz="1300" dirty="0"/>
+          </a:p>
+        </p:txBody>
+      </p:sp>
+      <p:sp>
+        <p:nvSpPr>
+          <p:cNvPr id="14" name="Shape 12"/>
+          <p:cNvSpPr/>
+          <p:nvPr/>
+        </p:nvSpPr>
+        <p:spPr>
+          <a:xfrm>
+            <a:off x="914400" y="4023360"/>
             <a:ext cx="5303520" cy="10973"/>
           </a:xfrm>
           <a:prstGeom prst="rect">
@@ -3702,30 +3670,30 @@
       </p:sp>
       <p:sp>
         <p:nvSpPr>
-          <p:cNvPr id="13" name="Text 11"/>
-          <p:cNvSpPr/>
-          <p:nvPr/>
-        </p:nvSpPr>
-        <p:spPr>
-          <a:xfrm>
-            <a:off x="914400" y="3822192"/>
-            <a:ext cx="914400" cy="548640"/>
-          </a:xfrm>
-          <a:prstGeom prst="rect">
-            <a:avLst/>
-          </a:prstGeom>
-          <a:noFill/>
-          <a:ln/>
-        </p:spPr>
-        <p:txBody>
-          <a:bodyPr wrap="square" rtlCol="0" anchor="t"/>
-          <a:lstStyle/>
-          <a:p>
-            <a:pPr algn="l" indent="0" marL="0">
-              <a:buNone/>
-            </a:pPr>
-            <a:r>
-              <a:rPr lang="en-US" sz="2400" i="1" dirty="0">
+          <p:cNvPr id="15" name="Text 13"/>
+          <p:cNvSpPr/>
+          <p:nvPr/>
+        </p:nvSpPr>
+        <p:spPr>
+          <a:xfrm>
+            <a:off x="914400" y="4114800"/>
+            <a:ext cx="914400" cy="457200"/>
+          </a:xfrm>
+          <a:prstGeom prst="rect">
+            <a:avLst/>
+          </a:prstGeom>
+          <a:noFill/>
+          <a:ln/>
+        </p:spPr>
+        <p:txBody>
+          <a:bodyPr wrap="square" rtlCol="0" anchor="t"/>
+          <a:lstStyle/>
+          <a:p>
+            <a:pPr algn="l" indent="0" marL="0">
+              <a:buNone/>
+            </a:pPr>
+            <a:r>
+              <a:rPr lang="en-US" sz="2200" i="1" dirty="0">
                 <a:solidFill>
                   <a:srgbClr val="17140F"/>
                 </a:solidFill>
@@ -3735,20 +3703,59 @@
               </a:rPr>
               <a:t>2025</a:t>
             </a:r>
-            <a:endParaRPr lang="en-US" sz="2400" dirty="0"/>
-          </a:p>
-        </p:txBody>
-      </p:sp>
-      <p:sp>
-        <p:nvSpPr>
-          <p:cNvPr id="14" name="Text 12"/>
-          <p:cNvSpPr/>
-          <p:nvPr/>
-        </p:nvSpPr>
-        <p:spPr>
-          <a:xfrm>
-            <a:off x="1920240" y="3822192"/>
-            <a:ext cx="4206240" cy="822960"/>
+            <a:endParaRPr lang="en-US" sz="2200" dirty="0"/>
+          </a:p>
+        </p:txBody>
+      </p:sp>
+      <p:sp>
+        <p:nvSpPr>
+          <p:cNvPr id="16" name="Text 14"/>
+          <p:cNvSpPr/>
+          <p:nvPr/>
+        </p:nvSpPr>
+        <p:spPr>
+          <a:xfrm>
+            <a:off x="1920240" y="4114800"/>
+            <a:ext cx="4206240" cy="320040"/>
+          </a:xfrm>
+          <a:prstGeom prst="rect">
+            <a:avLst/>
+          </a:prstGeom>
+          <a:noFill/>
+          <a:ln/>
+        </p:spPr>
+        <p:txBody>
+          <a:bodyPr wrap="square" rtlCol="0" anchor="t"/>
+          <a:lstStyle/>
+          <a:p>
+            <a:pPr algn="l" indent="0" marL="0">
+              <a:buNone/>
+            </a:pPr>
+            <a:r>
+              <a:rPr lang="en-US" sz="1500" b="1" dirty="0">
+                <a:solidFill>
+                  <a:srgbClr val="17140F"/>
+                </a:solidFill>
+                <a:latin typeface="游明朝" pitchFamily="34" charset="0"/>
+                <a:ea typeface="游明朝" pitchFamily="34" charset="-122"/>
+                <a:cs typeface="游明朝" pitchFamily="34" charset="-120"/>
+              </a:rPr>
+              <a:t>中高層木造の増加</a:t>
+            </a:r>
+            <a:endParaRPr lang="en-US" sz="1500" dirty="0"/>
+          </a:p>
+        </p:txBody>
+      </p:sp>
+      <p:sp>
+        <p:nvSpPr>
+          <p:cNvPr id="17" name="Text 15"/>
+          <p:cNvSpPr/>
+          <p:nvPr/>
+        </p:nvSpPr>
+        <p:spPr>
+          <a:xfrm>
+            <a:off x="1920240" y="4462272"/>
+            <a:ext cx="4206240" cy="530352"/>
           </a:xfrm>
           <a:prstGeom prst="rect">
             <a:avLst/>
@@ -3762,89 +3769,34 @@
           <a:p>
             <a:pPr algn="l" indent="0" marL="0">
               <a:lnSpc>
-                <a:spcPct val="170000"/>
+                <a:spcPct val="150000"/>
               </a:lnSpc>
               <a:buNone/>
             </a:pPr>
             <a:r>
-              <a:rPr lang="en-US" sz="1500" b="1" dirty="0">
-                <a:solidFill>
-                  <a:srgbClr val="17140F"/>
-                </a:solidFill>
-                <a:latin typeface="游明朝" pitchFamily="34" charset="0"/>
-                <a:ea typeface="游明朝" pitchFamily="34" charset="-122"/>
-                <a:cs typeface="游明朝" pitchFamily="34" charset="-120"/>
-              </a:rPr>
-              <a:t>中高層木造の増加</a:t>
-            </a:r>
-            <a:pPr algn="l" indent="0" marL="0">
-              <a:lnSpc>
-                <a:spcPct val="170000"/>
-              </a:lnSpc>
-              <a:buNone/>
-            </a:pPr>
-            <a:r>
-              <a:rPr lang="en-US" sz="1400" dirty="0">
-                <a:solidFill>
-                  <a:srgbClr val="000000"/>
-                </a:solidFill>
-                <a:latin typeface="游明朝" pitchFamily="34" charset="0"/>
-                <a:ea typeface="游明朝" pitchFamily="34" charset="-122"/>
-                <a:cs typeface="游明朝" pitchFamily="34" charset="-120"/>
-              </a:rPr>
-              <a:t>
-</a:t>
-            </a:r>
-            <a:pPr algn="l" indent="0" marL="0">
-              <a:lnSpc>
-                <a:spcPct val="170000"/>
-              </a:lnSpc>
-              <a:buNone/>
-            </a:pPr>
-            <a:r>
-              <a:rPr lang="en-US" sz="1400" dirty="0">
-                <a:solidFill>
-                  <a:srgbClr val="2B251E"/>
-                </a:solidFill>
-                <a:latin typeface="游明朝" pitchFamily="34" charset="0"/>
-                <a:ea typeface="游明朝" pitchFamily="34" charset="-122"/>
-                <a:cs typeface="游明朝" pitchFamily="34" charset="-120"/>
-              </a:rPr>
-              <a:t>10階以上の木造ビルが国内で</a:t>
-            </a:r>
-            <a:endParaRPr lang="en-US" sz="1400" dirty="0"/>
-          </a:p>
-          <a:p>
-            <a:pPr algn="l" indent="0" marL="0">
-              <a:lnSpc>
-                <a:spcPct val="170000"/>
-              </a:lnSpc>
-              <a:buNone/>
-            </a:pPr>
-            <a:r>
-              <a:rPr lang="en-US" sz="1400" dirty="0">
-                <a:solidFill>
-                  <a:srgbClr val="2B251E"/>
-                </a:solidFill>
-                <a:latin typeface="游明朝" pitchFamily="34" charset="0"/>
-                <a:ea typeface="游明朝" pitchFamily="34" charset="-122"/>
-                <a:cs typeface="游明朝" pitchFamily="34" charset="-120"/>
-              </a:rPr>
-              <a:t>複数竣工。</a:t>
-            </a:r>
-            <a:endParaRPr lang="en-US" sz="1400" dirty="0"/>
-          </a:p>
-        </p:txBody>
-      </p:sp>
-      <p:sp>
-        <p:nvSpPr>
-          <p:cNvPr id="15" name="Shape 13"/>
-          <p:cNvSpPr/>
-          <p:nvPr/>
-        </p:nvSpPr>
-        <p:spPr>
-          <a:xfrm>
-            <a:off x="914400" y="4663440"/>
+              <a:rPr lang="en-US" sz="1300" dirty="0">
+                <a:solidFill>
+                  <a:srgbClr val="17140F"/>
+                </a:solidFill>
+                <a:latin typeface="游明朝" pitchFamily="34" charset="0"/>
+                <a:ea typeface="游明朝" pitchFamily="34" charset="-122"/>
+                <a:cs typeface="游明朝" pitchFamily="34" charset="-120"/>
+              </a:rPr>
+              <a:t>10階以上の木造ビルが国内で複数竣工。</a:t>
+            </a:r>
+            <a:endParaRPr lang="en-US" sz="1300" dirty="0"/>
+          </a:p>
+        </p:txBody>
+      </p:sp>
+      <p:sp>
+        <p:nvSpPr>
+          <p:cNvPr id="18" name="Shape 16"/>
+          <p:cNvSpPr/>
+          <p:nvPr/>
+        </p:nvSpPr>
+        <p:spPr>
+          <a:xfrm>
+            <a:off x="914400" y="5074920"/>
             <a:ext cx="5303520" cy="10973"/>
           </a:xfrm>
           <a:prstGeom prst="rect">
@@ -3858,32 +3810,32 @@
       </p:sp>
       <p:sp>
         <p:nvSpPr>
-          <p:cNvPr id="16" name="Text 14"/>
-          <p:cNvSpPr/>
-          <p:nvPr/>
-        </p:nvSpPr>
-        <p:spPr>
-          <a:xfrm>
-            <a:off x="914400" y="4736592"/>
-            <a:ext cx="914400" cy="548640"/>
-          </a:xfrm>
-          <a:prstGeom prst="rect">
-            <a:avLst/>
-          </a:prstGeom>
-          <a:noFill/>
-          <a:ln/>
-        </p:spPr>
-        <p:txBody>
-          <a:bodyPr wrap="square" rtlCol="0" anchor="t"/>
-          <a:lstStyle/>
-          <a:p>
-            <a:pPr algn="l" indent="0" marL="0">
-              <a:buNone/>
-            </a:pPr>
-            <a:r>
-              <a:rPr lang="en-US" sz="2400" i="1" dirty="0">
-                <a:solidFill>
-                  <a:srgbClr val="8B8578"/>
+          <p:cNvPr id="19" name="Text 17"/>
+          <p:cNvSpPr/>
+          <p:nvPr/>
+        </p:nvSpPr>
+        <p:spPr>
+          <a:xfrm>
+            <a:off x="914400" y="5166360"/>
+            <a:ext cx="914400" cy="457200"/>
+          </a:xfrm>
+          <a:prstGeom prst="rect">
+            <a:avLst/>
+          </a:prstGeom>
+          <a:noFill/>
+          <a:ln/>
+        </p:spPr>
+        <p:txBody>
+          <a:bodyPr wrap="square" rtlCol="0" anchor="t"/>
+          <a:lstStyle/>
+          <a:p>
+            <a:pPr algn="l" indent="0" marL="0">
+              <a:buNone/>
+            </a:pPr>
+            <a:r>
+              <a:rPr lang="en-US" sz="2200" i="1" dirty="0">
+                <a:solidFill>
+                  <a:srgbClr val="6B6560"/>
                 </a:solidFill>
                 <a:latin typeface="游明朝" pitchFamily="34" charset="0"/>
                 <a:ea typeface="游明朝" pitchFamily="34" charset="-122"/>
@@ -3891,20 +3843,59 @@
               </a:rPr>
               <a:t>2030</a:t>
             </a:r>
-            <a:endParaRPr lang="en-US" sz="2400" dirty="0"/>
-          </a:p>
-        </p:txBody>
-      </p:sp>
-      <p:sp>
-        <p:nvSpPr>
-          <p:cNvPr id="17" name="Text 15"/>
-          <p:cNvSpPr/>
-          <p:nvPr/>
-        </p:nvSpPr>
-        <p:spPr>
-          <a:xfrm>
-            <a:off x="1920240" y="4736592"/>
-            <a:ext cx="4206240" cy="822960"/>
+            <a:endParaRPr lang="en-US" sz="2200" dirty="0"/>
+          </a:p>
+        </p:txBody>
+      </p:sp>
+      <p:sp>
+        <p:nvSpPr>
+          <p:cNvPr id="20" name="Text 18"/>
+          <p:cNvSpPr/>
+          <p:nvPr/>
+        </p:nvSpPr>
+        <p:spPr>
+          <a:xfrm>
+            <a:off x="1920240" y="5166360"/>
+            <a:ext cx="4206240" cy="320040"/>
+          </a:xfrm>
+          <a:prstGeom prst="rect">
+            <a:avLst/>
+          </a:prstGeom>
+          <a:noFill/>
+          <a:ln/>
+        </p:spPr>
+        <p:txBody>
+          <a:bodyPr wrap="square" rtlCol="0" anchor="t"/>
+          <a:lstStyle/>
+          <a:p>
+            <a:pPr algn="l" indent="0" marL="0">
+              <a:buNone/>
+            </a:pPr>
+            <a:r>
+              <a:rPr lang="en-US" sz="1500" b="1" dirty="0">
+                <a:solidFill>
+                  <a:srgbClr val="6B6560"/>
+                </a:solidFill>
+                <a:latin typeface="游明朝" pitchFamily="34" charset="0"/>
+                <a:ea typeface="游明朝" pitchFamily="34" charset="-122"/>
+                <a:cs typeface="游明朝" pitchFamily="34" charset="-120"/>
+              </a:rPr>
+              <a:t>木造比率目標</a:t>
+            </a:r>
+            <a:endParaRPr lang="en-US" sz="1500" dirty="0"/>
+          </a:p>
+        </p:txBody>
+      </p:sp>
+      <p:sp>
+        <p:nvSpPr>
+          <p:cNvPr id="21" name="Text 19"/>
+          <p:cNvSpPr/>
+          <p:nvPr/>
+        </p:nvSpPr>
+        <p:spPr>
+          <a:xfrm>
+            <a:off x="1920240" y="5513832"/>
+            <a:ext cx="4206240" cy="530352"/>
           </a:xfrm>
           <a:prstGeom prst="rect">
             <a:avLst/>
@@ -3918,89 +3909,34 @@
           <a:p>
             <a:pPr algn="l" indent="0" marL="0">
               <a:lnSpc>
-                <a:spcPct val="170000"/>
+                <a:spcPct val="150000"/>
               </a:lnSpc>
               <a:buNone/>
             </a:pPr>
             <a:r>
-              <a:rPr lang="en-US" sz="1500" b="1" dirty="0">
-                <a:solidFill>
-                  <a:srgbClr val="8B8578"/>
-                </a:solidFill>
-                <a:latin typeface="游明朝" pitchFamily="34" charset="0"/>
-                <a:ea typeface="游明朝" pitchFamily="34" charset="-122"/>
-                <a:cs typeface="游明朝" pitchFamily="34" charset="-120"/>
-              </a:rPr>
-              <a:t>木造比率目標</a:t>
-            </a:r>
-            <a:pPr algn="l" indent="0" marL="0">
-              <a:lnSpc>
-                <a:spcPct val="170000"/>
-              </a:lnSpc>
-              <a:buNone/>
-            </a:pPr>
-            <a:r>
-              <a:rPr lang="en-US" sz="1400" dirty="0">
-                <a:solidFill>
-                  <a:srgbClr val="000000"/>
-                </a:solidFill>
-                <a:latin typeface="游明朝" pitchFamily="34" charset="0"/>
-                <a:ea typeface="游明朝" pitchFamily="34" charset="-122"/>
-                <a:cs typeface="游明朝" pitchFamily="34" charset="-120"/>
-              </a:rPr>
-              <a:t>
-</a:t>
-            </a:r>
-            <a:pPr algn="l" indent="0" marL="0">
-              <a:lnSpc>
-                <a:spcPct val="170000"/>
-              </a:lnSpc>
-              <a:buNone/>
-            </a:pPr>
-            <a:r>
-              <a:rPr lang="en-US" sz="1400" dirty="0">
-                <a:solidFill>
-                  <a:srgbClr val="8B8578"/>
-                </a:solidFill>
-                <a:latin typeface="游明朝" pitchFamily="34" charset="0"/>
-                <a:ea typeface="游明朝" pitchFamily="34" charset="-122"/>
-                <a:cs typeface="游明朝" pitchFamily="34" charset="-120"/>
-              </a:rPr>
-              <a:t>新築の木造比率</a:t>
-            </a:r>
-            <a:endParaRPr lang="en-US" sz="1400" dirty="0"/>
-          </a:p>
-          <a:p>
-            <a:pPr algn="l" indent="0" marL="0">
-              <a:lnSpc>
-                <a:spcPct val="170000"/>
-              </a:lnSpc>
-              <a:buNone/>
-            </a:pPr>
-            <a:r>
-              <a:rPr lang="en-US" sz="1400" dirty="0">
-                <a:solidFill>
-                  <a:srgbClr val="8B8578"/>
-                </a:solidFill>
-                <a:latin typeface="游明朝" pitchFamily="34" charset="0"/>
-                <a:ea typeface="游明朝" pitchFamily="34" charset="-122"/>
-                <a:cs typeface="游明朝" pitchFamily="34" charset="-120"/>
-              </a:rPr>
-              <a:t>40% → 55% へ。</a:t>
-            </a:r>
-            <a:endParaRPr lang="en-US" sz="1400" dirty="0"/>
-          </a:p>
-        </p:txBody>
-      </p:sp>
-      <p:sp>
-        <p:nvSpPr>
-          <p:cNvPr id="18" name="Shape 16"/>
-          <p:cNvSpPr/>
-          <p:nvPr/>
-        </p:nvSpPr>
-        <p:spPr>
-          <a:xfrm>
-            <a:off x="914400" y="5577840"/>
+              <a:rPr lang="en-US" sz="1300" dirty="0">
+                <a:solidFill>
+                  <a:srgbClr val="6B6560"/>
+                </a:solidFill>
+                <a:latin typeface="游明朝" pitchFamily="34" charset="0"/>
+                <a:ea typeface="游明朝" pitchFamily="34" charset="-122"/>
+                <a:cs typeface="游明朝" pitchFamily="34" charset="-120"/>
+              </a:rPr>
+              <a:t>新築の木造比率 40% → 55% へ。</a:t>
+            </a:r>
+            <a:endParaRPr lang="en-US" sz="1300" dirty="0"/>
+          </a:p>
+        </p:txBody>
+      </p:sp>
+      <p:sp>
+        <p:nvSpPr>
+          <p:cNvPr id="22" name="Shape 20"/>
+          <p:cNvSpPr/>
+          <p:nvPr/>
+        </p:nvSpPr>
+        <p:spPr>
+          <a:xfrm>
+            <a:off x="914400" y="6126480"/>
             <a:ext cx="5303520" cy="10973"/>
           </a:xfrm>
           <a:prstGeom prst="rect">
@@ -4014,7 +3950,7 @@
       </p:sp>
       <p:sp>
         <p:nvSpPr>
-          <p:cNvPr id="19" name="Text 17"/>
+          <p:cNvPr id="23" name="Text 21"/>
           <p:cNvSpPr/>
           <p:nvPr/>
         </p:nvSpPr>
@@ -4039,7 +3975,7 @@
             <a:r>
               <a:rPr lang="en-US" sz="1100" spc="40" kern="0" dirty="0">
                 <a:solidFill>
-                  <a:srgbClr val="8B8578"/>
+                  <a:srgbClr val="6B6560"/>
                 </a:solidFill>
                 <a:latin typeface="游明朝" pitchFamily="34" charset="0"/>
                 <a:ea typeface="游明朝" pitchFamily="34" charset="-122"/>
@@ -4053,7 +3989,7 @@
       </p:sp>
       <p:sp>
         <p:nvSpPr>
-          <p:cNvPr id="20" name="Text 18"/>
+          <p:cNvPr id="24" name="Text 22"/>
           <p:cNvSpPr/>
           <p:nvPr/>
         </p:nvSpPr>
@@ -4106,7 +4042,7 @@
       </p:sp>
       <p:sp>
         <p:nvSpPr>
-          <p:cNvPr id="21" name="Shape 19"/>
+          <p:cNvPr id="25" name="Shape 23"/>
           <p:cNvSpPr/>
           <p:nvPr/>
         </p:nvSpPr>
@@ -4126,7 +4062,7 @@
       </p:sp>
       <p:sp>
         <p:nvSpPr>
-          <p:cNvPr id="22" name="Text 20"/>
+          <p:cNvPr id="26" name="Text 24"/>
           <p:cNvSpPr/>
           <p:nvPr/>
         </p:nvSpPr>
@@ -4154,7 +4090,7 @@
             <a:r>
               <a:rPr lang="en-US" sz="1400" dirty="0">
                 <a:solidFill>
-                  <a:srgbClr val="2B251E"/>
+                  <a:srgbClr val="17140F"/>
                 </a:solidFill>
                 <a:latin typeface="游明朝" pitchFamily="34" charset="0"/>
                 <a:ea typeface="游明朝" pitchFamily="34" charset="-122"/>
@@ -4174,7 +4110,7 @@
             <a:r>
               <a:rPr lang="en-US" sz="1400" dirty="0">
                 <a:solidFill>
-                  <a:srgbClr val="2B251E"/>
+                  <a:srgbClr val="17140F"/>
                 </a:solidFill>
                 <a:latin typeface="游明朝" pitchFamily="34" charset="0"/>
                 <a:ea typeface="游明朝" pitchFamily="34" charset="-122"/>
@@ -4194,7 +4130,7 @@
             <a:r>
               <a:rPr lang="en-US" sz="1400" dirty="0">
                 <a:solidFill>
-                  <a:srgbClr val="2B251E"/>
+                  <a:srgbClr val="17140F"/>
                 </a:solidFill>
                 <a:latin typeface="游明朝" pitchFamily="34" charset="0"/>
                 <a:ea typeface="游明朝" pitchFamily="34" charset="-122"/>
@@ -4306,23 +4242,23 @@
         <p:spPr>
           <a:xfrm>
             <a:off x="914400" y="1975104"/>
-            <a:ext cx="3316224" cy="1371600"/>
-          </a:xfrm>
-          <a:prstGeom prst="rect">
-            <a:avLst/>
-          </a:prstGeom>
-          <a:noFill/>
-          <a:ln/>
-        </p:spPr>
-        <p:txBody>
-          <a:bodyPr wrap="square" rtlCol="0" anchor="t"/>
-          <a:lstStyle/>
-          <a:p>
-            <a:pPr algn="l" indent="0" marL="0">
-              <a:buNone/>
-            </a:pPr>
-            <a:r>
-              <a:rPr lang="en-US" sz="7200" b="1" dirty="0">
+            <a:ext cx="3316224" cy="1188720"/>
+          </a:xfrm>
+          <a:prstGeom prst="rect">
+            <a:avLst/>
+          </a:prstGeom>
+          <a:noFill/>
+          <a:ln/>
+        </p:spPr>
+        <p:txBody>
+          <a:bodyPr wrap="square" rtlCol="0" anchor="t"/>
+          <a:lstStyle/>
+          <a:p>
+            <a:pPr algn="l" indent="0" marL="0">
+              <a:buNone/>
+            </a:pPr>
+            <a:r>
+              <a:rPr lang="en-US" sz="6400" b="1" dirty="0">
                 <a:solidFill>
                   <a:srgbClr val="17140F"/>
                 </a:solidFill>
@@ -4336,9 +4272,9 @@
               <a:buNone/>
             </a:pPr>
             <a:r>
-              <a:rPr lang="en-US" sz="2800" i="1" dirty="0">
-                <a:solidFill>
-                  <a:srgbClr val="8B8578"/>
+              <a:rPr lang="en-US" sz="2400" i="1" dirty="0">
+                <a:solidFill>
+                  <a:srgbClr val="6B6560"/>
                 </a:solidFill>
                 <a:latin typeface="游明朝" pitchFamily="34" charset="0"/>
                 <a:ea typeface="游明朝" pitchFamily="34" charset="-122"/>
@@ -4346,7 +4282,7 @@
               </a:rPr>
               <a:t>%</a:t>
             </a:r>
-            <a:endParaRPr lang="en-US" sz="7200" dirty="0"/>
+            <a:endParaRPr lang="en-US" sz="6400" dirty="0"/>
           </a:p>
         </p:txBody>
       </p:sp>
@@ -4358,24 +4294,24 @@
         </p:nvSpPr>
         <p:spPr>
           <a:xfrm>
-            <a:off x="914400" y="3429000"/>
-            <a:ext cx="3316224" cy="411480"/>
-          </a:xfrm>
-          <a:prstGeom prst="rect">
-            <a:avLst/>
-          </a:prstGeom>
-          <a:noFill/>
-          <a:ln/>
-        </p:spPr>
-        <p:txBody>
-          <a:bodyPr wrap="square" rtlCol="0" anchor="t"/>
-          <a:lstStyle/>
-          <a:p>
-            <a:pPr algn="l" indent="0" marL="0">
-              <a:buNone/>
-            </a:pPr>
-            <a:r>
-              <a:rPr lang="en-US" sz="1800" b="1" dirty="0">
+            <a:off x="914400" y="3246120"/>
+            <a:ext cx="3316224" cy="365760"/>
+          </a:xfrm>
+          <a:prstGeom prst="rect">
+            <a:avLst/>
+          </a:prstGeom>
+          <a:noFill/>
+          <a:ln/>
+        </p:spPr>
+        <p:txBody>
+          <a:bodyPr wrap="square" rtlCol="0" anchor="t"/>
+          <a:lstStyle/>
+          <a:p>
+            <a:pPr algn="l" indent="0" marL="0">
+              <a:buNone/>
+            </a:pPr>
+            <a:r>
+              <a:rPr lang="en-US" sz="1700" b="1" dirty="0">
                 <a:solidFill>
                   <a:srgbClr val="17140F"/>
                 </a:solidFill>
@@ -4385,7 +4321,7 @@
               </a:rPr>
               <a:t>設計期間</a:t>
             </a:r>
-            <a:endParaRPr lang="en-US" sz="1800" dirty="0"/>
+            <a:endParaRPr lang="en-US" sz="1700" dirty="0"/>
           </a:p>
         </p:txBody>
       </p:sp>
@@ -4397,8 +4333,8 @@
         </p:nvSpPr>
         <p:spPr>
           <a:xfrm>
-            <a:off x="914400" y="3886200"/>
-            <a:ext cx="3316224" cy="1645920"/>
+            <a:off x="914400" y="3657600"/>
+            <a:ext cx="3316224" cy="1463040"/>
           </a:xfrm>
           <a:prstGeom prst="rect">
             <a:avLst/>
@@ -4412,60 +4348,20 @@
           <a:p>
             <a:pPr algn="l" indent="0" marL="0">
               <a:lnSpc>
-                <a:spcPct val="175000"/>
+                <a:spcPct val="170000"/>
               </a:lnSpc>
               <a:buNone/>
             </a:pPr>
             <a:r>
               <a:rPr lang="en-US" sz="1400" dirty="0">
                 <a:solidFill>
-                  <a:srgbClr val="2B251E"/>
-                </a:solidFill>
-                <a:latin typeface="游明朝" pitchFamily="34" charset="0"/>
-                <a:ea typeface="游明朝" pitchFamily="34" charset="-122"/>
-                <a:cs typeface="游明朝" pitchFamily="34" charset="-120"/>
-              </a:rPr>
-              <a:t>法規チェック、構造計算、</a:t>
-            </a:r>
-            <a:endParaRPr lang="en-US" sz="1400" dirty="0"/>
-          </a:p>
-          <a:p>
-            <a:pPr algn="l" indent="0" marL="0">
-              <a:lnSpc>
-                <a:spcPct val="175000"/>
-              </a:lnSpc>
-              <a:buNone/>
-            </a:pPr>
-            <a:r>
-              <a:rPr lang="en-US" sz="1400" dirty="0">
-                <a:solidFill>
-                  <a:srgbClr val="2B251E"/>
-                </a:solidFill>
-                <a:latin typeface="游明朝" pitchFamily="34" charset="0"/>
-                <a:ea typeface="游明朝" pitchFamily="34" charset="-122"/>
-                <a:cs typeface="游明朝" pitchFamily="34" charset="-120"/>
-              </a:rPr>
-              <a:t>ドキュメント生成。</a:t>
-            </a:r>
-            <a:endParaRPr lang="en-US" sz="1400" dirty="0"/>
-          </a:p>
-          <a:p>
-            <a:pPr algn="l" indent="0" marL="0">
-              <a:lnSpc>
-                <a:spcPct val="175000"/>
-              </a:lnSpc>
-              <a:buNone/>
-            </a:pPr>
-            <a:r>
-              <a:rPr lang="en-US" sz="1400" dirty="0">
-                <a:solidFill>
-                  <a:srgbClr val="2B251E"/>
-                </a:solidFill>
-                <a:latin typeface="游明朝" pitchFamily="34" charset="0"/>
-                <a:ea typeface="游明朝" pitchFamily="34" charset="-122"/>
-                <a:cs typeface="游明朝" pitchFamily="34" charset="-120"/>
-              </a:rPr>
-              <a:t>手仕事の大半が自動化される。</a:t>
+                  <a:srgbClr val="17140F"/>
+                </a:solidFill>
+                <a:latin typeface="游明朝" pitchFamily="34" charset="0"/>
+                <a:ea typeface="游明朝" pitchFamily="34" charset="-122"/>
+                <a:cs typeface="游明朝" pitchFamily="34" charset="-120"/>
+              </a:rPr>
+              <a:t>法規チェック、構造計算、ドキュメント生成。手仕事の大半が自動化される。</a:t>
             </a:r>
             <a:endParaRPr lang="en-US" sz="1400" dirty="0"/>
           </a:p>
@@ -4500,23 +4396,23 @@
         <p:spPr>
           <a:xfrm>
             <a:off x="4367784" y="1975104"/>
-            <a:ext cx="3316224" cy="1371600"/>
-          </a:xfrm>
-          <a:prstGeom prst="rect">
-            <a:avLst/>
-          </a:prstGeom>
-          <a:noFill/>
-          <a:ln/>
-        </p:spPr>
-        <p:txBody>
-          <a:bodyPr wrap="square" rtlCol="0" anchor="t"/>
-          <a:lstStyle/>
-          <a:p>
-            <a:pPr algn="l" indent="0" marL="0">
-              <a:buNone/>
-            </a:pPr>
-            <a:r>
-              <a:rPr lang="en-US" sz="7200" b="1" dirty="0">
+            <a:ext cx="3316224" cy="1188720"/>
+          </a:xfrm>
+          <a:prstGeom prst="rect">
+            <a:avLst/>
+          </a:prstGeom>
+          <a:noFill/>
+          <a:ln/>
+        </p:spPr>
+        <p:txBody>
+          <a:bodyPr wrap="square" rtlCol="0" anchor="t"/>
+          <a:lstStyle/>
+          <a:p>
+            <a:pPr algn="l" indent="0" marL="0">
+              <a:buNone/>
+            </a:pPr>
+            <a:r>
+              <a:rPr lang="en-US" sz="6400" b="1" dirty="0">
                 <a:solidFill>
                   <a:srgbClr val="17140F"/>
                 </a:solidFill>
@@ -4530,9 +4426,9 @@
               <a:buNone/>
             </a:pPr>
             <a:r>
-              <a:rPr lang="en-US" sz="2800" i="1" dirty="0">
-                <a:solidFill>
-                  <a:srgbClr val="8B8578"/>
+              <a:rPr lang="en-US" sz="2400" i="1" dirty="0">
+                <a:solidFill>
+                  <a:srgbClr val="6B6560"/>
                 </a:solidFill>
                 <a:latin typeface="游明朝" pitchFamily="34" charset="0"/>
                 <a:ea typeface="游明朝" pitchFamily="34" charset="-122"/>
@@ -4540,7 +4436,7 @@
               </a:rPr>
               <a:t>%</a:t>
             </a:r>
-            <a:endParaRPr lang="en-US" sz="7200" dirty="0"/>
+            <a:endParaRPr lang="en-US" sz="6400" dirty="0"/>
           </a:p>
         </p:txBody>
       </p:sp>
@@ -4552,24 +4448,24 @@
         </p:nvSpPr>
         <p:spPr>
           <a:xfrm>
-            <a:off x="4367784" y="3429000"/>
-            <a:ext cx="3316224" cy="411480"/>
-          </a:xfrm>
-          <a:prstGeom prst="rect">
-            <a:avLst/>
-          </a:prstGeom>
-          <a:noFill/>
-          <a:ln/>
-        </p:spPr>
-        <p:txBody>
-          <a:bodyPr wrap="square" rtlCol="0" anchor="t"/>
-          <a:lstStyle/>
-          <a:p>
-            <a:pPr algn="l" indent="0" marL="0">
-              <a:buNone/>
-            </a:pPr>
-            <a:r>
-              <a:rPr lang="en-US" sz="1800" b="1" dirty="0">
+            <a:off x="4367784" y="3246120"/>
+            <a:ext cx="3316224" cy="365760"/>
+          </a:xfrm>
+          <a:prstGeom prst="rect">
+            <a:avLst/>
+          </a:prstGeom>
+          <a:noFill/>
+          <a:ln/>
+        </p:spPr>
+        <p:txBody>
+          <a:bodyPr wrap="square" rtlCol="0" anchor="t"/>
+          <a:lstStyle/>
+          <a:p>
+            <a:pPr algn="l" indent="0" marL="0">
+              <a:buNone/>
+            </a:pPr>
+            <a:r>
+              <a:rPr lang="en-US" sz="1700" b="1" dirty="0">
                 <a:solidFill>
                   <a:srgbClr val="17140F"/>
                 </a:solidFill>
@@ -4579,7 +4475,7 @@
               </a:rPr>
               <a:t>施工コスト</a:t>
             </a:r>
-            <a:endParaRPr lang="en-US" sz="1800" dirty="0"/>
+            <a:endParaRPr lang="en-US" sz="1700" dirty="0"/>
           </a:p>
         </p:txBody>
       </p:sp>
@@ -4591,8 +4487,8 @@
         </p:nvSpPr>
         <p:spPr>
           <a:xfrm>
-            <a:off x="4367784" y="3886200"/>
-            <a:ext cx="3316224" cy="1645920"/>
+            <a:off x="4367784" y="3657600"/>
+            <a:ext cx="3316224" cy="1463040"/>
           </a:xfrm>
           <a:prstGeom prst="rect">
             <a:avLst/>
@@ -4606,60 +4502,20 @@
           <a:p>
             <a:pPr algn="l" indent="0" marL="0">
               <a:lnSpc>
-                <a:spcPct val="175000"/>
+                <a:spcPct val="170000"/>
               </a:lnSpc>
               <a:buNone/>
             </a:pPr>
             <a:r>
               <a:rPr lang="en-US" sz="1400" dirty="0">
                 <a:solidFill>
-                  <a:srgbClr val="2B251E"/>
-                </a:solidFill>
-                <a:latin typeface="游明朝" pitchFamily="34" charset="0"/>
-                <a:ea typeface="游明朝" pitchFamily="34" charset="-122"/>
-                <a:cs typeface="游明朝" pitchFamily="34" charset="-120"/>
-              </a:rPr>
-              <a:t>BIMデータから自動積算、</a:t>
-            </a:r>
-            <a:endParaRPr lang="en-US" sz="1400" dirty="0"/>
-          </a:p>
-          <a:p>
-            <a:pPr algn="l" indent="0" marL="0">
-              <a:lnSpc>
-                <a:spcPct val="175000"/>
-              </a:lnSpc>
-              <a:buNone/>
-            </a:pPr>
-            <a:r>
-              <a:rPr lang="en-US" sz="1400" dirty="0">
-                <a:solidFill>
-                  <a:srgbClr val="2B251E"/>
-                </a:solidFill>
-                <a:latin typeface="游明朝" pitchFamily="34" charset="0"/>
-                <a:ea typeface="游明朝" pitchFamily="34" charset="-122"/>
-                <a:cs typeface="游明朝" pitchFamily="34" charset="-120"/>
-              </a:rPr>
-              <a:t>工程最適化。</a:t>
-            </a:r>
-            <a:endParaRPr lang="en-US" sz="1400" dirty="0"/>
-          </a:p>
-          <a:p>
-            <a:pPr algn="l" indent="0" marL="0">
-              <a:lnSpc>
-                <a:spcPct val="175000"/>
-              </a:lnSpc>
-              <a:buNone/>
-            </a:pPr>
-            <a:r>
-              <a:rPr lang="en-US" sz="1400" dirty="0">
-                <a:solidFill>
-                  <a:srgbClr val="2B251E"/>
-                </a:solidFill>
-                <a:latin typeface="游明朝" pitchFamily="34" charset="0"/>
-                <a:ea typeface="游明朝" pitchFamily="34" charset="-122"/>
-                <a:cs typeface="游明朝" pitchFamily="34" charset="-120"/>
-              </a:rPr>
-              <a:t>見積の透明度が一段上がる。</a:t>
+                  <a:srgbClr val="17140F"/>
+                </a:solidFill>
+                <a:latin typeface="游明朝" pitchFamily="34" charset="0"/>
+                <a:ea typeface="游明朝" pitchFamily="34" charset="-122"/>
+                <a:cs typeface="游明朝" pitchFamily="34" charset="-120"/>
+              </a:rPr>
+              <a:t>BIMデータから自動積算、工程最適化。見積の透明度が一段上がる。</a:t>
             </a:r>
             <a:endParaRPr lang="en-US" sz="1400" dirty="0"/>
           </a:p>
@@ -4694,23 +4550,23 @@
         <p:spPr>
           <a:xfrm>
             <a:off x="7821168" y="1975104"/>
-            <a:ext cx="3316224" cy="1371600"/>
-          </a:xfrm>
-          <a:prstGeom prst="rect">
-            <a:avLst/>
-          </a:prstGeom>
-          <a:noFill/>
-          <a:ln/>
-        </p:spPr>
-        <p:txBody>
-          <a:bodyPr wrap="square" rtlCol="0" anchor="t"/>
-          <a:lstStyle/>
-          <a:p>
-            <a:pPr algn="l" indent="0" marL="0">
-              <a:buNone/>
-            </a:pPr>
-            <a:r>
-              <a:rPr lang="en-US" sz="7200" b="1" dirty="0">
+            <a:ext cx="3316224" cy="1188720"/>
+          </a:xfrm>
+          <a:prstGeom prst="rect">
+            <a:avLst/>
+          </a:prstGeom>
+          <a:noFill/>
+          <a:ln/>
+        </p:spPr>
+        <p:txBody>
+          <a:bodyPr wrap="square" rtlCol="0" anchor="t"/>
+          <a:lstStyle/>
+          <a:p>
+            <a:pPr algn="l" indent="0" marL="0">
+              <a:buNone/>
+            </a:pPr>
+            <a:r>
+              <a:rPr lang="en-US" sz="6400" b="1" dirty="0">
                 <a:solidFill>
                   <a:srgbClr val="17140F"/>
                 </a:solidFill>
@@ -4724,9 +4580,9 @@
               <a:buNone/>
             </a:pPr>
             <a:r>
-              <a:rPr lang="en-US" sz="2800" i="1" dirty="0">
-                <a:solidFill>
-                  <a:srgbClr val="8B8578"/>
+              <a:rPr lang="en-US" sz="2400" i="1" dirty="0">
+                <a:solidFill>
+                  <a:srgbClr val="6B6560"/>
                 </a:solidFill>
                 <a:latin typeface="游明朝" pitchFamily="34" charset="0"/>
                 <a:ea typeface="游明朝" pitchFamily="34" charset="-122"/>
@@ -4734,7 +4590,7 @@
               </a:rPr>
               <a:t>%</a:t>
             </a:r>
-            <a:endParaRPr lang="en-US" sz="7200" dirty="0"/>
+            <a:endParaRPr lang="en-US" sz="6400" dirty="0"/>
           </a:p>
         </p:txBody>
       </p:sp>
@@ -4746,24 +4602,24 @@
         </p:nvSpPr>
         <p:spPr>
           <a:xfrm>
-            <a:off x="7821168" y="3429000"/>
-            <a:ext cx="3316224" cy="411480"/>
-          </a:xfrm>
-          <a:prstGeom prst="rect">
-            <a:avLst/>
-          </a:prstGeom>
-          <a:noFill/>
-          <a:ln/>
-        </p:spPr>
-        <p:txBody>
-          <a:bodyPr wrap="square" rtlCol="0" anchor="t"/>
-          <a:lstStyle/>
-          <a:p>
-            <a:pPr algn="l" indent="0" marL="0">
-              <a:buNone/>
-            </a:pPr>
-            <a:r>
-              <a:rPr lang="en-US" sz="1800" b="1" dirty="0">
+            <a:off x="7821168" y="3246120"/>
+            <a:ext cx="3316224" cy="365760"/>
+          </a:xfrm>
+          <a:prstGeom prst="rect">
+            <a:avLst/>
+          </a:prstGeom>
+          <a:noFill/>
+          <a:ln/>
+        </p:spPr>
+        <p:txBody>
+          <a:bodyPr wrap="square" rtlCol="0" anchor="t"/>
+          <a:lstStyle/>
+          <a:p>
+            <a:pPr algn="l" indent="0" marL="0">
+              <a:buNone/>
+            </a:pPr>
+            <a:r>
+              <a:rPr lang="en-US" sz="1700" b="1" dirty="0">
                 <a:solidFill>
                   <a:srgbClr val="17140F"/>
                 </a:solidFill>
@@ -4773,7 +4629,7 @@
               </a:rPr>
               <a:t>維持管理の精度</a:t>
             </a:r>
-            <a:endParaRPr lang="en-US" sz="1800" dirty="0"/>
+            <a:endParaRPr lang="en-US" sz="1700" dirty="0"/>
           </a:p>
         </p:txBody>
       </p:sp>
@@ -4785,8 +4641,8 @@
         </p:nvSpPr>
         <p:spPr>
           <a:xfrm>
-            <a:off x="7821168" y="3886200"/>
-            <a:ext cx="3316224" cy="1645920"/>
+            <a:off x="7821168" y="3657600"/>
+            <a:ext cx="3316224" cy="1463040"/>
           </a:xfrm>
           <a:prstGeom prst="rect">
             <a:avLst/>
@@ -4800,60 +4656,20 @@
           <a:p>
             <a:pPr algn="l" indent="0" marL="0">
               <a:lnSpc>
-                <a:spcPct val="175000"/>
+                <a:spcPct val="170000"/>
               </a:lnSpc>
               <a:buNone/>
             </a:pPr>
             <a:r>
               <a:rPr lang="en-US" sz="1400" dirty="0">
                 <a:solidFill>
-                  <a:srgbClr val="2B251E"/>
-                </a:solidFill>
-                <a:latin typeface="游明朝" pitchFamily="34" charset="0"/>
-                <a:ea typeface="游明朝" pitchFamily="34" charset="-122"/>
-                <a:cs typeface="游明朝" pitchFamily="34" charset="-120"/>
-              </a:rPr>
-              <a:t>IoTセンサー × AI予測により、</a:t>
-            </a:r>
-            <a:endParaRPr lang="en-US" sz="1400" dirty="0"/>
-          </a:p>
-          <a:p>
-            <a:pPr algn="l" indent="0" marL="0">
-              <a:lnSpc>
-                <a:spcPct val="175000"/>
-              </a:lnSpc>
-              <a:buNone/>
-            </a:pPr>
-            <a:r>
-              <a:rPr lang="en-US" sz="1400" dirty="0">
-                <a:solidFill>
-                  <a:srgbClr val="2B251E"/>
-                </a:solidFill>
-                <a:latin typeface="游明朝" pitchFamily="34" charset="0"/>
-                <a:ea typeface="游明朝" pitchFamily="34" charset="-122"/>
-                <a:cs typeface="游明朝" pitchFamily="34" charset="-120"/>
-              </a:rPr>
-              <a:t>建物は「使われながら学習する」</a:t>
-            </a:r>
-            <a:endParaRPr lang="en-US" sz="1400" dirty="0"/>
-          </a:p>
-          <a:p>
-            <a:pPr algn="l" indent="0" marL="0">
-              <a:lnSpc>
-                <a:spcPct val="175000"/>
-              </a:lnSpc>
-              <a:buNone/>
-            </a:pPr>
-            <a:r>
-              <a:rPr lang="en-US" sz="1400" dirty="0">
-                <a:solidFill>
-                  <a:srgbClr val="2B251E"/>
-                </a:solidFill>
-                <a:latin typeface="游明朝" pitchFamily="34" charset="0"/>
-                <a:ea typeface="游明朝" pitchFamily="34" charset="-122"/>
-                <a:cs typeface="游明朝" pitchFamily="34" charset="-120"/>
-              </a:rPr>
-              <a:t>対象に。</a:t>
+                  <a:srgbClr val="17140F"/>
+                </a:solidFill>
+                <a:latin typeface="游明朝" pitchFamily="34" charset="0"/>
+                <a:ea typeface="游明朝" pitchFamily="34" charset="-122"/>
+                <a:cs typeface="游明朝" pitchFamily="34" charset="-120"/>
+              </a:rPr>
+              <a:t>IoTセンサー × AI予測により、建物は「使われながら学習する」対象に。</a:t>
             </a:r>
             <a:endParaRPr lang="en-US" sz="1400" dirty="0"/>
           </a:p>
@@ -4909,7 +4725,7 @@
             <a:r>
               <a:rPr lang="en-US" sz="1500" i="1" dirty="0">
                 <a:solidFill>
-                  <a:srgbClr val="2B251E"/>
+                  <a:srgbClr val="17140F"/>
                 </a:solidFill>
                 <a:latin typeface="游明朝" pitchFamily="34" charset="0"/>
                 <a:ea typeface="游明朝" pitchFamily="34" charset="-122"/>
@@ -4929,7 +4745,7 @@
             <a:r>
               <a:rPr lang="en-US" sz="1500" i="1" dirty="0">
                 <a:solidFill>
-                  <a:srgbClr val="2B251E"/>
+                  <a:srgbClr val="17140F"/>
                 </a:solidFill>
                 <a:latin typeface="游明朝" pitchFamily="34" charset="0"/>
                 <a:ea typeface="游明朝" pitchFamily="34" charset="-122"/>
@@ -5146,7 +4962,7 @@
             <a:r>
               <a:rPr lang="en-US" sz="1400" dirty="0">
                 <a:solidFill>
-                  <a:srgbClr val="2B251E"/>
+                  <a:srgbClr val="17140F"/>
                 </a:solidFill>
                 <a:latin typeface="游明朝" pitchFamily="34" charset="0"/>
                 <a:ea typeface="游明朝" pitchFamily="34" charset="-122"/>
@@ -5166,7 +4982,7 @@
             <a:r>
               <a:rPr lang="en-US" sz="1400" dirty="0">
                 <a:solidFill>
-                  <a:srgbClr val="2B251E"/>
+                  <a:srgbClr val="17140F"/>
                 </a:solidFill>
                 <a:latin typeface="游明朝" pitchFamily="34" charset="0"/>
                 <a:ea typeface="游明朝" pitchFamily="34" charset="-122"/>
@@ -5186,7 +5002,7 @@
             <a:r>
               <a:rPr lang="en-US" sz="1400" dirty="0">
                 <a:solidFill>
-                  <a:srgbClr val="2B251E"/>
+                  <a:srgbClr val="17140F"/>
                 </a:solidFill>
                 <a:latin typeface="游明朝" pitchFamily="34" charset="0"/>
                 <a:ea typeface="游明朝" pitchFamily="34" charset="-122"/>
@@ -5206,7 +5022,7 @@
             <a:r>
               <a:rPr lang="en-US" sz="1400" dirty="0">
                 <a:solidFill>
-                  <a:srgbClr val="2B251E"/>
+                  <a:srgbClr val="17140F"/>
                 </a:solidFill>
                 <a:latin typeface="游明朝" pitchFamily="34" charset="0"/>
                 <a:ea typeface="游明朝" pitchFamily="34" charset="-122"/>
@@ -5284,7 +5100,7 @@
             <a:r>
               <a:rPr lang="en-US" sz="1300" dirty="0">
                 <a:solidFill>
-                  <a:srgbClr val="8B8578"/>
+                  <a:srgbClr val="6B6560"/>
                 </a:solidFill>
                 <a:latin typeface="游明朝" pitchFamily="34" charset="0"/>
                 <a:ea typeface="游明朝" pitchFamily="34" charset="-122"/>
@@ -5427,7 +5243,7 @@
             <a:r>
               <a:rPr lang="en-US" sz="1400" dirty="0">
                 <a:solidFill>
-                  <a:srgbClr val="2B251E"/>
+                  <a:srgbClr val="17140F"/>
                 </a:solidFill>
                 <a:latin typeface="游明朝" pitchFamily="34" charset="0"/>
                 <a:ea typeface="游明朝" pitchFamily="34" charset="-122"/>
@@ -5447,7 +5263,7 @@
             <a:r>
               <a:rPr lang="en-US" sz="1400" dirty="0">
                 <a:solidFill>
-                  <a:srgbClr val="2B251E"/>
+                  <a:srgbClr val="17140F"/>
                 </a:solidFill>
                 <a:latin typeface="游明朝" pitchFamily="34" charset="0"/>
                 <a:ea typeface="游明朝" pitchFamily="34" charset="-122"/>
@@ -5467,7 +5283,7 @@
             <a:r>
               <a:rPr lang="en-US" sz="1400" dirty="0">
                 <a:solidFill>
-                  <a:srgbClr val="2B251E"/>
+                  <a:srgbClr val="17140F"/>
                 </a:solidFill>
                 <a:latin typeface="游明朝" pitchFamily="34" charset="0"/>
                 <a:ea typeface="游明朝" pitchFamily="34" charset="-122"/>
@@ -5487,7 +5303,7 @@
             <a:r>
               <a:rPr lang="en-US" sz="1400" dirty="0">
                 <a:solidFill>
-                  <a:srgbClr val="2B251E"/>
+                  <a:srgbClr val="17140F"/>
                 </a:solidFill>
                 <a:latin typeface="游明朝" pitchFamily="34" charset="0"/>
                 <a:ea typeface="游明朝" pitchFamily="34" charset="-122"/>
@@ -5565,7 +5381,7 @@
             <a:r>
               <a:rPr lang="en-US" sz="1300" dirty="0">
                 <a:solidFill>
-                  <a:srgbClr val="8B8578"/>
+                  <a:srgbClr val="6B6560"/>
                 </a:solidFill>
                 <a:latin typeface="游明朝" pitchFamily="34" charset="0"/>
                 <a:ea typeface="游明朝" pitchFamily="34" charset="-122"/>

--- a/slides/exports/architecture2026_text.pptx
+++ b/slides/exports/architecture2026_text.pptx
@@ -1911,8 +1911,8 @@
         </p:nvSpPr>
         <p:spPr>
           <a:xfrm>
-            <a:off x="2926080" y="1024128"/>
-            <a:ext cx="1005840" cy="777240"/>
+            <a:off x="2926080" y="914400"/>
+            <a:ext cx="1005840" cy="960120"/>
           </a:xfrm>
           <a:prstGeom prst="rect">
             <a:avLst/>
@@ -1928,7 +1928,7 @@
               <a:buNone/>
             </a:pPr>
             <a:r>
-              <a:rPr lang="en-US" sz="2600" i="1" dirty="0">
+              <a:rPr lang="en-US" sz="2600" b="1" i="1" dirty="0">
                 <a:solidFill>
                   <a:srgbClr val="17140F"/>
                 </a:solidFill>
@@ -1950,17 +1950,17 @@
         </p:nvSpPr>
         <p:spPr>
           <a:xfrm>
-            <a:off x="4023360" y="1115568"/>
-            <a:ext cx="6858000" cy="594360"/>
-          </a:xfrm>
-          <a:prstGeom prst="rect">
-            <a:avLst/>
-          </a:prstGeom>
-          <a:noFill/>
-          <a:ln/>
-        </p:spPr>
-        <p:txBody>
-          <a:bodyPr wrap="square" rtlCol="0" anchor="t"/>
+            <a:off x="4023360" y="914400"/>
+            <a:ext cx="6858000" cy="960120"/>
+          </a:xfrm>
+          <a:prstGeom prst="rect">
+            <a:avLst/>
+          </a:prstGeom>
+          <a:noFill/>
+          <a:ln/>
+        </p:spPr>
+        <p:txBody>
+          <a:bodyPr wrap="square" rtlCol="0" anchor="ctr"/>
           <a:lstStyle/>
           <a:p>
             <a:pPr algn="l" indent="0" marL="0">
@@ -1989,24 +1989,24 @@
         </p:nvSpPr>
         <p:spPr>
           <a:xfrm>
-            <a:off x="10177272" y="1170432"/>
-            <a:ext cx="1097280" cy="457200"/>
-          </a:xfrm>
-          <a:prstGeom prst="rect">
-            <a:avLst/>
-          </a:prstGeom>
-          <a:noFill/>
-          <a:ln/>
-        </p:spPr>
-        <p:txBody>
-          <a:bodyPr wrap="square" rtlCol="0" anchor="t"/>
+            <a:off x="10177272" y="914400"/>
+            <a:ext cx="1097280" cy="960120"/>
+          </a:xfrm>
+          <a:prstGeom prst="rect">
+            <a:avLst/>
+          </a:prstGeom>
+          <a:noFill/>
+          <a:ln/>
+        </p:spPr>
+        <p:txBody>
+          <a:bodyPr wrap="square" rtlCol="0" anchor="ctr"/>
           <a:lstStyle/>
           <a:p>
             <a:pPr algn="r" indent="0" marL="0">
               <a:buNone/>
             </a:pPr>
             <a:r>
-              <a:rPr lang="en-US" sz="1400" i="1" dirty="0">
+              <a:rPr lang="en-US" sz="1400" b="1" i="1" dirty="0">
                 <a:solidFill>
                   <a:srgbClr val="17140F"/>
                 </a:solidFill>
@@ -2048,8 +2048,8 @@
         </p:nvSpPr>
         <p:spPr>
           <a:xfrm>
-            <a:off x="2926080" y="1984248"/>
-            <a:ext cx="1005840" cy="777240"/>
+            <a:off x="2926080" y="1874520"/>
+            <a:ext cx="1005840" cy="960120"/>
           </a:xfrm>
           <a:prstGeom prst="rect">
             <a:avLst/>
@@ -2065,7 +2065,7 @@
               <a:buNone/>
             </a:pPr>
             <a:r>
-              <a:rPr lang="en-US" sz="2600" i="1" dirty="0">
+              <a:rPr lang="en-US" sz="2600" b="1" i="1" dirty="0">
                 <a:solidFill>
                   <a:srgbClr val="17140F"/>
                 </a:solidFill>
@@ -2087,17 +2087,17 @@
         </p:nvSpPr>
         <p:spPr>
           <a:xfrm>
-            <a:off x="4023360" y="2075688"/>
-            <a:ext cx="6858000" cy="594360"/>
-          </a:xfrm>
-          <a:prstGeom prst="rect">
-            <a:avLst/>
-          </a:prstGeom>
-          <a:noFill/>
-          <a:ln/>
-        </p:spPr>
-        <p:txBody>
-          <a:bodyPr wrap="square" rtlCol="0" anchor="t"/>
+            <a:off x="4023360" y="1874520"/>
+            <a:ext cx="6858000" cy="960120"/>
+          </a:xfrm>
+          <a:prstGeom prst="rect">
+            <a:avLst/>
+          </a:prstGeom>
+          <a:noFill/>
+          <a:ln/>
+        </p:spPr>
+        <p:txBody>
+          <a:bodyPr wrap="square" rtlCol="0" anchor="ctr"/>
           <a:lstStyle/>
           <a:p>
             <a:pPr algn="l" indent="0" marL="0">
@@ -2126,24 +2126,24 @@
         </p:nvSpPr>
         <p:spPr>
           <a:xfrm>
-            <a:off x="10177272" y="2130552"/>
-            <a:ext cx="1097280" cy="457200"/>
-          </a:xfrm>
-          <a:prstGeom prst="rect">
-            <a:avLst/>
-          </a:prstGeom>
-          <a:noFill/>
-          <a:ln/>
-        </p:spPr>
-        <p:txBody>
-          <a:bodyPr wrap="square" rtlCol="0" anchor="t"/>
+            <a:off x="10177272" y="1874520"/>
+            <a:ext cx="1097280" cy="960120"/>
+          </a:xfrm>
+          <a:prstGeom prst="rect">
+            <a:avLst/>
+          </a:prstGeom>
+          <a:noFill/>
+          <a:ln/>
+        </p:spPr>
+        <p:txBody>
+          <a:bodyPr wrap="square" rtlCol="0" anchor="ctr"/>
           <a:lstStyle/>
           <a:p>
             <a:pPr algn="r" indent="0" marL="0">
               <a:buNone/>
             </a:pPr>
             <a:r>
-              <a:rPr lang="en-US" sz="1400" i="1" dirty="0">
+              <a:rPr lang="en-US" sz="1400" b="1" i="1" dirty="0">
                 <a:solidFill>
                   <a:srgbClr val="17140F"/>
                 </a:solidFill>
@@ -2185,8 +2185,8 @@
         </p:nvSpPr>
         <p:spPr>
           <a:xfrm>
-            <a:off x="2926080" y="2944368"/>
-            <a:ext cx="1005840" cy="777240"/>
+            <a:off x="2926080" y="2834640"/>
+            <a:ext cx="1005840" cy="960120"/>
           </a:xfrm>
           <a:prstGeom prst="rect">
             <a:avLst/>
@@ -2202,7 +2202,7 @@
               <a:buNone/>
             </a:pPr>
             <a:r>
-              <a:rPr lang="en-US" sz="2600" i="1" dirty="0">
+              <a:rPr lang="en-US" sz="2600" b="1" i="1" dirty="0">
                 <a:solidFill>
                   <a:srgbClr val="17140F"/>
                 </a:solidFill>
@@ -2224,17 +2224,17 @@
         </p:nvSpPr>
         <p:spPr>
           <a:xfrm>
-            <a:off x="4023360" y="3035808"/>
-            <a:ext cx="6858000" cy="594360"/>
-          </a:xfrm>
-          <a:prstGeom prst="rect">
-            <a:avLst/>
-          </a:prstGeom>
-          <a:noFill/>
-          <a:ln/>
-        </p:spPr>
-        <p:txBody>
-          <a:bodyPr wrap="square" rtlCol="0" anchor="t"/>
+            <a:off x="4023360" y="2834640"/>
+            <a:ext cx="6858000" cy="960120"/>
+          </a:xfrm>
+          <a:prstGeom prst="rect">
+            <a:avLst/>
+          </a:prstGeom>
+          <a:noFill/>
+          <a:ln/>
+        </p:spPr>
+        <p:txBody>
+          <a:bodyPr wrap="square" rtlCol="0" anchor="ctr"/>
           <a:lstStyle/>
           <a:p>
             <a:pPr algn="l" indent="0" marL="0">
@@ -2263,24 +2263,24 @@
         </p:nvSpPr>
         <p:spPr>
           <a:xfrm>
-            <a:off x="10177272" y="3090672"/>
-            <a:ext cx="1097280" cy="457200"/>
-          </a:xfrm>
-          <a:prstGeom prst="rect">
-            <a:avLst/>
-          </a:prstGeom>
-          <a:noFill/>
-          <a:ln/>
-        </p:spPr>
-        <p:txBody>
-          <a:bodyPr wrap="square" rtlCol="0" anchor="t"/>
+            <a:off x="10177272" y="2834640"/>
+            <a:ext cx="1097280" cy="960120"/>
+          </a:xfrm>
+          <a:prstGeom prst="rect">
+            <a:avLst/>
+          </a:prstGeom>
+          <a:noFill/>
+          <a:ln/>
+        </p:spPr>
+        <p:txBody>
+          <a:bodyPr wrap="square" rtlCol="0" anchor="ctr"/>
           <a:lstStyle/>
           <a:p>
             <a:pPr algn="r" indent="0" marL="0">
               <a:buNone/>
             </a:pPr>
             <a:r>
-              <a:rPr lang="en-US" sz="1400" i="1" dirty="0">
+              <a:rPr lang="en-US" sz="1400" b="1" i="1" dirty="0">
                 <a:solidFill>
                   <a:srgbClr val="17140F"/>
                 </a:solidFill>
@@ -2322,8 +2322,8 @@
         </p:nvSpPr>
         <p:spPr>
           <a:xfrm>
-            <a:off x="2926080" y="3904488"/>
-            <a:ext cx="1005840" cy="777240"/>
+            <a:off x="2926080" y="3794760"/>
+            <a:ext cx="1005840" cy="960120"/>
           </a:xfrm>
           <a:prstGeom prst="rect">
             <a:avLst/>
@@ -2339,7 +2339,7 @@
               <a:buNone/>
             </a:pPr>
             <a:r>
-              <a:rPr lang="en-US" sz="2600" i="1" dirty="0">
+              <a:rPr lang="en-US" sz="2600" b="1" i="1" dirty="0">
                 <a:solidFill>
                   <a:srgbClr val="17140F"/>
                 </a:solidFill>
@@ -2361,17 +2361,17 @@
         </p:nvSpPr>
         <p:spPr>
           <a:xfrm>
-            <a:off x="4023360" y="3995928"/>
-            <a:ext cx="6858000" cy="594360"/>
-          </a:xfrm>
-          <a:prstGeom prst="rect">
-            <a:avLst/>
-          </a:prstGeom>
-          <a:noFill/>
-          <a:ln/>
-        </p:spPr>
-        <p:txBody>
-          <a:bodyPr wrap="square" rtlCol="0" anchor="t"/>
+            <a:off x="4023360" y="3794760"/>
+            <a:ext cx="6858000" cy="960120"/>
+          </a:xfrm>
+          <a:prstGeom prst="rect">
+            <a:avLst/>
+          </a:prstGeom>
+          <a:noFill/>
+          <a:ln/>
+        </p:spPr>
+        <p:txBody>
+          <a:bodyPr wrap="square" rtlCol="0" anchor="ctr"/>
           <a:lstStyle/>
           <a:p>
             <a:pPr algn="l" indent="0" marL="0">
@@ -2400,24 +2400,24 @@
         </p:nvSpPr>
         <p:spPr>
           <a:xfrm>
-            <a:off x="10177272" y="4050792"/>
-            <a:ext cx="1097280" cy="457200"/>
-          </a:xfrm>
-          <a:prstGeom prst="rect">
-            <a:avLst/>
-          </a:prstGeom>
-          <a:noFill/>
-          <a:ln/>
-        </p:spPr>
-        <p:txBody>
-          <a:bodyPr wrap="square" rtlCol="0" anchor="t"/>
+            <a:off x="10177272" y="3794760"/>
+            <a:ext cx="1097280" cy="960120"/>
+          </a:xfrm>
+          <a:prstGeom prst="rect">
+            <a:avLst/>
+          </a:prstGeom>
+          <a:noFill/>
+          <a:ln/>
+        </p:spPr>
+        <p:txBody>
+          <a:bodyPr wrap="square" rtlCol="0" anchor="ctr"/>
           <a:lstStyle/>
           <a:p>
             <a:pPr algn="r" indent="0" marL="0">
               <a:buNone/>
             </a:pPr>
             <a:r>
-              <a:rPr lang="en-US" sz="1400" i="1" dirty="0">
+              <a:rPr lang="en-US" sz="1400" b="1" i="1" dirty="0">
                 <a:solidFill>
                   <a:srgbClr val="17140F"/>
                 </a:solidFill>
@@ -2459,8 +2459,8 @@
         </p:nvSpPr>
         <p:spPr>
           <a:xfrm>
-            <a:off x="2926080" y="4864608"/>
-            <a:ext cx="1005840" cy="777240"/>
+            <a:off x="2926080" y="4754880"/>
+            <a:ext cx="1005840" cy="960120"/>
           </a:xfrm>
           <a:prstGeom prst="rect">
             <a:avLst/>
@@ -2476,7 +2476,7 @@
               <a:buNone/>
             </a:pPr>
             <a:r>
-              <a:rPr lang="en-US" sz="2600" i="1" dirty="0">
+              <a:rPr lang="en-US" sz="2600" b="1" i="1" dirty="0">
                 <a:solidFill>
                   <a:srgbClr val="17140F"/>
                 </a:solidFill>
@@ -2498,17 +2498,17 @@
         </p:nvSpPr>
         <p:spPr>
           <a:xfrm>
-            <a:off x="4023360" y="4956048"/>
-            <a:ext cx="6858000" cy="594360"/>
-          </a:xfrm>
-          <a:prstGeom prst="rect">
-            <a:avLst/>
-          </a:prstGeom>
-          <a:noFill/>
-          <a:ln/>
-        </p:spPr>
-        <p:txBody>
-          <a:bodyPr wrap="square" rtlCol="0" anchor="t"/>
+            <a:off x="4023360" y="4754880"/>
+            <a:ext cx="6858000" cy="960120"/>
+          </a:xfrm>
+          <a:prstGeom prst="rect">
+            <a:avLst/>
+          </a:prstGeom>
+          <a:noFill/>
+          <a:ln/>
+        </p:spPr>
+        <p:txBody>
+          <a:bodyPr wrap="square" rtlCol="0" anchor="ctr"/>
           <a:lstStyle/>
           <a:p>
             <a:pPr algn="l" indent="0" marL="0">
@@ -2537,24 +2537,24 @@
         </p:nvSpPr>
         <p:spPr>
           <a:xfrm>
-            <a:off x="10177272" y="5010912"/>
-            <a:ext cx="1097280" cy="457200"/>
-          </a:xfrm>
-          <a:prstGeom prst="rect">
-            <a:avLst/>
-          </a:prstGeom>
-          <a:noFill/>
-          <a:ln/>
-        </p:spPr>
-        <p:txBody>
-          <a:bodyPr wrap="square" rtlCol="0" anchor="t"/>
+            <a:off x="10177272" y="4754880"/>
+            <a:ext cx="1097280" cy="960120"/>
+          </a:xfrm>
+          <a:prstGeom prst="rect">
+            <a:avLst/>
+          </a:prstGeom>
+          <a:noFill/>
+          <a:ln/>
+        </p:spPr>
+        <p:txBody>
+          <a:bodyPr wrap="square" rtlCol="0" anchor="ctr"/>
           <a:lstStyle/>
           <a:p>
             <a:pPr algn="r" indent="0" marL="0">
               <a:buNone/>
             </a:pPr>
             <a:r>
-              <a:rPr lang="en-US" sz="1400" i="1" dirty="0">
+              <a:rPr lang="en-US" sz="1400" b="1" i="1" dirty="0">
                 <a:solidFill>
                   <a:srgbClr val="17140F"/>
                 </a:solidFill>
@@ -2710,7 +2710,7 @@
               <a:buNone/>
             </a:pPr>
             <a:r>
-              <a:rPr lang="en-US" sz="1600" dirty="0">
+              <a:rPr lang="en-US" sz="1600" b="1" dirty="0">
                 <a:solidFill>
                   <a:srgbClr val="17140F"/>
                 </a:solidFill>
@@ -2730,7 +2730,7 @@
               <a:buNone/>
             </a:pPr>
             <a:r>
-              <a:rPr lang="en-US" sz="1600" dirty="0">
+              <a:rPr lang="en-US" sz="1600" b="1" dirty="0">
                 <a:solidFill>
                   <a:srgbClr val="17140F"/>
                 </a:solidFill>
@@ -2750,7 +2750,7 @@
               <a:buNone/>
             </a:pPr>
             <a:r>
-              <a:rPr lang="en-US" sz="1600" dirty="0">
+              <a:rPr lang="en-US" sz="1600" b="1" dirty="0">
                 <a:solidFill>
                   <a:srgbClr val="17140F"/>
                 </a:solidFill>
@@ -3396,24 +3396,24 @@
         </p:nvSpPr>
         <p:spPr>
           <a:xfrm>
-            <a:off x="914400" y="2011680"/>
-            <a:ext cx="914400" cy="457200"/>
-          </a:xfrm>
-          <a:prstGeom prst="rect">
-            <a:avLst/>
-          </a:prstGeom>
-          <a:noFill/>
-          <a:ln/>
-        </p:spPr>
-        <p:txBody>
-          <a:bodyPr wrap="square" rtlCol="0" anchor="t"/>
-          <a:lstStyle/>
-          <a:p>
-            <a:pPr algn="l" indent="0" marL="0">
-              <a:buNone/>
-            </a:pPr>
-            <a:r>
-              <a:rPr lang="en-US" sz="2200" i="1" dirty="0">
+            <a:off x="914400" y="1920240"/>
+            <a:ext cx="914400" cy="1051560"/>
+          </a:xfrm>
+          <a:prstGeom prst="rect">
+            <a:avLst/>
+          </a:prstGeom>
+          <a:noFill/>
+          <a:ln/>
+        </p:spPr>
+        <p:txBody>
+          <a:bodyPr wrap="square" rtlCol="0" anchor="ctr"/>
+          <a:lstStyle/>
+          <a:p>
+            <a:pPr algn="l" indent="0" marL="0">
+              <a:buNone/>
+            </a:pPr>
+            <a:r>
+              <a:rPr lang="en-US" sz="2200" b="1" i="1" dirty="0">
                 <a:solidFill>
                   <a:srgbClr val="17140F"/>
                 </a:solidFill>
@@ -3435,56 +3435,17 @@
         </p:nvSpPr>
         <p:spPr>
           <a:xfrm>
-            <a:off x="1920240" y="2011680"/>
-            <a:ext cx="4206240" cy="320040"/>
-          </a:xfrm>
-          <a:prstGeom prst="rect">
-            <a:avLst/>
-          </a:prstGeom>
-          <a:noFill/>
-          <a:ln/>
-        </p:spPr>
-        <p:txBody>
-          <a:bodyPr wrap="square" rtlCol="0" anchor="t"/>
-          <a:lstStyle/>
-          <a:p>
-            <a:pPr algn="l" indent="0" marL="0">
-              <a:buNone/>
-            </a:pPr>
-            <a:r>
-              <a:rPr lang="en-US" sz="1500" b="1" dirty="0">
-                <a:solidFill>
-                  <a:srgbClr val="17140F"/>
-                </a:solidFill>
-                <a:latin typeface="游明朝" pitchFamily="34" charset="0"/>
-                <a:ea typeface="游明朝" pitchFamily="34" charset="-122"/>
-                <a:cs typeface="游明朝" pitchFamily="34" charset="-120"/>
-              </a:rPr>
-              <a:t>CLT基準法改正</a:t>
-            </a:r>
-            <a:endParaRPr lang="en-US" sz="1500" dirty="0"/>
-          </a:p>
-        </p:txBody>
-      </p:sp>
-      <p:sp>
-        <p:nvSpPr>
-          <p:cNvPr id="9" name="Text 7"/>
-          <p:cNvSpPr/>
-          <p:nvPr/>
-        </p:nvSpPr>
-        <p:spPr>
-          <a:xfrm>
-            <a:off x="1920240" y="2359152"/>
-            <a:ext cx="4206240" cy="530352"/>
-          </a:xfrm>
-          <a:prstGeom prst="rect">
-            <a:avLst/>
-          </a:prstGeom>
-          <a:noFill/>
-          <a:ln/>
-        </p:spPr>
-        <p:txBody>
-          <a:bodyPr wrap="square" rtlCol="0" anchor="t"/>
+            <a:off x="1920240" y="1920240"/>
+            <a:ext cx="4206240" cy="1051560"/>
+          </a:xfrm>
+          <a:prstGeom prst="rect">
+            <a:avLst/>
+          </a:prstGeom>
+          <a:noFill/>
+          <a:ln/>
+        </p:spPr>
+        <p:txBody>
+          <a:bodyPr wrap="square" rtlCol="0" anchor="ctr"/>
           <a:lstStyle/>
           <a:p>
             <a:pPr algn="l" indent="0" marL="0">
@@ -3494,7 +3455,27 @@
               <a:buNone/>
             </a:pPr>
             <a:r>
-              <a:rPr lang="en-US" sz="1300" dirty="0">
+              <a:rPr lang="en-US" sz="1500" b="1" dirty="0">
+                <a:solidFill>
+                  <a:srgbClr val="17140F"/>
+                </a:solidFill>
+                <a:latin typeface="游明朝" pitchFamily="34" charset="0"/>
+                <a:ea typeface="游明朝" pitchFamily="34" charset="-122"/>
+                <a:cs typeface="游明朝" pitchFamily="34" charset="-120"/>
+              </a:rPr>
+              <a:t>CLT基準法改正</a:t>
+            </a:r>
+            <a:endParaRPr lang="en-US" sz="1500" dirty="0"/>
+          </a:p>
+          <a:p>
+            <a:pPr algn="l" indent="0" marL="0">
+              <a:lnSpc>
+                <a:spcPct val="150000"/>
+              </a:lnSpc>
+              <a:buNone/>
+            </a:pPr>
+            <a:r>
+              <a:rPr lang="en-US" sz="1300" b="1" dirty="0">
                 <a:solidFill>
                   <a:srgbClr val="17140F"/>
                 </a:solidFill>
@@ -3504,13 +3485,13 @@
               </a:rPr>
               <a:t>直交集成板が一般的な構造材料として基準法に位置づけ。</a:t>
             </a:r>
-            <a:endParaRPr lang="en-US" sz="1300" dirty="0"/>
-          </a:p>
-        </p:txBody>
-      </p:sp>
-      <p:sp>
-        <p:nvSpPr>
-          <p:cNvPr id="10" name="Shape 8"/>
+            <a:endParaRPr lang="en-US" sz="1500" dirty="0"/>
+          </a:p>
+        </p:txBody>
+      </p:sp>
+      <p:sp>
+        <p:nvSpPr>
+          <p:cNvPr id="9" name="Shape 7"/>
           <p:cNvSpPr/>
           <p:nvPr/>
         </p:nvSpPr>
@@ -3530,101 +3511,62 @@
       </p:sp>
       <p:sp>
         <p:nvSpPr>
+          <p:cNvPr id="10" name="Text 8"/>
+          <p:cNvSpPr/>
+          <p:nvPr/>
+        </p:nvSpPr>
+        <p:spPr>
+          <a:xfrm>
+            <a:off x="914400" y="2971800"/>
+            <a:ext cx="914400" cy="1051560"/>
+          </a:xfrm>
+          <a:prstGeom prst="rect">
+            <a:avLst/>
+          </a:prstGeom>
+          <a:noFill/>
+          <a:ln/>
+        </p:spPr>
+        <p:txBody>
+          <a:bodyPr wrap="square" rtlCol="0" anchor="ctr"/>
+          <a:lstStyle/>
+          <a:p>
+            <a:pPr algn="l" indent="0" marL="0">
+              <a:buNone/>
+            </a:pPr>
+            <a:r>
+              <a:rPr lang="en-US" sz="2200" b="1" i="1" dirty="0">
+                <a:solidFill>
+                  <a:srgbClr val="17140F"/>
+                </a:solidFill>
+                <a:latin typeface="游明朝" pitchFamily="34" charset="0"/>
+                <a:ea typeface="游明朝" pitchFamily="34" charset="-122"/>
+                <a:cs typeface="游明朝" pitchFamily="34" charset="-120"/>
+              </a:rPr>
+              <a:t>2022</a:t>
+            </a:r>
+            <a:endParaRPr lang="en-US" sz="2200" dirty="0"/>
+          </a:p>
+        </p:txBody>
+      </p:sp>
+      <p:sp>
+        <p:nvSpPr>
           <p:cNvPr id="11" name="Text 9"/>
           <p:cNvSpPr/>
           <p:nvPr/>
         </p:nvSpPr>
         <p:spPr>
           <a:xfrm>
-            <a:off x="914400" y="3063240"/>
-            <a:ext cx="914400" cy="457200"/>
-          </a:xfrm>
-          <a:prstGeom prst="rect">
-            <a:avLst/>
-          </a:prstGeom>
-          <a:noFill/>
-          <a:ln/>
-        </p:spPr>
-        <p:txBody>
-          <a:bodyPr wrap="square" rtlCol="0" anchor="t"/>
-          <a:lstStyle/>
-          <a:p>
-            <a:pPr algn="l" indent="0" marL="0">
-              <a:buNone/>
-            </a:pPr>
-            <a:r>
-              <a:rPr lang="en-US" sz="2200" i="1" dirty="0">
-                <a:solidFill>
-                  <a:srgbClr val="17140F"/>
-                </a:solidFill>
-                <a:latin typeface="游明朝" pitchFamily="34" charset="0"/>
-                <a:ea typeface="游明朝" pitchFamily="34" charset="-122"/>
-                <a:cs typeface="游明朝" pitchFamily="34" charset="-120"/>
-              </a:rPr>
-              <a:t>2022</a:t>
-            </a:r>
-            <a:endParaRPr lang="en-US" sz="2200" dirty="0"/>
-          </a:p>
-        </p:txBody>
-      </p:sp>
-      <p:sp>
-        <p:nvSpPr>
-          <p:cNvPr id="12" name="Text 10"/>
-          <p:cNvSpPr/>
-          <p:nvPr/>
-        </p:nvSpPr>
-        <p:spPr>
-          <a:xfrm>
-            <a:off x="1920240" y="3063240"/>
-            <a:ext cx="4206240" cy="320040"/>
-          </a:xfrm>
-          <a:prstGeom prst="rect">
-            <a:avLst/>
-          </a:prstGeom>
-          <a:noFill/>
-          <a:ln/>
-        </p:spPr>
-        <p:txBody>
-          <a:bodyPr wrap="square" rtlCol="0" anchor="t"/>
-          <a:lstStyle/>
-          <a:p>
-            <a:pPr algn="l" indent="0" marL="0">
-              <a:buNone/>
-            </a:pPr>
-            <a:r>
-              <a:rPr lang="en-US" sz="1500" b="1" dirty="0">
-                <a:solidFill>
-                  <a:srgbClr val="17140F"/>
-                </a:solidFill>
-                <a:latin typeface="游明朝" pitchFamily="34" charset="0"/>
-                <a:ea typeface="游明朝" pitchFamily="34" charset="-122"/>
-                <a:cs typeface="游明朝" pitchFamily="34" charset="-120"/>
-              </a:rPr>
-              <a:t>木材利用促進法</a:t>
-            </a:r>
-            <a:endParaRPr lang="en-US" sz="1500" dirty="0"/>
-          </a:p>
-        </p:txBody>
-      </p:sp>
-      <p:sp>
-        <p:nvSpPr>
-          <p:cNvPr id="13" name="Text 11"/>
-          <p:cNvSpPr/>
-          <p:nvPr/>
-        </p:nvSpPr>
-        <p:spPr>
-          <a:xfrm>
-            <a:off x="1920240" y="3410712"/>
-            <a:ext cx="4206240" cy="530352"/>
-          </a:xfrm>
-          <a:prstGeom prst="rect">
-            <a:avLst/>
-          </a:prstGeom>
-          <a:noFill/>
-          <a:ln/>
-        </p:spPr>
-        <p:txBody>
-          <a:bodyPr wrap="square" rtlCol="0" anchor="t"/>
+            <a:off x="1920240" y="2971800"/>
+            <a:ext cx="4206240" cy="1051560"/>
+          </a:xfrm>
+          <a:prstGeom prst="rect">
+            <a:avLst/>
+          </a:prstGeom>
+          <a:noFill/>
+          <a:ln/>
+        </p:spPr>
+        <p:txBody>
+          <a:bodyPr wrap="square" rtlCol="0" anchor="ctr"/>
           <a:lstStyle/>
           <a:p>
             <a:pPr algn="l" indent="0" marL="0">
@@ -3634,7 +3576,27 @@
               <a:buNone/>
             </a:pPr>
             <a:r>
-              <a:rPr lang="en-US" sz="1300" dirty="0">
+              <a:rPr lang="en-US" sz="1500" b="1" dirty="0">
+                <a:solidFill>
+                  <a:srgbClr val="17140F"/>
+                </a:solidFill>
+                <a:latin typeface="游明朝" pitchFamily="34" charset="0"/>
+                <a:ea typeface="游明朝" pitchFamily="34" charset="-122"/>
+                <a:cs typeface="游明朝" pitchFamily="34" charset="-120"/>
+              </a:rPr>
+              <a:t>木材利用促進法</a:t>
+            </a:r>
+            <a:endParaRPr lang="en-US" sz="1500" dirty="0"/>
+          </a:p>
+          <a:p>
+            <a:pPr algn="l" indent="0" marL="0">
+              <a:lnSpc>
+                <a:spcPct val="150000"/>
+              </a:lnSpc>
+              <a:buNone/>
+            </a:pPr>
+            <a:r>
+              <a:rPr lang="en-US" sz="1300" b="1" dirty="0">
                 <a:solidFill>
                   <a:srgbClr val="17140F"/>
                 </a:solidFill>
@@ -3644,13 +3606,13 @@
               </a:rPr>
               <a:t>公共だけでなく民間建築物にも木材利用を拡大。</a:t>
             </a:r>
-            <a:endParaRPr lang="en-US" sz="1300" dirty="0"/>
-          </a:p>
-        </p:txBody>
-      </p:sp>
-      <p:sp>
-        <p:nvSpPr>
-          <p:cNvPr id="14" name="Shape 12"/>
+            <a:endParaRPr lang="en-US" sz="1500" dirty="0"/>
+          </a:p>
+        </p:txBody>
+      </p:sp>
+      <p:sp>
+        <p:nvSpPr>
+          <p:cNvPr id="12" name="Shape 10"/>
           <p:cNvSpPr/>
           <p:nvPr/>
         </p:nvSpPr>
@@ -3670,30 +3632,30 @@
       </p:sp>
       <p:sp>
         <p:nvSpPr>
-          <p:cNvPr id="15" name="Text 13"/>
-          <p:cNvSpPr/>
-          <p:nvPr/>
-        </p:nvSpPr>
-        <p:spPr>
-          <a:xfrm>
-            <a:off x="914400" y="4114800"/>
-            <a:ext cx="914400" cy="457200"/>
-          </a:xfrm>
-          <a:prstGeom prst="rect">
-            <a:avLst/>
-          </a:prstGeom>
-          <a:noFill/>
-          <a:ln/>
-        </p:spPr>
-        <p:txBody>
-          <a:bodyPr wrap="square" rtlCol="0" anchor="t"/>
-          <a:lstStyle/>
-          <a:p>
-            <a:pPr algn="l" indent="0" marL="0">
-              <a:buNone/>
-            </a:pPr>
-            <a:r>
-              <a:rPr lang="en-US" sz="2200" i="1" dirty="0">
+          <p:cNvPr id="13" name="Text 11"/>
+          <p:cNvSpPr/>
+          <p:nvPr/>
+        </p:nvSpPr>
+        <p:spPr>
+          <a:xfrm>
+            <a:off x="914400" y="4023360"/>
+            <a:ext cx="914400" cy="1051560"/>
+          </a:xfrm>
+          <a:prstGeom prst="rect">
+            <a:avLst/>
+          </a:prstGeom>
+          <a:noFill/>
+          <a:ln/>
+        </p:spPr>
+        <p:txBody>
+          <a:bodyPr wrap="square" rtlCol="0" anchor="ctr"/>
+          <a:lstStyle/>
+          <a:p>
+            <a:pPr algn="l" indent="0" marL="0">
+              <a:buNone/>
+            </a:pPr>
+            <a:r>
+              <a:rPr lang="en-US" sz="2200" b="1" i="1" dirty="0">
                 <a:solidFill>
                   <a:srgbClr val="17140F"/>
                 </a:solidFill>
@@ -3709,62 +3671,23 @@
       </p:sp>
       <p:sp>
         <p:nvSpPr>
-          <p:cNvPr id="16" name="Text 14"/>
-          <p:cNvSpPr/>
-          <p:nvPr/>
-        </p:nvSpPr>
-        <p:spPr>
-          <a:xfrm>
-            <a:off x="1920240" y="4114800"/>
-            <a:ext cx="4206240" cy="320040"/>
-          </a:xfrm>
-          <a:prstGeom prst="rect">
-            <a:avLst/>
-          </a:prstGeom>
-          <a:noFill/>
-          <a:ln/>
-        </p:spPr>
-        <p:txBody>
-          <a:bodyPr wrap="square" rtlCol="0" anchor="t"/>
-          <a:lstStyle/>
-          <a:p>
-            <a:pPr algn="l" indent="0" marL="0">
-              <a:buNone/>
-            </a:pPr>
-            <a:r>
-              <a:rPr lang="en-US" sz="1500" b="1" dirty="0">
-                <a:solidFill>
-                  <a:srgbClr val="17140F"/>
-                </a:solidFill>
-                <a:latin typeface="游明朝" pitchFamily="34" charset="0"/>
-                <a:ea typeface="游明朝" pitchFamily="34" charset="-122"/>
-                <a:cs typeface="游明朝" pitchFamily="34" charset="-120"/>
-              </a:rPr>
-              <a:t>中高層木造の増加</a:t>
-            </a:r>
-            <a:endParaRPr lang="en-US" sz="1500" dirty="0"/>
-          </a:p>
-        </p:txBody>
-      </p:sp>
-      <p:sp>
-        <p:nvSpPr>
-          <p:cNvPr id="17" name="Text 15"/>
-          <p:cNvSpPr/>
-          <p:nvPr/>
-        </p:nvSpPr>
-        <p:spPr>
-          <a:xfrm>
-            <a:off x="1920240" y="4462272"/>
-            <a:ext cx="4206240" cy="530352"/>
-          </a:xfrm>
-          <a:prstGeom prst="rect">
-            <a:avLst/>
-          </a:prstGeom>
-          <a:noFill/>
-          <a:ln/>
-        </p:spPr>
-        <p:txBody>
-          <a:bodyPr wrap="square" rtlCol="0" anchor="t"/>
+          <p:cNvPr id="14" name="Text 12"/>
+          <p:cNvSpPr/>
+          <p:nvPr/>
+        </p:nvSpPr>
+        <p:spPr>
+          <a:xfrm>
+            <a:off x="1920240" y="4023360"/>
+            <a:ext cx="4206240" cy="1051560"/>
+          </a:xfrm>
+          <a:prstGeom prst="rect">
+            <a:avLst/>
+          </a:prstGeom>
+          <a:noFill/>
+          <a:ln/>
+        </p:spPr>
+        <p:txBody>
+          <a:bodyPr wrap="square" rtlCol="0" anchor="ctr"/>
           <a:lstStyle/>
           <a:p>
             <a:pPr algn="l" indent="0" marL="0">
@@ -3774,7 +3697,27 @@
               <a:buNone/>
             </a:pPr>
             <a:r>
-              <a:rPr lang="en-US" sz="1300" dirty="0">
+              <a:rPr lang="en-US" sz="1500" b="1" dirty="0">
+                <a:solidFill>
+                  <a:srgbClr val="17140F"/>
+                </a:solidFill>
+                <a:latin typeface="游明朝" pitchFamily="34" charset="0"/>
+                <a:ea typeface="游明朝" pitchFamily="34" charset="-122"/>
+                <a:cs typeface="游明朝" pitchFamily="34" charset="-120"/>
+              </a:rPr>
+              <a:t>中高層木造の増加</a:t>
+            </a:r>
+            <a:endParaRPr lang="en-US" sz="1500" dirty="0"/>
+          </a:p>
+          <a:p>
+            <a:pPr algn="l" indent="0" marL="0">
+              <a:lnSpc>
+                <a:spcPct val="150000"/>
+              </a:lnSpc>
+              <a:buNone/>
+            </a:pPr>
+            <a:r>
+              <a:rPr lang="en-US" sz="1300" b="1" dirty="0">
                 <a:solidFill>
                   <a:srgbClr val="17140F"/>
                 </a:solidFill>
@@ -3784,13 +3727,13 @@
               </a:rPr>
               <a:t>10階以上の木造ビルが国内で複数竣工。</a:t>
             </a:r>
-            <a:endParaRPr lang="en-US" sz="1300" dirty="0"/>
-          </a:p>
-        </p:txBody>
-      </p:sp>
-      <p:sp>
-        <p:nvSpPr>
-          <p:cNvPr id="18" name="Shape 16"/>
+            <a:endParaRPr lang="en-US" sz="1500" dirty="0"/>
+          </a:p>
+        </p:txBody>
+      </p:sp>
+      <p:sp>
+        <p:nvSpPr>
+          <p:cNvPr id="15" name="Shape 13"/>
           <p:cNvSpPr/>
           <p:nvPr/>
         </p:nvSpPr>
@@ -3810,30 +3753,30 @@
       </p:sp>
       <p:sp>
         <p:nvSpPr>
-          <p:cNvPr id="19" name="Text 17"/>
-          <p:cNvSpPr/>
-          <p:nvPr/>
-        </p:nvSpPr>
-        <p:spPr>
-          <a:xfrm>
-            <a:off x="914400" y="5166360"/>
-            <a:ext cx="914400" cy="457200"/>
-          </a:xfrm>
-          <a:prstGeom prst="rect">
-            <a:avLst/>
-          </a:prstGeom>
-          <a:noFill/>
-          <a:ln/>
-        </p:spPr>
-        <p:txBody>
-          <a:bodyPr wrap="square" rtlCol="0" anchor="t"/>
-          <a:lstStyle/>
-          <a:p>
-            <a:pPr algn="l" indent="0" marL="0">
-              <a:buNone/>
-            </a:pPr>
-            <a:r>
-              <a:rPr lang="en-US" sz="2200" i="1" dirty="0">
+          <p:cNvPr id="16" name="Text 14"/>
+          <p:cNvSpPr/>
+          <p:nvPr/>
+        </p:nvSpPr>
+        <p:spPr>
+          <a:xfrm>
+            <a:off x="914400" y="5074920"/>
+            <a:ext cx="914400" cy="1051560"/>
+          </a:xfrm>
+          <a:prstGeom prst="rect">
+            <a:avLst/>
+          </a:prstGeom>
+          <a:noFill/>
+          <a:ln/>
+        </p:spPr>
+        <p:txBody>
+          <a:bodyPr wrap="square" rtlCol="0" anchor="ctr"/>
+          <a:lstStyle/>
+          <a:p>
+            <a:pPr algn="l" indent="0" marL="0">
+              <a:buNone/>
+            </a:pPr>
+            <a:r>
+              <a:rPr lang="en-US" sz="2200" b="1" i="1" dirty="0">
                 <a:solidFill>
                   <a:srgbClr val="6B6560"/>
                 </a:solidFill>
@@ -3849,62 +3792,23 @@
       </p:sp>
       <p:sp>
         <p:nvSpPr>
-          <p:cNvPr id="20" name="Text 18"/>
-          <p:cNvSpPr/>
-          <p:nvPr/>
-        </p:nvSpPr>
-        <p:spPr>
-          <a:xfrm>
-            <a:off x="1920240" y="5166360"/>
-            <a:ext cx="4206240" cy="320040"/>
-          </a:xfrm>
-          <a:prstGeom prst="rect">
-            <a:avLst/>
-          </a:prstGeom>
-          <a:noFill/>
-          <a:ln/>
-        </p:spPr>
-        <p:txBody>
-          <a:bodyPr wrap="square" rtlCol="0" anchor="t"/>
-          <a:lstStyle/>
-          <a:p>
-            <a:pPr algn="l" indent="0" marL="0">
-              <a:buNone/>
-            </a:pPr>
-            <a:r>
-              <a:rPr lang="en-US" sz="1500" b="1" dirty="0">
-                <a:solidFill>
-                  <a:srgbClr val="6B6560"/>
-                </a:solidFill>
-                <a:latin typeface="游明朝" pitchFamily="34" charset="0"/>
-                <a:ea typeface="游明朝" pitchFamily="34" charset="-122"/>
-                <a:cs typeface="游明朝" pitchFamily="34" charset="-120"/>
-              </a:rPr>
-              <a:t>木造比率目標</a:t>
-            </a:r>
-            <a:endParaRPr lang="en-US" sz="1500" dirty="0"/>
-          </a:p>
-        </p:txBody>
-      </p:sp>
-      <p:sp>
-        <p:nvSpPr>
-          <p:cNvPr id="21" name="Text 19"/>
-          <p:cNvSpPr/>
-          <p:nvPr/>
-        </p:nvSpPr>
-        <p:spPr>
-          <a:xfrm>
-            <a:off x="1920240" y="5513832"/>
-            <a:ext cx="4206240" cy="530352"/>
-          </a:xfrm>
-          <a:prstGeom prst="rect">
-            <a:avLst/>
-          </a:prstGeom>
-          <a:noFill/>
-          <a:ln/>
-        </p:spPr>
-        <p:txBody>
-          <a:bodyPr wrap="square" rtlCol="0" anchor="t"/>
+          <p:cNvPr id="17" name="Text 15"/>
+          <p:cNvSpPr/>
+          <p:nvPr/>
+        </p:nvSpPr>
+        <p:spPr>
+          <a:xfrm>
+            <a:off x="1920240" y="5074920"/>
+            <a:ext cx="4206240" cy="1051560"/>
+          </a:xfrm>
+          <a:prstGeom prst="rect">
+            <a:avLst/>
+          </a:prstGeom>
+          <a:noFill/>
+          <a:ln/>
+        </p:spPr>
+        <p:txBody>
+          <a:bodyPr wrap="square" rtlCol="0" anchor="ctr"/>
           <a:lstStyle/>
           <a:p>
             <a:pPr algn="l" indent="0" marL="0">
@@ -3914,7 +3818,7 @@
               <a:buNone/>
             </a:pPr>
             <a:r>
-              <a:rPr lang="en-US" sz="1300" dirty="0">
+              <a:rPr lang="en-US" sz="1500" b="1" dirty="0">
                 <a:solidFill>
                   <a:srgbClr val="6B6560"/>
                 </a:solidFill>
@@ -3922,15 +3826,35 @@
                 <a:ea typeface="游明朝" pitchFamily="34" charset="-122"/>
                 <a:cs typeface="游明朝" pitchFamily="34" charset="-120"/>
               </a:rPr>
+              <a:t>木造比率目標</a:t>
+            </a:r>
+            <a:endParaRPr lang="en-US" sz="1500" dirty="0"/>
+          </a:p>
+          <a:p>
+            <a:pPr algn="l" indent="0" marL="0">
+              <a:lnSpc>
+                <a:spcPct val="150000"/>
+              </a:lnSpc>
+              <a:buNone/>
+            </a:pPr>
+            <a:r>
+              <a:rPr lang="en-US" sz="1300" b="1" dirty="0">
+                <a:solidFill>
+                  <a:srgbClr val="6B6560"/>
+                </a:solidFill>
+                <a:latin typeface="游明朝" pitchFamily="34" charset="0"/>
+                <a:ea typeface="游明朝" pitchFamily="34" charset="-122"/>
+                <a:cs typeface="游明朝" pitchFamily="34" charset="-120"/>
+              </a:rPr>
               <a:t>新築の木造比率 40% → 55% へ。</a:t>
             </a:r>
-            <a:endParaRPr lang="en-US" sz="1300" dirty="0"/>
-          </a:p>
-        </p:txBody>
-      </p:sp>
-      <p:sp>
-        <p:nvSpPr>
-          <p:cNvPr id="22" name="Shape 20"/>
+            <a:endParaRPr lang="en-US" sz="1500" dirty="0"/>
+          </a:p>
+        </p:txBody>
+      </p:sp>
+      <p:sp>
+        <p:nvSpPr>
+          <p:cNvPr id="18" name="Shape 16"/>
           <p:cNvSpPr/>
           <p:nvPr/>
         </p:nvSpPr>
@@ -3950,7 +3874,7 @@
       </p:sp>
       <p:sp>
         <p:nvSpPr>
-          <p:cNvPr id="23" name="Text 21"/>
+          <p:cNvPr id="19" name="Text 17"/>
           <p:cNvSpPr/>
           <p:nvPr/>
         </p:nvSpPr>
@@ -3989,7 +3913,7 @@
       </p:sp>
       <p:sp>
         <p:nvSpPr>
-          <p:cNvPr id="24" name="Text 22"/>
+          <p:cNvPr id="20" name="Text 18"/>
           <p:cNvSpPr/>
           <p:nvPr/>
         </p:nvSpPr>
@@ -4042,7 +3966,7 @@
       </p:sp>
       <p:sp>
         <p:nvSpPr>
-          <p:cNvPr id="25" name="Shape 23"/>
+          <p:cNvPr id="21" name="Shape 19"/>
           <p:cNvSpPr/>
           <p:nvPr/>
         </p:nvSpPr>
@@ -4062,7 +3986,7 @@
       </p:sp>
       <p:sp>
         <p:nvSpPr>
-          <p:cNvPr id="26" name="Text 24"/>
+          <p:cNvPr id="22" name="Text 20"/>
           <p:cNvSpPr/>
           <p:nvPr/>
         </p:nvSpPr>
@@ -4088,7 +4012,7 @@
               <a:buNone/>
             </a:pPr>
             <a:r>
-              <a:rPr lang="en-US" sz="1400" dirty="0">
+              <a:rPr lang="en-US" sz="1400" b="1" dirty="0">
                 <a:solidFill>
                   <a:srgbClr val="17140F"/>
                 </a:solidFill>
@@ -4108,7 +4032,7 @@
               <a:buNone/>
             </a:pPr>
             <a:r>
-              <a:rPr lang="en-US" sz="1400" dirty="0">
+              <a:rPr lang="en-US" sz="1400" b="1" dirty="0">
                 <a:solidFill>
                   <a:srgbClr val="17140F"/>
                 </a:solidFill>
@@ -4128,7 +4052,7 @@
               <a:buNone/>
             </a:pPr>
             <a:r>
-              <a:rPr lang="en-US" sz="1400" dirty="0">
+              <a:rPr lang="en-US" sz="1400" b="1" dirty="0">
                 <a:solidFill>
                   <a:srgbClr val="17140F"/>
                 </a:solidFill>
@@ -4294,7 +4218,7 @@
         </p:nvSpPr>
         <p:spPr>
           <a:xfrm>
-            <a:off x="914400" y="3246120"/>
+            <a:off x="914400" y="3218688"/>
             <a:ext cx="3316224" cy="365760"/>
           </a:xfrm>
           <a:prstGeom prst="rect">
@@ -4333,7 +4257,7 @@
         </p:nvSpPr>
         <p:spPr>
           <a:xfrm>
-            <a:off x="914400" y="3657600"/>
+            <a:off x="914400" y="3639312"/>
             <a:ext cx="3316224" cy="1463040"/>
           </a:xfrm>
           <a:prstGeom prst="rect">
@@ -4353,7 +4277,7 @@
               <a:buNone/>
             </a:pPr>
             <a:r>
-              <a:rPr lang="en-US" sz="1400" dirty="0">
+              <a:rPr lang="en-US" sz="1400" b="1" dirty="0">
                 <a:solidFill>
                   <a:srgbClr val="17140F"/>
                 </a:solidFill>
@@ -4448,7 +4372,7 @@
         </p:nvSpPr>
         <p:spPr>
           <a:xfrm>
-            <a:off x="4367784" y="3246120"/>
+            <a:off x="4367784" y="3218688"/>
             <a:ext cx="3316224" cy="365760"/>
           </a:xfrm>
           <a:prstGeom prst="rect">
@@ -4487,7 +4411,7 @@
         </p:nvSpPr>
         <p:spPr>
           <a:xfrm>
-            <a:off x="4367784" y="3657600"/>
+            <a:off x="4367784" y="3639312"/>
             <a:ext cx="3316224" cy="1463040"/>
           </a:xfrm>
           <a:prstGeom prst="rect">
@@ -4507,7 +4431,7 @@
               <a:buNone/>
             </a:pPr>
             <a:r>
-              <a:rPr lang="en-US" sz="1400" dirty="0">
+              <a:rPr lang="en-US" sz="1400" b="1" dirty="0">
                 <a:solidFill>
                   <a:srgbClr val="17140F"/>
                 </a:solidFill>
@@ -4602,7 +4526,7 @@
         </p:nvSpPr>
         <p:spPr>
           <a:xfrm>
-            <a:off x="7821168" y="3246120"/>
+            <a:off x="7821168" y="3218688"/>
             <a:ext cx="3316224" cy="365760"/>
           </a:xfrm>
           <a:prstGeom prst="rect">
@@ -4641,7 +4565,7 @@
         </p:nvSpPr>
         <p:spPr>
           <a:xfrm>
-            <a:off x="7821168" y="3657600"/>
+            <a:off x="7821168" y="3639312"/>
             <a:ext cx="3316224" cy="1463040"/>
           </a:xfrm>
           <a:prstGeom prst="rect">
@@ -4661,7 +4585,7 @@
               <a:buNone/>
             </a:pPr>
             <a:r>
-              <a:rPr lang="en-US" sz="1400" dirty="0">
+              <a:rPr lang="en-US" sz="1400" b="1" dirty="0">
                 <a:solidFill>
                   <a:srgbClr val="17140F"/>
                 </a:solidFill>
@@ -4960,7 +4884,7 @@
               <a:buNone/>
             </a:pPr>
             <a:r>
-              <a:rPr lang="en-US" sz="1400" dirty="0">
+              <a:rPr lang="en-US" sz="1400" b="1" dirty="0">
                 <a:solidFill>
                   <a:srgbClr val="17140F"/>
                 </a:solidFill>
@@ -4980,7 +4904,7 @@
               <a:buNone/>
             </a:pPr>
             <a:r>
-              <a:rPr lang="en-US" sz="1400" dirty="0">
+              <a:rPr lang="en-US" sz="1400" b="1" dirty="0">
                 <a:solidFill>
                   <a:srgbClr val="17140F"/>
                 </a:solidFill>
@@ -5000,7 +4924,7 @@
               <a:buNone/>
             </a:pPr>
             <a:r>
-              <a:rPr lang="en-US" sz="1400" dirty="0">
+              <a:rPr lang="en-US" sz="1400" b="1" dirty="0">
                 <a:solidFill>
                   <a:srgbClr val="17140F"/>
                 </a:solidFill>
@@ -5020,7 +4944,7 @@
               <a:buNone/>
             </a:pPr>
             <a:r>
-              <a:rPr lang="en-US" sz="1400" dirty="0">
+              <a:rPr lang="en-US" sz="1400" b="1" dirty="0">
                 <a:solidFill>
                   <a:srgbClr val="17140F"/>
                 </a:solidFill>
@@ -5241,7 +5165,7 @@
               <a:buNone/>
             </a:pPr>
             <a:r>
-              <a:rPr lang="en-US" sz="1400" dirty="0">
+              <a:rPr lang="en-US" sz="1400" b="1" dirty="0">
                 <a:solidFill>
                   <a:srgbClr val="17140F"/>
                 </a:solidFill>
@@ -5261,7 +5185,7 @@
               <a:buNone/>
             </a:pPr>
             <a:r>
-              <a:rPr lang="en-US" sz="1400" dirty="0">
+              <a:rPr lang="en-US" sz="1400" b="1" dirty="0">
                 <a:solidFill>
                   <a:srgbClr val="17140F"/>
                 </a:solidFill>
@@ -5281,7 +5205,7 @@
               <a:buNone/>
             </a:pPr>
             <a:r>
-              <a:rPr lang="en-US" sz="1400" dirty="0">
+              <a:rPr lang="en-US" sz="1400" b="1" dirty="0">
                 <a:solidFill>
                   <a:srgbClr val="17140F"/>
                 </a:solidFill>
@@ -5301,7 +5225,7 @@
               <a:buNone/>
             </a:pPr>
             <a:r>
-              <a:rPr lang="en-US" sz="1400" dirty="0">
+              <a:rPr lang="en-US" sz="1400" b="1" dirty="0">
                 <a:solidFill>
                   <a:srgbClr val="17140F"/>
                 </a:solidFill>
